--- a/proposal/ai-persona-ux-review-proposal-3patterns.pptx
+++ b/proposal/ai-persona-ux-review-proposal-3patterns.pptx
@@ -2,21 +2,23 @@
 <file path=ppt/presentation.xml><?xml version="1.0" encoding="utf-8"?>
 <p:presentation xmlns:p="http://schemas.openxmlformats.org/presentationml/2006/main">
   <p:sldMasterIdLst>
-    <p:sldMasterId xmlns:r="http://schemas.openxmlformats.org/officeDocument/2006/relationships" id="2147483648" r:id="R8c970287e93f486a"/>
+    <p:sldMasterId xmlns:r="http://schemas.openxmlformats.org/officeDocument/2006/relationships" id="2147483648" r:id="R712327ce885a40e3"/>
   </p:sldMasterIdLst>
   <p:notesMasterIdLst>
-    <p:notesMasterId xmlns:r="http://schemas.openxmlformats.org/officeDocument/2006/relationships" r:id="Ra0b79e1a5e834a4f"/>
+    <p:notesMasterId xmlns:r="http://schemas.openxmlformats.org/officeDocument/2006/relationships" r:id="R1e71c66f0b864e54"/>
   </p:notesMasterIdLst>
   <p:sldIdLst>
-    <p:sldId xmlns:r="http://schemas.openxmlformats.org/officeDocument/2006/relationships" id="256" r:id="Rc7778fcedf9c417c"/>
-    <p:sldId xmlns:r="http://schemas.openxmlformats.org/officeDocument/2006/relationships" id="257" r:id="Rb5278e1a9b8f412a"/>
-    <p:sldId xmlns:r="http://schemas.openxmlformats.org/officeDocument/2006/relationships" id="258" r:id="R4bc8af6246b74182"/>
-    <p:sldId xmlns:r="http://schemas.openxmlformats.org/officeDocument/2006/relationships" id="259" r:id="Rcb148e619ba24ce4"/>
-    <p:sldId xmlns:r="http://schemas.openxmlformats.org/officeDocument/2006/relationships" id="260" r:id="Rd15175dc5138400e"/>
-    <p:sldId xmlns:r="http://schemas.openxmlformats.org/officeDocument/2006/relationships" id="261" r:id="Rfc4c11a51c734a20"/>
-    <p:sldId xmlns:r="http://schemas.openxmlformats.org/officeDocument/2006/relationships" id="262" r:id="Rcd0107dce7f14016"/>
-    <p:sldId xmlns:r="http://schemas.openxmlformats.org/officeDocument/2006/relationships" id="263" r:id="R18dfb98fb9e24d40"/>
-    <p:sldId xmlns:r="http://schemas.openxmlformats.org/officeDocument/2006/relationships" id="264" r:id="Rd4ece20fff064fe5"/>
+    <p:sldId xmlns:r="http://schemas.openxmlformats.org/officeDocument/2006/relationships" id="256" r:id="Rff6bfa0dce5d4670"/>
+    <p:sldId xmlns:r="http://schemas.openxmlformats.org/officeDocument/2006/relationships" id="257" r:id="R9267c2324d104a0c"/>
+    <p:sldId xmlns:r="http://schemas.openxmlformats.org/officeDocument/2006/relationships" id="258" r:id="R74d537af7f4144a4"/>
+    <p:sldId xmlns:r="http://schemas.openxmlformats.org/officeDocument/2006/relationships" id="259" r:id="R0410313bef3c425d"/>
+    <p:sldId xmlns:r="http://schemas.openxmlformats.org/officeDocument/2006/relationships" id="260" r:id="R9ab441b7227e478d"/>
+    <p:sldId xmlns:r="http://schemas.openxmlformats.org/officeDocument/2006/relationships" id="261" r:id="R663c998c1d624f72"/>
+    <p:sldId xmlns:r="http://schemas.openxmlformats.org/officeDocument/2006/relationships" id="262" r:id="R8f26e46744bf4d7a"/>
+    <p:sldId xmlns:r="http://schemas.openxmlformats.org/officeDocument/2006/relationships" id="263" r:id="Rd5e57fe91bf44e50"/>
+    <p:sldId xmlns:r="http://schemas.openxmlformats.org/officeDocument/2006/relationships" id="264" r:id="Re2d9b6af562747d8"/>
+    <p:sldId xmlns:r="http://schemas.openxmlformats.org/officeDocument/2006/relationships" id="265" r:id="R1217d380aff14592"/>
+    <p:sldId xmlns:r="http://schemas.openxmlformats.org/officeDocument/2006/relationships" id="266" r:id="Rc29f5e6f83aa4186"/>
   </p:sldIdLst>
   <p:sldSz cx="12192000" cy="6858000"/>
   <p:notesSz cx="6858000" cy="9144000"/>
@@ -525,6 +527,138 @@
 </p:notes>
 </file>
 
+<file path=ppt/notesSlides/notesSlide10.xml><?xml version="1.0" encoding="utf-8"?>
+<p:notes xmlns:p="http://schemas.openxmlformats.org/presentationml/2006/main">
+  <p:cSld>
+    <p:spTree>
+      <p:nvGrpSpPr>
+        <p:cNvPr id="1" name=""/>
+        <p:cNvGrpSpPr/>
+        <p:nvPr/>
+      </p:nvGrpSpPr>
+      <p:grpSpPr>
+        <a:xfrm xmlns:a="http://schemas.openxmlformats.org/drawingml/2006/main"/>
+      </p:grpSpPr>
+      <p:sp>
+        <p:nvSpPr>
+          <p:cNvPr id="2" name="Slide Image Placeholder 1"/>
+          <p:cNvSpPr>
+            <a:spLocks xmlns:a="http://schemas.openxmlformats.org/drawingml/2006/main" noGrp="1"/>
+          </p:cNvSpPr>
+          <p:nvPr>
+            <p:ph type="sldImg" idx="0"/>
+          </p:nvPr>
+        </p:nvSpPr>
+        <p:spPr/>
+      </p:sp>
+      <p:sp>
+        <p:nvSpPr>
+          <p:cNvPr id="3" name="Notes Placeholder 2"/>
+          <p:cNvSpPr>
+            <a:spLocks xmlns:a="http://schemas.openxmlformats.org/drawingml/2006/main" noGrp="1"/>
+          </p:cNvSpPr>
+          <p:nvPr>
+            <p:ph type="body" idx="1"/>
+          </p:nvPr>
+        </p:nvSpPr>
+        <p:spPr/>
+        <p:txBody>
+          <a:bodyPr xmlns:a="http://schemas.openxmlformats.org/drawingml/2006/main"/>
+          <a:lstStyle xmlns:a="http://schemas.openxmlformats.org/drawingml/2006/main"/>
+          <a:p xmlns:a="http://schemas.openxmlformats.org/drawingml/2006/main"/>
+        </p:txBody>
+      </p:sp>
+      <p:sp>
+        <p:nvSpPr>
+          <p:cNvPr id="4" name="Slide Number Placeholder 3"/>
+          <p:cNvSpPr>
+            <a:spLocks xmlns:a="http://schemas.openxmlformats.org/drawingml/2006/main" noGrp="1"/>
+          </p:cNvSpPr>
+          <p:nvPr>
+            <p:ph type="sldNum" idx="5"/>
+          </p:nvPr>
+        </p:nvSpPr>
+        <p:spPr/>
+        <p:txBody>
+          <a:bodyPr xmlns:a="http://schemas.openxmlformats.org/drawingml/2006/main"/>
+          <a:lstStyle xmlns:a="http://schemas.openxmlformats.org/drawingml/2006/main"/>
+          <a:p xmlns:a="http://schemas.openxmlformats.org/drawingml/2006/main"/>
+        </p:txBody>
+      </p:sp>
+    </p:spTree>
+  </p:cSld>
+  <p:clrMapOvr>
+    <a:masterClrMapping xmlns:a="http://schemas.openxmlformats.org/drawingml/2006/main"/>
+  </p:clrMapOvr>
+</p:notes>
+</file>
+
+<file path=ppt/notesSlides/notesSlide11.xml><?xml version="1.0" encoding="utf-8"?>
+<p:notes xmlns:p="http://schemas.openxmlformats.org/presentationml/2006/main">
+  <p:cSld>
+    <p:spTree>
+      <p:nvGrpSpPr>
+        <p:cNvPr id="1" name=""/>
+        <p:cNvGrpSpPr/>
+        <p:nvPr/>
+      </p:nvGrpSpPr>
+      <p:grpSpPr>
+        <a:xfrm xmlns:a="http://schemas.openxmlformats.org/drawingml/2006/main"/>
+      </p:grpSpPr>
+      <p:sp>
+        <p:nvSpPr>
+          <p:cNvPr id="2" name="Slide Image Placeholder 1"/>
+          <p:cNvSpPr>
+            <a:spLocks xmlns:a="http://schemas.openxmlformats.org/drawingml/2006/main" noGrp="1"/>
+          </p:cNvSpPr>
+          <p:nvPr>
+            <p:ph type="sldImg" idx="0"/>
+          </p:nvPr>
+        </p:nvSpPr>
+        <p:spPr/>
+      </p:sp>
+      <p:sp>
+        <p:nvSpPr>
+          <p:cNvPr id="3" name="Notes Placeholder 2"/>
+          <p:cNvSpPr>
+            <a:spLocks xmlns:a="http://schemas.openxmlformats.org/drawingml/2006/main" noGrp="1"/>
+          </p:cNvSpPr>
+          <p:nvPr>
+            <p:ph type="body" idx="1"/>
+          </p:nvPr>
+        </p:nvSpPr>
+        <p:spPr/>
+        <p:txBody>
+          <a:bodyPr xmlns:a="http://schemas.openxmlformats.org/drawingml/2006/main"/>
+          <a:lstStyle xmlns:a="http://schemas.openxmlformats.org/drawingml/2006/main"/>
+          <a:p xmlns:a="http://schemas.openxmlformats.org/drawingml/2006/main"/>
+        </p:txBody>
+      </p:sp>
+      <p:sp>
+        <p:nvSpPr>
+          <p:cNvPr id="4" name="Slide Number Placeholder 3"/>
+          <p:cNvSpPr>
+            <a:spLocks xmlns:a="http://schemas.openxmlformats.org/drawingml/2006/main" noGrp="1"/>
+          </p:cNvSpPr>
+          <p:nvPr>
+            <p:ph type="sldNum" idx="5"/>
+          </p:nvPr>
+        </p:nvSpPr>
+        <p:spPr/>
+        <p:txBody>
+          <a:bodyPr xmlns:a="http://schemas.openxmlformats.org/drawingml/2006/main"/>
+          <a:lstStyle xmlns:a="http://schemas.openxmlformats.org/drawingml/2006/main"/>
+          <a:p xmlns:a="http://schemas.openxmlformats.org/drawingml/2006/main"/>
+        </p:txBody>
+      </p:sp>
+    </p:spTree>
+  </p:cSld>
+  <p:clrMapOvr>
+    <a:masterClrMapping xmlns:a="http://schemas.openxmlformats.org/drawingml/2006/main"/>
+  </p:clrMapOvr>
+</p:notes>
+</file>
+
 <file path=ppt/notesSlides/notesSlide2.xml><?xml version="1.0" encoding="utf-8"?>
 <p:notes xmlns:p="http://schemas.openxmlformats.org/presentationml/2006/main">
   <p:cSld>
@@ -1091,7 +1225,7 @@
   </p:cSld>
   <p:clrMap bg1="lt1" tx1="dk1" bg2="lt2" tx2="dk2" accent1="accent1" accent2="accent2" accent3="accent3" accent4="accent4" accent5="accent5" accent6="accent6" hlink="hlink" folHlink="folHlink"/>
   <p:sldLayoutIdLst>
-    <p:sldLayoutId xmlns:r="http://schemas.openxmlformats.org/officeDocument/2006/relationships" id="2147483649" r:id="Ra271ee4293c0436d"/>
+    <p:sldLayoutId xmlns:r="http://schemas.openxmlformats.org/officeDocument/2006/relationships" id="2147483649" r:id="R9ac1783a654d4586"/>
   </p:sldLayoutIdLst>
   <p:txStyles>
     <p:titleStyle>
@@ -1390,7 +1524,7 @@
           <p:cNvPr id="1" name="">
             <a:extLst xmlns:a="http://schemas.openxmlformats.org/drawingml/2006/main">
               <a:ext uri="{FF2B5EF4-FFF2-40B4-BE49-F238E27FC236}">
-                <a16:creationId xmlns:a16="http://schemas.microsoft.com/office/drawing/2014/main" id="{BC71F9F2-78DE-44E5-A702-022D1440E6C5}"/>
+                <a16:creationId xmlns:a16="http://schemas.microsoft.com/office/drawing/2014/main" id="{C2DF1D66-D907-4442-B4C5-EB7F36A292A8}"/>
               </a:ext>
             </a:extLst>
           </p:cNvPr>
@@ -1425,7 +1559,7 @@
           <p:cNvPr id="2" name="">
             <a:extLst xmlns:a="http://schemas.openxmlformats.org/drawingml/2006/main">
               <a:ext uri="{FF2B5EF4-FFF2-40B4-BE49-F238E27FC236}">
-                <a16:creationId xmlns:a16="http://schemas.microsoft.com/office/drawing/2014/main" id="{234C6A63-7085-4E42-8456-E990CBC2689B}"/>
+                <a16:creationId xmlns:a16="http://schemas.microsoft.com/office/drawing/2014/main" id="{7B5C3E79-2901-4EDA-9305-12438B804F6D}"/>
               </a:ext>
             </a:extLst>
           </p:cNvPr>
@@ -1489,7 +1623,7 @@
           <p:cNvPr id="3" name="">
             <a:extLst xmlns:a="http://schemas.openxmlformats.org/drawingml/2006/main">
               <a:ext uri="{FF2B5EF4-FFF2-40B4-BE49-F238E27FC236}">
-                <a16:creationId xmlns:a16="http://schemas.microsoft.com/office/drawing/2014/main" id="{39C50B8F-56BD-4D0A-A765-A0AB059DCDD3}"/>
+                <a16:creationId xmlns:a16="http://schemas.microsoft.com/office/drawing/2014/main" id="{CCC33241-EAAD-451D-858A-45AAC3B2936A}"/>
               </a:ext>
             </a:extLst>
           </p:cNvPr>
@@ -1576,7 +1710,7 @@
           <p:cNvPr id="4" name="">
             <a:extLst xmlns:a="http://schemas.openxmlformats.org/drawingml/2006/main">
               <a:ext uri="{FF2B5EF4-FFF2-40B4-BE49-F238E27FC236}">
-                <a16:creationId xmlns:a16="http://schemas.microsoft.com/office/drawing/2014/main" id="{12F8384C-5973-44C0-8CD8-1973604A187C}"/>
+                <a16:creationId xmlns:a16="http://schemas.microsoft.com/office/drawing/2014/main" id="{1ED9B319-1306-483E-B924-1328EA892104}"/>
               </a:ext>
             </a:extLst>
           </p:cNvPr>
@@ -1640,7 +1774,7 @@
           <p:cNvPr id="5" name="">
             <a:extLst xmlns:a="http://schemas.openxmlformats.org/drawingml/2006/main">
               <a:ext uri="{FF2B5EF4-FFF2-40B4-BE49-F238E27FC236}">
-                <a16:creationId xmlns:a16="http://schemas.microsoft.com/office/drawing/2014/main" id="{47E3C938-2719-45F9-8282-F8168CAE3402}"/>
+                <a16:creationId xmlns:a16="http://schemas.microsoft.com/office/drawing/2014/main" id="{84408C1D-D030-41B7-AA1C-B41542A4EDCC}"/>
               </a:ext>
             </a:extLst>
           </p:cNvPr>
@@ -1673,7 +1807,7 @@
           <p:cNvPr id="6" name="">
             <a:extLst xmlns:a="http://schemas.openxmlformats.org/drawingml/2006/main">
               <a:ext uri="{FF2B5EF4-FFF2-40B4-BE49-F238E27FC236}">
-                <a16:creationId xmlns:a16="http://schemas.microsoft.com/office/drawing/2014/main" id="{9FC8916F-2452-4E03-9C08-9989DC5FE8A7}"/>
+                <a16:creationId xmlns:a16="http://schemas.microsoft.com/office/drawing/2014/main" id="{0A1BAD19-38BB-48D8-A0AC-F5C118177A73}"/>
               </a:ext>
             </a:extLst>
           </p:cNvPr>
@@ -1737,7 +1871,7 @@
           <p:cNvPr id="7" name="">
             <a:extLst xmlns:a="http://schemas.openxmlformats.org/drawingml/2006/main">
               <a:ext uri="{FF2B5EF4-FFF2-40B4-BE49-F238E27FC236}">
-                <a16:creationId xmlns:a16="http://schemas.microsoft.com/office/drawing/2014/main" id="{8E688A5E-B695-4616-8E0C-245A3429F2B6}"/>
+                <a16:creationId xmlns:a16="http://schemas.microsoft.com/office/drawing/2014/main" id="{34443598-1565-4274-BD76-5398BE9B373A}"/>
               </a:ext>
             </a:extLst>
           </p:cNvPr>
@@ -1801,7 +1935,7 @@
           <p:cNvPr id="8" name="">
             <a:extLst xmlns:a="http://schemas.openxmlformats.org/drawingml/2006/main">
               <a:ext uri="{FF2B5EF4-FFF2-40B4-BE49-F238E27FC236}">
-                <a16:creationId xmlns:a16="http://schemas.microsoft.com/office/drawing/2014/main" id="{3F12C509-7BB3-43D5-A167-FFD4CC02C525}"/>
+                <a16:creationId xmlns:a16="http://schemas.microsoft.com/office/drawing/2014/main" id="{882A5E97-098E-464B-90B8-1730190BF925}"/>
               </a:ext>
             </a:extLst>
           </p:cNvPr>
@@ -1865,7 +1999,7 @@
           <p:cNvPr id="9" name="">
             <a:extLst xmlns:a="http://schemas.openxmlformats.org/drawingml/2006/main">
               <a:ext uri="{FF2B5EF4-FFF2-40B4-BE49-F238E27FC236}">
-                <a16:creationId xmlns:a16="http://schemas.microsoft.com/office/drawing/2014/main" id="{276EB1DD-C0A2-4C8B-9A27-5C3990DF6B82}"/>
+                <a16:creationId xmlns:a16="http://schemas.microsoft.com/office/drawing/2014/main" id="{759F4A35-0E28-4FC3-BEF3-3498AE612F47}"/>
               </a:ext>
             </a:extLst>
           </p:cNvPr>
@@ -1929,7 +2063,7 @@
           <p:cNvPr id="10" name="">
             <a:extLst xmlns:a="http://schemas.openxmlformats.org/drawingml/2006/main">
               <a:ext uri="{FF2B5EF4-FFF2-40B4-BE49-F238E27FC236}">
-                <a16:creationId xmlns:a16="http://schemas.microsoft.com/office/drawing/2014/main" id="{3C2736CD-2662-45F7-B029-2B007BEE3B1B}"/>
+                <a16:creationId xmlns:a16="http://schemas.microsoft.com/office/drawing/2014/main" id="{CDFB949A-A81A-4E13-A5D8-05B0DFCFB4C0}"/>
               </a:ext>
             </a:extLst>
           </p:cNvPr>
@@ -1993,7 +2127,7 @@
           <p:cNvPr id="11" name="">
             <a:extLst xmlns:a="http://schemas.openxmlformats.org/drawingml/2006/main">
               <a:ext uri="{FF2B5EF4-FFF2-40B4-BE49-F238E27FC236}">
-                <a16:creationId xmlns:a16="http://schemas.microsoft.com/office/drawing/2014/main" id="{4720C216-9F34-432C-BB2E-60F1FFE2AE79}"/>
+                <a16:creationId xmlns:a16="http://schemas.microsoft.com/office/drawing/2014/main" id="{BE3190D7-C5FD-4598-AC84-3F0994D964B8}"/>
               </a:ext>
             </a:extLst>
           </p:cNvPr>
@@ -2057,7 +2191,7 @@
           <p:cNvPr id="12" name="">
             <a:extLst xmlns:a="http://schemas.openxmlformats.org/drawingml/2006/main">
               <a:ext uri="{FF2B5EF4-FFF2-40B4-BE49-F238E27FC236}">
-                <a16:creationId xmlns:a16="http://schemas.microsoft.com/office/drawing/2014/main" id="{B287DE36-C04E-466E-99E9-FC51310FFDAE}"/>
+                <a16:creationId xmlns:a16="http://schemas.microsoft.com/office/drawing/2014/main" id="{A647D0FD-CD46-4F6B-A4AA-7A6F2AF966F2}"/>
               </a:ext>
             </a:extLst>
           </p:cNvPr>
@@ -2121,7 +2255,7 @@
           <p:cNvPr id="13" name="">
             <a:extLst xmlns:a="http://schemas.openxmlformats.org/drawingml/2006/main">
               <a:ext uri="{FF2B5EF4-FFF2-40B4-BE49-F238E27FC236}">
-                <a16:creationId xmlns:a16="http://schemas.microsoft.com/office/drawing/2014/main" id="{22DE13B6-22D9-4AC9-854A-4D60F211F8A7}"/>
+                <a16:creationId xmlns:a16="http://schemas.microsoft.com/office/drawing/2014/main" id="{5203B292-5CA1-4640-9878-BDE9F1CEC291}"/>
               </a:ext>
             </a:extLst>
           </p:cNvPr>
@@ -2185,7 +2319,7 @@
           <p:cNvPr id="14" name="">
             <a:extLst xmlns:a="http://schemas.openxmlformats.org/drawingml/2006/main">
               <a:ext uri="{FF2B5EF4-FFF2-40B4-BE49-F238E27FC236}">
-                <a16:creationId xmlns:a16="http://schemas.microsoft.com/office/drawing/2014/main" id="{79AC3395-F96C-4133-AA79-1FD5D94DB996}"/>
+                <a16:creationId xmlns:a16="http://schemas.microsoft.com/office/drawing/2014/main" id="{DF448CBC-3B1F-40C6-B0A5-5888B17CAC1D}"/>
               </a:ext>
             </a:extLst>
           </p:cNvPr>
@@ -2249,7 +2383,7 @@
           <p:cNvPr id="15" name="">
             <a:extLst xmlns:a="http://schemas.openxmlformats.org/drawingml/2006/main">
               <a:ext uri="{FF2B5EF4-FFF2-40B4-BE49-F238E27FC236}">
-                <a16:creationId xmlns:a16="http://schemas.microsoft.com/office/drawing/2014/main" id="{58793128-E433-4DF0-86DC-20DEF114BDE5}"/>
+                <a16:creationId xmlns:a16="http://schemas.microsoft.com/office/drawing/2014/main" id="{BDF5CC64-6BDC-4D4F-89D2-EC9DB06BBDE8}"/>
               </a:ext>
             </a:extLst>
           </p:cNvPr>
@@ -2313,7 +2447,7 @@
           <p:cNvPr id="16" name="">
             <a:extLst xmlns:a="http://schemas.openxmlformats.org/drawingml/2006/main">
               <a:ext uri="{FF2B5EF4-FFF2-40B4-BE49-F238E27FC236}">
-                <a16:creationId xmlns:a16="http://schemas.microsoft.com/office/drawing/2014/main" id="{4B0FCB92-879D-4BF9-AC69-D116E3C9B1AE}"/>
+                <a16:creationId xmlns:a16="http://schemas.microsoft.com/office/drawing/2014/main" id="{E7179579-3A48-427D-BA8A-7B77C5DDF5C9}"/>
               </a:ext>
             </a:extLst>
           </p:cNvPr>
@@ -2348,7 +2482,7 @@
           <p:cNvPr id="17" name="">
             <a:extLst xmlns:a="http://schemas.openxmlformats.org/drawingml/2006/main">
               <a:ext uri="{FF2B5EF4-FFF2-40B4-BE49-F238E27FC236}">
-                <a16:creationId xmlns:a16="http://schemas.microsoft.com/office/drawing/2014/main" id="{E46951C5-383B-4788-A119-80701577A590}"/>
+                <a16:creationId xmlns:a16="http://schemas.microsoft.com/office/drawing/2014/main" id="{8E1AEA8F-6B28-4E69-B3B5-4DFE6CC33BD6}"/>
               </a:ext>
             </a:extLst>
           </p:cNvPr>
@@ -2435,7 +2569,7 @@
           <p:cNvPr id="18" name="">
             <a:extLst xmlns:a="http://schemas.openxmlformats.org/drawingml/2006/main">
               <a:ext uri="{FF2B5EF4-FFF2-40B4-BE49-F238E27FC236}">
-                <a16:creationId xmlns:a16="http://schemas.microsoft.com/office/drawing/2014/main" id="{BA4BC168-7E1D-4901-A470-589B83097361}"/>
+                <a16:creationId xmlns:a16="http://schemas.microsoft.com/office/drawing/2014/main" id="{4EA59932-D933-4238-B8B9-3072CED1FF75}"/>
               </a:ext>
             </a:extLst>
           </p:cNvPr>
@@ -2497,7 +2631,2860 @@
     </p:spTree>
     <p:extLst>
       <p:ext uri="{BB962C8B-B14F-4D97-AF65-F5344CB8AC3E}">
-        <p14:creationId xmlns:p14="http://schemas.microsoft.com/office/powerpoint/2010/main" val="1049755309"/>
+        <p14:creationId xmlns:p14="http://schemas.microsoft.com/office/powerpoint/2010/main" val="1478199900"/>
+      </p:ext>
+    </p:extLst>
+  </p:cSld>
+</p:sld>
+</file>
+
+<file path=ppt/slides/slide10.xml><?xml version="1.0" encoding="utf-8"?>
+<p:sld xmlns:p="http://schemas.openxmlformats.org/presentationml/2006/main">
+  <p:cSld>
+    <p:spTree>
+      <p:nvGrpSpPr>
+        <p:cNvPr id="1" name=""/>
+        <p:cNvGrpSpPr/>
+        <p:nvPr/>
+      </p:nvGrpSpPr>
+      <p:grpSpPr>
+        <a:xfrm xmlns:a="http://schemas.openxmlformats.org/drawingml/2006/main"/>
+      </p:grpSpPr>
+      <p:sp>
+        <p:nvSpPr>
+          <p:cNvPr id="1" name="">
+            <a:extLst xmlns:a="http://schemas.openxmlformats.org/drawingml/2006/main">
+              <a:ext uri="{FF2B5EF4-FFF2-40B4-BE49-F238E27FC236}">
+                <a16:creationId xmlns:a16="http://schemas.microsoft.com/office/drawing/2014/main" id="{BBB66D38-FDC9-4CEE-BC78-2813EEF800F8}"/>
+              </a:ext>
+            </a:extLst>
+          </p:cNvPr>
+          <p:cNvSpPr>
+            <a:spLocks xmlns:a="http://schemas.openxmlformats.org/drawingml/2006/main" noGrp="1"/>
+          </p:cNvSpPr>
+          <p:nvPr/>
+        </p:nvSpPr>
+        <p:spPr>
+          <a:xfrm xmlns:a="http://schemas.openxmlformats.org/drawingml/2006/main">
+            <a:off x="0" y="0"/>
+            <a:ext cx="12192000" cy="6858000"/>
+          </a:xfrm>
+          <a:prstGeom xmlns:a="http://schemas.openxmlformats.org/drawingml/2006/main" prst="rect">
+            <a:avLst/>
+          </a:prstGeom>
+          <a:solidFill xmlns:a="http://schemas.openxmlformats.org/drawingml/2006/main">
+            <a:srgbClr val="FBFAF7"/>
+          </a:solidFill>
+          <a:ln xmlns:a="http://schemas.openxmlformats.org/drawingml/2006/main" w="0">
+            <a:solidFill>
+              <a:srgbClr val="000000">
+                <a:alpha val="0"/>
+              </a:srgbClr>
+            </a:solidFill>
+            <a:prstDash val="solid"/>
+          </a:ln>
+        </p:spPr>
+      </p:sp>
+      <p:sp>
+        <p:nvSpPr>
+          <p:cNvPr id="2" name="">
+            <a:extLst xmlns:a="http://schemas.openxmlformats.org/drawingml/2006/main">
+              <a:ext uri="{FF2B5EF4-FFF2-40B4-BE49-F238E27FC236}">
+                <a16:creationId xmlns:a16="http://schemas.microsoft.com/office/drawing/2014/main" id="{2F0352E6-B610-4B20-9E40-F97E1B9622F7}"/>
+              </a:ext>
+            </a:extLst>
+          </p:cNvPr>
+          <p:cNvSpPr>
+            <a:spLocks xmlns:a="http://schemas.openxmlformats.org/drawingml/2006/main" noGrp="1"/>
+          </p:cNvSpPr>
+          <p:nvPr/>
+        </p:nvSpPr>
+        <p:spPr>
+          <a:xfrm xmlns:a="http://schemas.openxmlformats.org/drawingml/2006/main">
+            <a:off x="0" y="0"/>
+            <a:ext cx="12192000" cy="171450"/>
+          </a:xfrm>
+          <a:prstGeom xmlns:a="http://schemas.openxmlformats.org/drawingml/2006/main" prst="rect">
+            <a:avLst/>
+          </a:prstGeom>
+          <a:solidFill xmlns:a="http://schemas.openxmlformats.org/drawingml/2006/main">
+            <a:srgbClr val="10231E"/>
+          </a:solidFill>
+          <a:ln xmlns:a="http://schemas.openxmlformats.org/drawingml/2006/main" w="0">
+            <a:solidFill>
+              <a:srgbClr val="000000">
+                <a:alpha val="0"/>
+              </a:srgbClr>
+            </a:solidFill>
+            <a:prstDash val="solid"/>
+          </a:ln>
+        </p:spPr>
+      </p:sp>
+      <p:sp>
+        <p:nvSpPr>
+          <p:cNvPr id="3" name="">
+            <a:extLst xmlns:a="http://schemas.openxmlformats.org/drawingml/2006/main">
+              <a:ext uri="{FF2B5EF4-FFF2-40B4-BE49-F238E27FC236}">
+                <a16:creationId xmlns:a16="http://schemas.microsoft.com/office/drawing/2014/main" id="{CBF408EC-4FBE-4BFE-8EC0-EA405AA420EA}"/>
+              </a:ext>
+            </a:extLst>
+          </p:cNvPr>
+          <p:cNvSpPr>
+            <a:spLocks xmlns:a="http://schemas.openxmlformats.org/drawingml/2006/main" noGrp="1"/>
+          </p:cNvSpPr>
+          <p:nvPr/>
+        </p:nvSpPr>
+        <p:spPr>
+          <a:xfrm xmlns:a="http://schemas.openxmlformats.org/drawingml/2006/main">
+            <a:off x="514350" y="438150"/>
+            <a:ext cx="2667000" cy="228600"/>
+          </a:xfrm>
+          <a:prstGeom xmlns:a="http://schemas.openxmlformats.org/drawingml/2006/main" prst="rect">
+            <a:avLst/>
+          </a:prstGeom>
+          <a:solidFill xmlns:a="http://schemas.openxmlformats.org/drawingml/2006/main">
+            <a:srgbClr val="000000">
+              <a:alpha val="0"/>
+            </a:srgbClr>
+          </a:solidFill>
+          <a:ln xmlns:a="http://schemas.openxmlformats.org/drawingml/2006/main" w="0">
+            <a:solidFill>
+              <a:srgbClr val="000000">
+                <a:alpha val="0"/>
+              </a:srgbClr>
+            </a:solidFill>
+            <a:prstDash val="solid"/>
+          </a:ln>
+        </p:spPr>
+        <p:txBody>
+          <a:bodyPr xmlns:a="http://schemas.openxmlformats.org/drawingml/2006/main" lIns="0" tIns="0" rIns="0" bIns="0" anchor="t"/>
+          <a:lstStyle xmlns:a="http://schemas.openxmlformats.org/drawingml/2006/main"/>
+          <a:p xmlns:a="http://schemas.openxmlformats.org/drawingml/2006/main">
+            <a:pPr algn="l">
+              <a:defRPr sz="1125" b="1">
+                <a:solidFill>
+                  <a:srgbClr val="2F6F8F"/>
+                </a:solidFill>
+                <a:latin typeface="Aptos"/>
+                <a:ea typeface="Aptos"/>
+                <a:cs typeface="Aptos"/>
+              </a:defRPr>
+            </a:pPr>
+            <a:r>
+              <a:rPr sz="1125" b="1">
+                <a:solidFill>
+                  <a:srgbClr val="2F6F8F"/>
+                </a:solidFill>
+                <a:latin typeface="Aptos"/>
+                <a:ea typeface="Aptos"/>
+                <a:cs typeface="Aptos"/>
+              </a:rPr>
+              <a:t>追加論点 / User Interview</a:t>
+            </a:r>
+          </a:p>
+        </p:txBody>
+      </p:sp>
+      <p:sp>
+        <p:nvSpPr>
+          <p:cNvPr id="4" name="">
+            <a:extLst xmlns:a="http://schemas.openxmlformats.org/drawingml/2006/main">
+              <a:ext uri="{FF2B5EF4-FFF2-40B4-BE49-F238E27FC236}">
+                <a16:creationId xmlns:a16="http://schemas.microsoft.com/office/drawing/2014/main" id="{F1B63555-F9D8-49CB-90D5-6E2520C0B0E9}"/>
+              </a:ext>
+            </a:extLst>
+          </p:cNvPr>
+          <p:cNvSpPr>
+            <a:spLocks xmlns:a="http://schemas.openxmlformats.org/drawingml/2006/main" noGrp="1"/>
+          </p:cNvSpPr>
+          <p:nvPr/>
+        </p:nvSpPr>
+        <p:spPr>
+          <a:xfrm xmlns:a="http://schemas.openxmlformats.org/drawingml/2006/main">
+            <a:off x="514350" y="800100"/>
+            <a:ext cx="7810500" cy="876300"/>
+          </a:xfrm>
+          <a:prstGeom xmlns:a="http://schemas.openxmlformats.org/drawingml/2006/main" prst="rect">
+            <a:avLst/>
+          </a:prstGeom>
+          <a:solidFill xmlns:a="http://schemas.openxmlformats.org/drawingml/2006/main">
+            <a:srgbClr val="000000">
+              <a:alpha val="0"/>
+            </a:srgbClr>
+          </a:solidFill>
+          <a:ln xmlns:a="http://schemas.openxmlformats.org/drawingml/2006/main" w="0">
+            <a:solidFill>
+              <a:srgbClr val="000000">
+                <a:alpha val="0"/>
+              </a:srgbClr>
+            </a:solidFill>
+            <a:prstDash val="solid"/>
+          </a:ln>
+        </p:spPr>
+        <p:txBody>
+          <a:bodyPr xmlns:a="http://schemas.openxmlformats.org/drawingml/2006/main" lIns="0" tIns="0" rIns="0" bIns="0" anchor="t"/>
+          <a:lstStyle xmlns:a="http://schemas.openxmlformats.org/drawingml/2006/main"/>
+          <a:p xmlns:a="http://schemas.openxmlformats.org/drawingml/2006/main">
+            <a:pPr algn="l">
+              <a:defRPr sz="2550" b="1">
+                <a:solidFill>
+                  <a:srgbClr val="151D1A"/>
+                </a:solidFill>
+                <a:latin typeface="Aptos"/>
+                <a:ea typeface="Aptos"/>
+                <a:cs typeface="Aptos"/>
+              </a:defRPr>
+            </a:pPr>
+            <a:r>
+              <a:rPr sz="2550" b="1">
+                <a:solidFill>
+                  <a:srgbClr val="151D1A"/>
+                </a:solidFill>
+                <a:latin typeface="Aptos"/>
+                <a:ea typeface="Aptos"/>
+                <a:cs typeface="Aptos"/>
+              </a:rPr>
+              <a:t>期待値は“仮説サマリ”ではなく、</a:t>
+            </a:r>
+          </a:p>
+          <a:p xmlns:a="http://schemas.openxmlformats.org/drawingml/2006/main">
+            <a:pPr algn="l">
+              <a:defRPr sz="2550" b="1">
+                <a:solidFill>
+                  <a:srgbClr val="151D1A"/>
+                </a:solidFill>
+                <a:latin typeface="Aptos"/>
+                <a:ea typeface="Aptos"/>
+                <a:cs typeface="Aptos"/>
+              </a:defRPr>
+            </a:pPr>
+            <a:r>
+              <a:rPr sz="2550" b="1">
+                <a:solidFill>
+                  <a:srgbClr val="151D1A"/>
+                </a:solidFill>
+                <a:latin typeface="Aptos"/>
+                <a:ea typeface="Aptos"/>
+                <a:cs typeface="Aptos"/>
+              </a:rPr>
+              <a:t>ユーザーインタビューの事前実施に近い体験</a:t>
+            </a:r>
+          </a:p>
+        </p:txBody>
+      </p:sp>
+      <p:sp>
+        <p:nvSpPr>
+          <p:cNvPr id="5" name="">
+            <a:extLst xmlns:a="http://schemas.openxmlformats.org/drawingml/2006/main">
+              <a:ext uri="{FF2B5EF4-FFF2-40B4-BE49-F238E27FC236}">
+                <a16:creationId xmlns:a16="http://schemas.microsoft.com/office/drawing/2014/main" id="{E87A8851-2384-4DF2-ABF3-45A0DEB2D316}"/>
+              </a:ext>
+            </a:extLst>
+          </p:cNvPr>
+          <p:cNvSpPr>
+            <a:spLocks xmlns:a="http://schemas.openxmlformats.org/drawingml/2006/main" noGrp="1"/>
+          </p:cNvSpPr>
+          <p:nvPr/>
+        </p:nvSpPr>
+        <p:spPr>
+          <a:xfrm xmlns:a="http://schemas.openxmlformats.org/drawingml/2006/main">
+            <a:off x="533400" y="1828800"/>
+            <a:ext cx="7048500" cy="457200"/>
+          </a:xfrm>
+          <a:prstGeom xmlns:a="http://schemas.openxmlformats.org/drawingml/2006/main" prst="rect">
+            <a:avLst/>
+          </a:prstGeom>
+          <a:solidFill xmlns:a="http://schemas.openxmlformats.org/drawingml/2006/main">
+            <a:srgbClr val="000000">
+              <a:alpha val="0"/>
+            </a:srgbClr>
+          </a:solidFill>
+          <a:ln xmlns:a="http://schemas.openxmlformats.org/drawingml/2006/main" w="0">
+            <a:solidFill>
+              <a:srgbClr val="000000">
+                <a:alpha val="0"/>
+              </a:srgbClr>
+            </a:solidFill>
+            <a:prstDash val="solid"/>
+          </a:ln>
+        </p:spPr>
+        <p:txBody>
+          <a:bodyPr xmlns:a="http://schemas.openxmlformats.org/drawingml/2006/main" lIns="0" tIns="0" rIns="0" bIns="0" anchor="t"/>
+          <a:lstStyle xmlns:a="http://schemas.openxmlformats.org/drawingml/2006/main"/>
+          <a:p xmlns:a="http://schemas.openxmlformats.org/drawingml/2006/main">
+            <a:pPr algn="l">
+              <a:defRPr sz="1275" b="0">
+                <a:solidFill>
+                  <a:srgbClr val="66716B"/>
+                </a:solidFill>
+                <a:latin typeface="Aptos"/>
+                <a:ea typeface="Aptos"/>
+                <a:cs typeface="Aptos"/>
+              </a:defRPr>
+            </a:pPr>
+            <a:r>
+              <a:rPr sz="1275" b="0">
+                <a:solidFill>
+                  <a:srgbClr val="66716B"/>
+                </a:solidFill>
+                <a:latin typeface="Aptos"/>
+                <a:ea typeface="Aptos"/>
+                <a:cs typeface="Aptos"/>
+              </a:rPr>
+              <a:t>AIペルソナを一問一答で深掘りし、何に迷うか・何を確認したいか・どの言葉に反応するかを、実インタビュー前に把握する。</a:t>
+            </a:r>
+          </a:p>
+        </p:txBody>
+      </p:sp>
+      <p:sp>
+        <p:nvSpPr>
+          <p:cNvPr id="6" name="">
+            <a:extLst xmlns:a="http://schemas.openxmlformats.org/drawingml/2006/main">
+              <a:ext uri="{FF2B5EF4-FFF2-40B4-BE49-F238E27FC236}">
+                <a16:creationId xmlns:a16="http://schemas.microsoft.com/office/drawing/2014/main" id="{0FD4CFF9-EF41-4A2B-8B65-1A996FA44C1C}"/>
+              </a:ext>
+            </a:extLst>
+          </p:cNvPr>
+          <p:cNvSpPr>
+            <a:spLocks xmlns:a="http://schemas.openxmlformats.org/drawingml/2006/main" noGrp="1"/>
+          </p:cNvSpPr>
+          <p:nvPr/>
+        </p:nvSpPr>
+        <p:spPr>
+          <a:xfrm xmlns:a="http://schemas.openxmlformats.org/drawingml/2006/main">
+            <a:off x="628650" y="2876550"/>
+            <a:ext cx="3238500" cy="1981200"/>
+          </a:xfrm>
+          <a:prstGeom xmlns:a="http://schemas.openxmlformats.org/drawingml/2006/main" prst="rect">
+            <a:avLst/>
+          </a:prstGeom>
+          <a:solidFill xmlns:a="http://schemas.openxmlformats.org/drawingml/2006/main">
+            <a:srgbClr val="FFFFFF"/>
+          </a:solidFill>
+          <a:ln xmlns:a="http://schemas.openxmlformats.org/drawingml/2006/main" w="9525">
+            <a:solidFill>
+              <a:srgbClr val="D8D2C8"/>
+            </a:solidFill>
+            <a:prstDash val="solid"/>
+          </a:ln>
+        </p:spPr>
+      </p:sp>
+      <p:sp>
+        <p:nvSpPr>
+          <p:cNvPr id="7" name="">
+            <a:extLst xmlns:a="http://schemas.openxmlformats.org/drawingml/2006/main">
+              <a:ext uri="{FF2B5EF4-FFF2-40B4-BE49-F238E27FC236}">
+                <a16:creationId xmlns:a16="http://schemas.microsoft.com/office/drawing/2014/main" id="{E4EC3B1B-6420-48BA-9B88-8985863C76F7}"/>
+              </a:ext>
+            </a:extLst>
+          </p:cNvPr>
+          <p:cNvSpPr>
+            <a:spLocks xmlns:a="http://schemas.openxmlformats.org/drawingml/2006/main" noGrp="1"/>
+          </p:cNvSpPr>
+          <p:nvPr/>
+        </p:nvSpPr>
+        <p:spPr>
+          <a:xfrm xmlns:a="http://schemas.openxmlformats.org/drawingml/2006/main">
+            <a:off x="628650" y="2876550"/>
+            <a:ext cx="3238500" cy="76200"/>
+          </a:xfrm>
+          <a:prstGeom xmlns:a="http://schemas.openxmlformats.org/drawingml/2006/main" prst="rect">
+            <a:avLst/>
+          </a:prstGeom>
+          <a:solidFill xmlns:a="http://schemas.openxmlformats.org/drawingml/2006/main">
+            <a:srgbClr val="BDB7AE"/>
+          </a:solidFill>
+          <a:ln xmlns:a="http://schemas.openxmlformats.org/drawingml/2006/main" w="0">
+            <a:solidFill>
+              <a:srgbClr val="000000">
+                <a:alpha val="0"/>
+              </a:srgbClr>
+            </a:solidFill>
+            <a:prstDash val="solid"/>
+          </a:ln>
+        </p:spPr>
+      </p:sp>
+      <p:sp>
+        <p:nvSpPr>
+          <p:cNvPr id="8" name="">
+            <a:extLst xmlns:a="http://schemas.openxmlformats.org/drawingml/2006/main">
+              <a:ext uri="{FF2B5EF4-FFF2-40B4-BE49-F238E27FC236}">
+                <a16:creationId xmlns:a16="http://schemas.microsoft.com/office/drawing/2014/main" id="{D0DB7E95-C5DA-47FA-9E18-01D21A766D78}"/>
+              </a:ext>
+            </a:extLst>
+          </p:cNvPr>
+          <p:cNvSpPr>
+            <a:spLocks xmlns:a="http://schemas.openxmlformats.org/drawingml/2006/main" noGrp="1"/>
+          </p:cNvSpPr>
+          <p:nvPr/>
+        </p:nvSpPr>
+        <p:spPr>
+          <a:xfrm xmlns:a="http://schemas.openxmlformats.org/drawingml/2006/main">
+            <a:off x="857250" y="3181350"/>
+            <a:ext cx="1143000" cy="190500"/>
+          </a:xfrm>
+          <a:prstGeom xmlns:a="http://schemas.openxmlformats.org/drawingml/2006/main" prst="rect">
+            <a:avLst/>
+          </a:prstGeom>
+          <a:solidFill xmlns:a="http://schemas.openxmlformats.org/drawingml/2006/main">
+            <a:srgbClr val="000000">
+              <a:alpha val="0"/>
+            </a:srgbClr>
+          </a:solidFill>
+          <a:ln xmlns:a="http://schemas.openxmlformats.org/drawingml/2006/main" w="0">
+            <a:solidFill>
+              <a:srgbClr val="000000">
+                <a:alpha val="0"/>
+              </a:srgbClr>
+            </a:solidFill>
+            <a:prstDash val="solid"/>
+          </a:ln>
+        </p:spPr>
+        <p:txBody>
+          <a:bodyPr xmlns:a="http://schemas.openxmlformats.org/drawingml/2006/main" lIns="0" tIns="0" rIns="0" bIns="0" anchor="t"/>
+          <a:lstStyle xmlns:a="http://schemas.openxmlformats.org/drawingml/2006/main"/>
+          <a:p xmlns:a="http://schemas.openxmlformats.org/drawingml/2006/main">
+            <a:pPr algn="l">
+              <a:defRPr sz="1050" b="1">
+                <a:solidFill>
+                  <a:srgbClr val="D8D2C8"/>
+                </a:solidFill>
+                <a:latin typeface="Aptos"/>
+                <a:ea typeface="Aptos"/>
+                <a:cs typeface="Aptos"/>
+              </a:defRPr>
+            </a:pPr>
+            <a:r>
+              <a:rPr sz="1050" b="1">
+                <a:solidFill>
+                  <a:srgbClr val="D8D2C8"/>
+                </a:solidFill>
+                <a:latin typeface="Aptos"/>
+                <a:ea typeface="Aptos"/>
+                <a:cs typeface="Aptos"/>
+              </a:rPr>
+              <a:t>従来</a:t>
+            </a:r>
+          </a:p>
+        </p:txBody>
+      </p:sp>
+      <p:sp>
+        <p:nvSpPr>
+          <p:cNvPr id="9" name="">
+            <a:extLst xmlns:a="http://schemas.openxmlformats.org/drawingml/2006/main">
+              <a:ext uri="{FF2B5EF4-FFF2-40B4-BE49-F238E27FC236}">
+                <a16:creationId xmlns:a16="http://schemas.microsoft.com/office/drawing/2014/main" id="{68F9C833-2B55-4C0C-B2E9-2CFFCBAAEF54}"/>
+              </a:ext>
+            </a:extLst>
+          </p:cNvPr>
+          <p:cNvSpPr>
+            <a:spLocks xmlns:a="http://schemas.openxmlformats.org/drawingml/2006/main" noGrp="1"/>
+          </p:cNvSpPr>
+          <p:nvPr/>
+        </p:nvSpPr>
+        <p:spPr>
+          <a:xfrm xmlns:a="http://schemas.openxmlformats.org/drawingml/2006/main">
+            <a:off x="857250" y="3524250"/>
+            <a:ext cx="2476500" cy="285750"/>
+          </a:xfrm>
+          <a:prstGeom xmlns:a="http://schemas.openxmlformats.org/drawingml/2006/main" prst="rect">
+            <a:avLst/>
+          </a:prstGeom>
+          <a:solidFill xmlns:a="http://schemas.openxmlformats.org/drawingml/2006/main">
+            <a:srgbClr val="000000">
+              <a:alpha val="0"/>
+            </a:srgbClr>
+          </a:solidFill>
+          <a:ln xmlns:a="http://schemas.openxmlformats.org/drawingml/2006/main" w="0">
+            <a:solidFill>
+              <a:srgbClr val="000000">
+                <a:alpha val="0"/>
+              </a:srgbClr>
+            </a:solidFill>
+            <a:prstDash val="solid"/>
+          </a:ln>
+        </p:spPr>
+        <p:txBody>
+          <a:bodyPr xmlns:a="http://schemas.openxmlformats.org/drawingml/2006/main" lIns="0" tIns="0" rIns="0" bIns="0" anchor="t"/>
+          <a:lstStyle xmlns:a="http://schemas.openxmlformats.org/drawingml/2006/main"/>
+          <a:p xmlns:a="http://schemas.openxmlformats.org/drawingml/2006/main">
+            <a:pPr algn="l">
+              <a:defRPr sz="1875" b="1">
+                <a:solidFill>
+                  <a:srgbClr val="151D1A"/>
+                </a:solidFill>
+                <a:latin typeface="Aptos"/>
+                <a:ea typeface="Aptos"/>
+                <a:cs typeface="Aptos"/>
+              </a:defRPr>
+            </a:pPr>
+            <a:r>
+              <a:rPr sz="1875" b="1">
+                <a:solidFill>
+                  <a:srgbClr val="151D1A"/>
+                </a:solidFill>
+                <a:latin typeface="Aptos"/>
+                <a:ea typeface="Aptos"/>
+                <a:cs typeface="Aptos"/>
+              </a:rPr>
+              <a:t>実ユーザー調査</a:t>
+            </a:r>
+          </a:p>
+        </p:txBody>
+      </p:sp>
+      <p:sp>
+        <p:nvSpPr>
+          <p:cNvPr id="10" name="">
+            <a:extLst xmlns:a="http://schemas.openxmlformats.org/drawingml/2006/main">
+              <a:ext uri="{FF2B5EF4-FFF2-40B4-BE49-F238E27FC236}">
+                <a16:creationId xmlns:a16="http://schemas.microsoft.com/office/drawing/2014/main" id="{E17A6191-4367-413C-9E2F-53E16A33A447}"/>
+              </a:ext>
+            </a:extLst>
+          </p:cNvPr>
+          <p:cNvSpPr>
+            <a:spLocks xmlns:a="http://schemas.openxmlformats.org/drawingml/2006/main" noGrp="1"/>
+          </p:cNvSpPr>
+          <p:nvPr/>
+        </p:nvSpPr>
+        <p:spPr>
+          <a:xfrm xmlns:a="http://schemas.openxmlformats.org/drawingml/2006/main">
+            <a:off x="857250" y="4000500"/>
+            <a:ext cx="2571750" cy="552450"/>
+          </a:xfrm>
+          <a:prstGeom xmlns:a="http://schemas.openxmlformats.org/drawingml/2006/main" prst="rect">
+            <a:avLst/>
+          </a:prstGeom>
+          <a:solidFill xmlns:a="http://schemas.openxmlformats.org/drawingml/2006/main">
+            <a:srgbClr val="000000">
+              <a:alpha val="0"/>
+            </a:srgbClr>
+          </a:solidFill>
+          <a:ln xmlns:a="http://schemas.openxmlformats.org/drawingml/2006/main" w="0">
+            <a:solidFill>
+              <a:srgbClr val="000000">
+                <a:alpha val="0"/>
+              </a:srgbClr>
+            </a:solidFill>
+            <a:prstDash val="solid"/>
+          </a:ln>
+        </p:spPr>
+        <p:txBody>
+          <a:bodyPr xmlns:a="http://schemas.openxmlformats.org/drawingml/2006/main" lIns="0" tIns="0" rIns="0" bIns="0" anchor="t"/>
+          <a:lstStyle xmlns:a="http://schemas.openxmlformats.org/drawingml/2006/main"/>
+          <a:p xmlns:a="http://schemas.openxmlformats.org/drawingml/2006/main">
+            <a:pPr algn="l">
+              <a:defRPr sz="1163" b="0">
+                <a:solidFill>
+                  <a:srgbClr val="66716B"/>
+                </a:solidFill>
+                <a:latin typeface="Aptos"/>
+                <a:ea typeface="Aptos"/>
+                <a:cs typeface="Aptos"/>
+              </a:defRPr>
+            </a:pPr>
+            <a:r>
+              <a:rPr sz="1163" b="0">
+                <a:solidFill>
+                  <a:srgbClr val="66716B"/>
+                </a:solidFill>
+                <a:latin typeface="Aptos"/>
+                <a:ea typeface="Aptos"/>
+                <a:cs typeface="Aptos"/>
+              </a:rPr>
+              <a:t>日程調整・対象者確保・設問設計が必要。確度は高いが、早い仮説検証には重い。</a:t>
+            </a:r>
+          </a:p>
+        </p:txBody>
+      </p:sp>
+      <p:sp>
+        <p:nvSpPr>
+          <p:cNvPr id="11" name="">
+            <a:extLst xmlns:a="http://schemas.openxmlformats.org/drawingml/2006/main">
+              <a:ext uri="{FF2B5EF4-FFF2-40B4-BE49-F238E27FC236}">
+                <a16:creationId xmlns:a16="http://schemas.microsoft.com/office/drawing/2014/main" id="{B4AD3E49-5BA1-4F39-AAE3-6D99D438EE32}"/>
+              </a:ext>
+            </a:extLst>
+          </p:cNvPr>
+          <p:cNvSpPr>
+            <a:spLocks xmlns:a="http://schemas.openxmlformats.org/drawingml/2006/main" noGrp="1"/>
+          </p:cNvSpPr>
+          <p:nvPr/>
+        </p:nvSpPr>
+        <p:spPr>
+          <a:xfrm xmlns:a="http://schemas.openxmlformats.org/drawingml/2006/main">
+            <a:off x="4305300" y="2876550"/>
+            <a:ext cx="3238500" cy="1981200"/>
+          </a:xfrm>
+          <a:prstGeom xmlns:a="http://schemas.openxmlformats.org/drawingml/2006/main" prst="rect">
+            <a:avLst/>
+          </a:prstGeom>
+          <a:solidFill xmlns:a="http://schemas.openxmlformats.org/drawingml/2006/main">
+            <a:srgbClr val="10231E"/>
+          </a:solidFill>
+          <a:ln xmlns:a="http://schemas.openxmlformats.org/drawingml/2006/main" w="9525">
+            <a:solidFill>
+              <a:srgbClr val="2F6F8F"/>
+            </a:solidFill>
+            <a:prstDash val="solid"/>
+          </a:ln>
+        </p:spPr>
+      </p:sp>
+      <p:sp>
+        <p:nvSpPr>
+          <p:cNvPr id="12" name="">
+            <a:extLst xmlns:a="http://schemas.openxmlformats.org/drawingml/2006/main">
+              <a:ext uri="{FF2B5EF4-FFF2-40B4-BE49-F238E27FC236}">
+                <a16:creationId xmlns:a16="http://schemas.microsoft.com/office/drawing/2014/main" id="{C3CB2BF9-AC13-4D16-A216-CB64240CFAB5}"/>
+              </a:ext>
+            </a:extLst>
+          </p:cNvPr>
+          <p:cNvSpPr>
+            <a:spLocks xmlns:a="http://schemas.openxmlformats.org/drawingml/2006/main" noGrp="1"/>
+          </p:cNvSpPr>
+          <p:nvPr/>
+        </p:nvSpPr>
+        <p:spPr>
+          <a:xfrm xmlns:a="http://schemas.openxmlformats.org/drawingml/2006/main">
+            <a:off x="4305300" y="2876550"/>
+            <a:ext cx="3238500" cy="76200"/>
+          </a:xfrm>
+          <a:prstGeom xmlns:a="http://schemas.openxmlformats.org/drawingml/2006/main" prst="rect">
+            <a:avLst/>
+          </a:prstGeom>
+          <a:solidFill xmlns:a="http://schemas.openxmlformats.org/drawingml/2006/main">
+            <a:srgbClr val="2F6F8F"/>
+          </a:solidFill>
+          <a:ln xmlns:a="http://schemas.openxmlformats.org/drawingml/2006/main" w="0">
+            <a:solidFill>
+              <a:srgbClr val="000000">
+                <a:alpha val="0"/>
+              </a:srgbClr>
+            </a:solidFill>
+            <a:prstDash val="solid"/>
+          </a:ln>
+        </p:spPr>
+      </p:sp>
+      <p:sp>
+        <p:nvSpPr>
+          <p:cNvPr id="13" name="">
+            <a:extLst xmlns:a="http://schemas.openxmlformats.org/drawingml/2006/main">
+              <a:ext uri="{FF2B5EF4-FFF2-40B4-BE49-F238E27FC236}">
+                <a16:creationId xmlns:a16="http://schemas.microsoft.com/office/drawing/2014/main" id="{2DF80813-E854-4489-946F-FB0D91993BF9}"/>
+              </a:ext>
+            </a:extLst>
+          </p:cNvPr>
+          <p:cNvSpPr>
+            <a:spLocks xmlns:a="http://schemas.openxmlformats.org/drawingml/2006/main" noGrp="1"/>
+          </p:cNvSpPr>
+          <p:nvPr/>
+        </p:nvSpPr>
+        <p:spPr>
+          <a:xfrm xmlns:a="http://schemas.openxmlformats.org/drawingml/2006/main">
+            <a:off x="4533900" y="3181350"/>
+            <a:ext cx="1143000" cy="190500"/>
+          </a:xfrm>
+          <a:prstGeom xmlns:a="http://schemas.openxmlformats.org/drawingml/2006/main" prst="rect">
+            <a:avLst/>
+          </a:prstGeom>
+          <a:solidFill xmlns:a="http://schemas.openxmlformats.org/drawingml/2006/main">
+            <a:srgbClr val="000000">
+              <a:alpha val="0"/>
+            </a:srgbClr>
+          </a:solidFill>
+          <a:ln xmlns:a="http://schemas.openxmlformats.org/drawingml/2006/main" w="0">
+            <a:solidFill>
+              <a:srgbClr val="000000">
+                <a:alpha val="0"/>
+              </a:srgbClr>
+            </a:solidFill>
+            <a:prstDash val="solid"/>
+          </a:ln>
+        </p:spPr>
+        <p:txBody>
+          <a:bodyPr xmlns:a="http://schemas.openxmlformats.org/drawingml/2006/main" lIns="0" tIns="0" rIns="0" bIns="0" anchor="t"/>
+          <a:lstStyle xmlns:a="http://schemas.openxmlformats.org/drawingml/2006/main"/>
+          <a:p xmlns:a="http://schemas.openxmlformats.org/drawingml/2006/main">
+            <a:pPr algn="l">
+              <a:defRPr sz="1050" b="1">
+                <a:solidFill>
+                  <a:srgbClr val="DCEBE7"/>
+                </a:solidFill>
+                <a:latin typeface="Aptos"/>
+                <a:ea typeface="Aptos"/>
+                <a:cs typeface="Aptos"/>
+              </a:defRPr>
+            </a:pPr>
+            <a:r>
+              <a:rPr sz="1050" b="1">
+                <a:solidFill>
+                  <a:srgbClr val="DCEBE7"/>
+                </a:solidFill>
+                <a:latin typeface="Aptos"/>
+                <a:ea typeface="Aptos"/>
+                <a:cs typeface="Aptos"/>
+              </a:rPr>
+              <a:t>提案</a:t>
+            </a:r>
+          </a:p>
+        </p:txBody>
+      </p:sp>
+      <p:sp>
+        <p:nvSpPr>
+          <p:cNvPr id="14" name="">
+            <a:extLst xmlns:a="http://schemas.openxmlformats.org/drawingml/2006/main">
+              <a:ext uri="{FF2B5EF4-FFF2-40B4-BE49-F238E27FC236}">
+                <a16:creationId xmlns:a16="http://schemas.microsoft.com/office/drawing/2014/main" id="{C4092CAA-9299-4D50-8F8E-055DEDC34B73}"/>
+              </a:ext>
+            </a:extLst>
+          </p:cNvPr>
+          <p:cNvSpPr>
+            <a:spLocks xmlns:a="http://schemas.openxmlformats.org/drawingml/2006/main" noGrp="1"/>
+          </p:cNvSpPr>
+          <p:nvPr/>
+        </p:nvSpPr>
+        <p:spPr>
+          <a:xfrm xmlns:a="http://schemas.openxmlformats.org/drawingml/2006/main">
+            <a:off x="4533900" y="3524250"/>
+            <a:ext cx="2476500" cy="285750"/>
+          </a:xfrm>
+          <a:prstGeom xmlns:a="http://schemas.openxmlformats.org/drawingml/2006/main" prst="rect">
+            <a:avLst/>
+          </a:prstGeom>
+          <a:solidFill xmlns:a="http://schemas.openxmlformats.org/drawingml/2006/main">
+            <a:srgbClr val="000000">
+              <a:alpha val="0"/>
+            </a:srgbClr>
+          </a:solidFill>
+          <a:ln xmlns:a="http://schemas.openxmlformats.org/drawingml/2006/main" w="0">
+            <a:solidFill>
+              <a:srgbClr val="000000">
+                <a:alpha val="0"/>
+              </a:srgbClr>
+            </a:solidFill>
+            <a:prstDash val="solid"/>
+          </a:ln>
+        </p:spPr>
+        <p:txBody>
+          <a:bodyPr xmlns:a="http://schemas.openxmlformats.org/drawingml/2006/main" lIns="0" tIns="0" rIns="0" bIns="0" anchor="t"/>
+          <a:lstStyle xmlns:a="http://schemas.openxmlformats.org/drawingml/2006/main"/>
+          <a:p xmlns:a="http://schemas.openxmlformats.org/drawingml/2006/main">
+            <a:pPr algn="l">
+              <a:defRPr sz="1875" b="1">
+                <a:solidFill>
+                  <a:srgbClr val="FFFFFF"/>
+                </a:solidFill>
+                <a:latin typeface="Aptos"/>
+                <a:ea typeface="Aptos"/>
+                <a:cs typeface="Aptos"/>
+              </a:defRPr>
+            </a:pPr>
+            <a:r>
+              <a:rPr sz="1875" b="1">
+                <a:solidFill>
+                  <a:srgbClr val="FFFFFF"/>
+                </a:solidFill>
+                <a:latin typeface="Aptos"/>
+                <a:ea typeface="Aptos"/>
+                <a:cs typeface="Aptos"/>
+              </a:rPr>
+              <a:t>AIペルソナ・インタビュー</a:t>
+            </a:r>
+          </a:p>
+        </p:txBody>
+      </p:sp>
+      <p:sp>
+        <p:nvSpPr>
+          <p:cNvPr id="15" name="">
+            <a:extLst xmlns:a="http://schemas.openxmlformats.org/drawingml/2006/main">
+              <a:ext uri="{FF2B5EF4-FFF2-40B4-BE49-F238E27FC236}">
+                <a16:creationId xmlns:a16="http://schemas.microsoft.com/office/drawing/2014/main" id="{54E2AB55-0368-43D4-B0E6-4C8501FD71A1}"/>
+              </a:ext>
+            </a:extLst>
+          </p:cNvPr>
+          <p:cNvSpPr>
+            <a:spLocks xmlns:a="http://schemas.openxmlformats.org/drawingml/2006/main" noGrp="1"/>
+          </p:cNvSpPr>
+          <p:nvPr/>
+        </p:nvSpPr>
+        <p:spPr>
+          <a:xfrm xmlns:a="http://schemas.openxmlformats.org/drawingml/2006/main">
+            <a:off x="4533900" y="4000500"/>
+            <a:ext cx="2571750" cy="552450"/>
+          </a:xfrm>
+          <a:prstGeom xmlns:a="http://schemas.openxmlformats.org/drawingml/2006/main" prst="rect">
+            <a:avLst/>
+          </a:prstGeom>
+          <a:solidFill xmlns:a="http://schemas.openxmlformats.org/drawingml/2006/main">
+            <a:srgbClr val="000000">
+              <a:alpha val="0"/>
+            </a:srgbClr>
+          </a:solidFill>
+          <a:ln xmlns:a="http://schemas.openxmlformats.org/drawingml/2006/main" w="0">
+            <a:solidFill>
+              <a:srgbClr val="000000">
+                <a:alpha val="0"/>
+              </a:srgbClr>
+            </a:solidFill>
+            <a:prstDash val="solid"/>
+          </a:ln>
+        </p:spPr>
+        <p:txBody>
+          <a:bodyPr xmlns:a="http://schemas.openxmlformats.org/drawingml/2006/main" lIns="0" tIns="0" rIns="0" bIns="0" anchor="t"/>
+          <a:lstStyle xmlns:a="http://schemas.openxmlformats.org/drawingml/2006/main"/>
+          <a:p xmlns:a="http://schemas.openxmlformats.org/drawingml/2006/main">
+            <a:pPr algn="l">
+              <a:defRPr sz="1163" b="0">
+                <a:solidFill>
+                  <a:srgbClr val="DCEBE7"/>
+                </a:solidFill>
+                <a:latin typeface="Aptos"/>
+                <a:ea typeface="Aptos"/>
+                <a:cs typeface="Aptos"/>
+              </a:defRPr>
+            </a:pPr>
+            <a:r>
+              <a:rPr sz="1163" b="0">
+                <a:solidFill>
+                  <a:srgbClr val="DCEBE7"/>
+                </a:solidFill>
+                <a:latin typeface="Aptos"/>
+                <a:ea typeface="Aptos"/>
+                <a:cs typeface="Aptos"/>
+              </a:rPr>
+              <a:t>銀行IB利用者100〜1000人に、設定した評価軸と質問を投げ、反応を構造化する。</a:t>
+            </a:r>
+          </a:p>
+        </p:txBody>
+      </p:sp>
+      <p:sp>
+        <p:nvSpPr>
+          <p:cNvPr id="16" name="">
+            <a:extLst xmlns:a="http://schemas.openxmlformats.org/drawingml/2006/main">
+              <a:ext uri="{FF2B5EF4-FFF2-40B4-BE49-F238E27FC236}">
+                <a16:creationId xmlns:a16="http://schemas.microsoft.com/office/drawing/2014/main" id="{975D6F55-E117-4D33-98D3-5129AC2012FA}"/>
+              </a:ext>
+            </a:extLst>
+          </p:cNvPr>
+          <p:cNvSpPr>
+            <a:spLocks xmlns:a="http://schemas.openxmlformats.org/drawingml/2006/main" noGrp="1"/>
+          </p:cNvSpPr>
+          <p:nvPr/>
+        </p:nvSpPr>
+        <p:spPr>
+          <a:xfrm xmlns:a="http://schemas.openxmlformats.org/drawingml/2006/main">
+            <a:off x="7981950" y="2876550"/>
+            <a:ext cx="3238500" cy="1981200"/>
+          </a:xfrm>
+          <a:prstGeom xmlns:a="http://schemas.openxmlformats.org/drawingml/2006/main" prst="rect">
+            <a:avLst/>
+          </a:prstGeom>
+          <a:solidFill xmlns:a="http://schemas.openxmlformats.org/drawingml/2006/main">
+            <a:srgbClr val="FFFFFF"/>
+          </a:solidFill>
+          <a:ln xmlns:a="http://schemas.openxmlformats.org/drawingml/2006/main" w="9525">
+            <a:solidFill>
+              <a:srgbClr val="D96F32"/>
+            </a:solidFill>
+            <a:prstDash val="solid"/>
+          </a:ln>
+        </p:spPr>
+      </p:sp>
+      <p:sp>
+        <p:nvSpPr>
+          <p:cNvPr id="17" name="">
+            <a:extLst xmlns:a="http://schemas.openxmlformats.org/drawingml/2006/main">
+              <a:ext uri="{FF2B5EF4-FFF2-40B4-BE49-F238E27FC236}">
+                <a16:creationId xmlns:a16="http://schemas.microsoft.com/office/drawing/2014/main" id="{79E70611-1F6F-48CF-9006-80EEB70D7C4B}"/>
+              </a:ext>
+            </a:extLst>
+          </p:cNvPr>
+          <p:cNvSpPr>
+            <a:spLocks xmlns:a="http://schemas.openxmlformats.org/drawingml/2006/main" noGrp="1"/>
+          </p:cNvSpPr>
+          <p:nvPr/>
+        </p:nvSpPr>
+        <p:spPr>
+          <a:xfrm xmlns:a="http://schemas.openxmlformats.org/drawingml/2006/main">
+            <a:off x="7981950" y="2876550"/>
+            <a:ext cx="3238500" cy="76200"/>
+          </a:xfrm>
+          <a:prstGeom xmlns:a="http://schemas.openxmlformats.org/drawingml/2006/main" prst="rect">
+            <a:avLst/>
+          </a:prstGeom>
+          <a:solidFill xmlns:a="http://schemas.openxmlformats.org/drawingml/2006/main">
+            <a:srgbClr val="D96F32"/>
+          </a:solidFill>
+          <a:ln xmlns:a="http://schemas.openxmlformats.org/drawingml/2006/main" w="0">
+            <a:solidFill>
+              <a:srgbClr val="000000">
+                <a:alpha val="0"/>
+              </a:srgbClr>
+            </a:solidFill>
+            <a:prstDash val="solid"/>
+          </a:ln>
+        </p:spPr>
+      </p:sp>
+      <p:sp>
+        <p:nvSpPr>
+          <p:cNvPr id="18" name="">
+            <a:extLst xmlns:a="http://schemas.openxmlformats.org/drawingml/2006/main">
+              <a:ext uri="{FF2B5EF4-FFF2-40B4-BE49-F238E27FC236}">
+                <a16:creationId xmlns:a16="http://schemas.microsoft.com/office/drawing/2014/main" id="{D3517753-076E-4FB8-86CB-A2AD251C90A4}"/>
+              </a:ext>
+            </a:extLst>
+          </p:cNvPr>
+          <p:cNvSpPr>
+            <a:spLocks xmlns:a="http://schemas.openxmlformats.org/drawingml/2006/main" noGrp="1"/>
+          </p:cNvSpPr>
+          <p:nvPr/>
+        </p:nvSpPr>
+        <p:spPr>
+          <a:xfrm xmlns:a="http://schemas.openxmlformats.org/drawingml/2006/main">
+            <a:off x="8210550" y="3181350"/>
+            <a:ext cx="1143000" cy="190500"/>
+          </a:xfrm>
+          <a:prstGeom xmlns:a="http://schemas.openxmlformats.org/drawingml/2006/main" prst="rect">
+            <a:avLst/>
+          </a:prstGeom>
+          <a:solidFill xmlns:a="http://schemas.openxmlformats.org/drawingml/2006/main">
+            <a:srgbClr val="000000">
+              <a:alpha val="0"/>
+            </a:srgbClr>
+          </a:solidFill>
+          <a:ln xmlns:a="http://schemas.openxmlformats.org/drawingml/2006/main" w="0">
+            <a:solidFill>
+              <a:srgbClr val="000000">
+                <a:alpha val="0"/>
+              </a:srgbClr>
+            </a:solidFill>
+            <a:prstDash val="solid"/>
+          </a:ln>
+        </p:spPr>
+        <p:txBody>
+          <a:bodyPr xmlns:a="http://schemas.openxmlformats.org/drawingml/2006/main" lIns="0" tIns="0" rIns="0" bIns="0" anchor="t"/>
+          <a:lstStyle xmlns:a="http://schemas.openxmlformats.org/drawingml/2006/main"/>
+          <a:p xmlns:a="http://schemas.openxmlformats.org/drawingml/2006/main">
+            <a:pPr algn="l">
+              <a:defRPr sz="1050" b="1">
+                <a:solidFill>
+                  <a:srgbClr val="D96F32"/>
+                </a:solidFill>
+                <a:latin typeface="Aptos"/>
+                <a:ea typeface="Aptos"/>
+                <a:cs typeface="Aptos"/>
+              </a:defRPr>
+            </a:pPr>
+            <a:r>
+              <a:rPr sz="1050" b="1">
+                <a:solidFill>
+                  <a:srgbClr val="D96F32"/>
+                </a:solidFill>
+                <a:latin typeface="Aptos"/>
+                <a:ea typeface="Aptos"/>
+                <a:cs typeface="Aptos"/>
+              </a:rPr>
+              <a:t>位置づけ</a:t>
+            </a:r>
+          </a:p>
+        </p:txBody>
+      </p:sp>
+      <p:sp>
+        <p:nvSpPr>
+          <p:cNvPr id="19" name="">
+            <a:extLst xmlns:a="http://schemas.openxmlformats.org/drawingml/2006/main">
+              <a:ext uri="{FF2B5EF4-FFF2-40B4-BE49-F238E27FC236}">
+                <a16:creationId xmlns:a16="http://schemas.microsoft.com/office/drawing/2014/main" id="{47BC5DDC-B4FB-497B-A07B-2BA84D9ECA9C}"/>
+              </a:ext>
+            </a:extLst>
+          </p:cNvPr>
+          <p:cNvSpPr>
+            <a:spLocks xmlns:a="http://schemas.openxmlformats.org/drawingml/2006/main" noGrp="1"/>
+          </p:cNvSpPr>
+          <p:nvPr/>
+        </p:nvSpPr>
+        <p:spPr>
+          <a:xfrm xmlns:a="http://schemas.openxmlformats.org/drawingml/2006/main">
+            <a:off x="8210550" y="3524250"/>
+            <a:ext cx="2476500" cy="285750"/>
+          </a:xfrm>
+          <a:prstGeom xmlns:a="http://schemas.openxmlformats.org/drawingml/2006/main" prst="rect">
+            <a:avLst/>
+          </a:prstGeom>
+          <a:solidFill xmlns:a="http://schemas.openxmlformats.org/drawingml/2006/main">
+            <a:srgbClr val="000000">
+              <a:alpha val="0"/>
+            </a:srgbClr>
+          </a:solidFill>
+          <a:ln xmlns:a="http://schemas.openxmlformats.org/drawingml/2006/main" w="0">
+            <a:solidFill>
+              <a:srgbClr val="000000">
+                <a:alpha val="0"/>
+              </a:srgbClr>
+            </a:solidFill>
+            <a:prstDash val="solid"/>
+          </a:ln>
+        </p:spPr>
+        <p:txBody>
+          <a:bodyPr xmlns:a="http://schemas.openxmlformats.org/drawingml/2006/main" lIns="0" tIns="0" rIns="0" bIns="0" anchor="t"/>
+          <a:lstStyle xmlns:a="http://schemas.openxmlformats.org/drawingml/2006/main"/>
+          <a:p xmlns:a="http://schemas.openxmlformats.org/drawingml/2006/main">
+            <a:pPr algn="l">
+              <a:defRPr sz="1875" b="1">
+                <a:solidFill>
+                  <a:srgbClr val="151D1A"/>
+                </a:solidFill>
+                <a:latin typeface="Aptos"/>
+                <a:ea typeface="Aptos"/>
+                <a:cs typeface="Aptos"/>
+              </a:defRPr>
+            </a:pPr>
+            <a:r>
+              <a:rPr sz="1875" b="1">
+                <a:solidFill>
+                  <a:srgbClr val="151D1A"/>
+                </a:solidFill>
+                <a:latin typeface="Aptos"/>
+                <a:ea typeface="Aptos"/>
+                <a:cs typeface="Aptos"/>
+              </a:rPr>
+              <a:t>本調査前のリハーサル</a:t>
+            </a:r>
+          </a:p>
+        </p:txBody>
+      </p:sp>
+      <p:sp>
+        <p:nvSpPr>
+          <p:cNvPr id="20" name="">
+            <a:extLst xmlns:a="http://schemas.openxmlformats.org/drawingml/2006/main">
+              <a:ext uri="{FF2B5EF4-FFF2-40B4-BE49-F238E27FC236}">
+                <a16:creationId xmlns:a16="http://schemas.microsoft.com/office/drawing/2014/main" id="{E3253467-D45B-4E87-99CA-168EAF86F133}"/>
+              </a:ext>
+            </a:extLst>
+          </p:cNvPr>
+          <p:cNvSpPr>
+            <a:spLocks xmlns:a="http://schemas.openxmlformats.org/drawingml/2006/main" noGrp="1"/>
+          </p:cNvSpPr>
+          <p:nvPr/>
+        </p:nvSpPr>
+        <p:spPr>
+          <a:xfrm xmlns:a="http://schemas.openxmlformats.org/drawingml/2006/main">
+            <a:off x="8210550" y="4000500"/>
+            <a:ext cx="2571750" cy="552450"/>
+          </a:xfrm>
+          <a:prstGeom xmlns:a="http://schemas.openxmlformats.org/drawingml/2006/main" prst="rect">
+            <a:avLst/>
+          </a:prstGeom>
+          <a:solidFill xmlns:a="http://schemas.openxmlformats.org/drawingml/2006/main">
+            <a:srgbClr val="000000">
+              <a:alpha val="0"/>
+            </a:srgbClr>
+          </a:solidFill>
+          <a:ln xmlns:a="http://schemas.openxmlformats.org/drawingml/2006/main" w="0">
+            <a:solidFill>
+              <a:srgbClr val="000000">
+                <a:alpha val="0"/>
+              </a:srgbClr>
+            </a:solidFill>
+            <a:prstDash val="solid"/>
+          </a:ln>
+        </p:spPr>
+        <p:txBody>
+          <a:bodyPr xmlns:a="http://schemas.openxmlformats.org/drawingml/2006/main" lIns="0" tIns="0" rIns="0" bIns="0" anchor="t"/>
+          <a:lstStyle xmlns:a="http://schemas.openxmlformats.org/drawingml/2006/main"/>
+          <a:p xmlns:a="http://schemas.openxmlformats.org/drawingml/2006/main">
+            <a:pPr algn="l">
+              <a:defRPr sz="1163" b="0">
+                <a:solidFill>
+                  <a:srgbClr val="66716B"/>
+                </a:solidFill>
+                <a:latin typeface="Aptos"/>
+                <a:ea typeface="Aptos"/>
+                <a:cs typeface="Aptos"/>
+              </a:defRPr>
+            </a:pPr>
+            <a:r>
+              <a:rPr sz="1163" b="0">
+                <a:solidFill>
+                  <a:srgbClr val="66716B"/>
+                </a:solidFill>
+                <a:latin typeface="Aptos"/>
+                <a:ea typeface="Aptos"/>
+                <a:cs typeface="Aptos"/>
+              </a:rPr>
+              <a:t>調査代替ではなく、聞くべき質問・見るべきセグメント・危ない論点を先に出す。</a:t>
+            </a:r>
+          </a:p>
+        </p:txBody>
+      </p:sp>
+      <p:sp>
+        <p:nvSpPr>
+          <p:cNvPr id="21" name="">
+            <a:extLst xmlns:a="http://schemas.openxmlformats.org/drawingml/2006/main">
+              <a:ext uri="{FF2B5EF4-FFF2-40B4-BE49-F238E27FC236}">
+                <a16:creationId xmlns:a16="http://schemas.microsoft.com/office/drawing/2014/main" id="{F1D7DC9C-2BAD-4B4D-97EE-63971F1E62A8}"/>
+              </a:ext>
+            </a:extLst>
+          </p:cNvPr>
+          <p:cNvSpPr>
+            <a:spLocks xmlns:a="http://schemas.openxmlformats.org/drawingml/2006/main" noGrp="1"/>
+          </p:cNvSpPr>
+          <p:nvPr/>
+        </p:nvSpPr>
+        <p:spPr>
+          <a:xfrm xmlns:a="http://schemas.openxmlformats.org/drawingml/2006/main">
+            <a:off x="628650" y="5429250"/>
+            <a:ext cx="10096500" cy="552450"/>
+          </a:xfrm>
+          <a:prstGeom xmlns:a="http://schemas.openxmlformats.org/drawingml/2006/main" prst="rect">
+            <a:avLst/>
+          </a:prstGeom>
+          <a:solidFill xmlns:a="http://schemas.openxmlformats.org/drawingml/2006/main">
+            <a:srgbClr val="F7F3EA"/>
+          </a:solidFill>
+          <a:ln xmlns:a="http://schemas.openxmlformats.org/drawingml/2006/main" w="9525">
+            <a:solidFill>
+              <a:srgbClr val="D8D2C8"/>
+            </a:solidFill>
+            <a:prstDash val="solid"/>
+          </a:ln>
+        </p:spPr>
+      </p:sp>
+      <p:sp>
+        <p:nvSpPr>
+          <p:cNvPr id="22" name="">
+            <a:extLst xmlns:a="http://schemas.openxmlformats.org/drawingml/2006/main">
+              <a:ext uri="{FF2B5EF4-FFF2-40B4-BE49-F238E27FC236}">
+                <a16:creationId xmlns:a16="http://schemas.microsoft.com/office/drawing/2014/main" id="{D6E5BFF7-CDDD-4E7D-B53A-BB9D7AAB68ED}"/>
+              </a:ext>
+            </a:extLst>
+          </p:cNvPr>
+          <p:cNvSpPr>
+            <a:spLocks xmlns:a="http://schemas.openxmlformats.org/drawingml/2006/main" noGrp="1"/>
+          </p:cNvSpPr>
+          <p:nvPr/>
+        </p:nvSpPr>
+        <p:spPr>
+          <a:xfrm xmlns:a="http://schemas.openxmlformats.org/drawingml/2006/main">
+            <a:off x="876300" y="5581650"/>
+            <a:ext cx="9334500" cy="228600"/>
+          </a:xfrm>
+          <a:prstGeom xmlns:a="http://schemas.openxmlformats.org/drawingml/2006/main" prst="rect">
+            <a:avLst/>
+          </a:prstGeom>
+          <a:solidFill xmlns:a="http://schemas.openxmlformats.org/drawingml/2006/main">
+            <a:srgbClr val="000000">
+              <a:alpha val="0"/>
+            </a:srgbClr>
+          </a:solidFill>
+          <a:ln xmlns:a="http://schemas.openxmlformats.org/drawingml/2006/main" w="0">
+            <a:solidFill>
+              <a:srgbClr val="000000">
+                <a:alpha val="0"/>
+              </a:srgbClr>
+            </a:solidFill>
+            <a:prstDash val="solid"/>
+          </a:ln>
+        </p:spPr>
+        <p:txBody>
+          <a:bodyPr xmlns:a="http://schemas.openxmlformats.org/drawingml/2006/main" lIns="0" tIns="0" rIns="0" bIns="0" anchor="t"/>
+          <a:lstStyle xmlns:a="http://schemas.openxmlformats.org/drawingml/2006/main"/>
+          <a:p xmlns:a="http://schemas.openxmlformats.org/drawingml/2006/main">
+            <a:pPr algn="l">
+              <a:defRPr sz="1350" b="1">
+                <a:solidFill>
+                  <a:srgbClr val="151D1A"/>
+                </a:solidFill>
+                <a:latin typeface="Aptos"/>
+                <a:ea typeface="Aptos"/>
+                <a:cs typeface="Aptos"/>
+              </a:defRPr>
+            </a:pPr>
+            <a:r>
+              <a:rPr sz="1350" b="1">
+                <a:solidFill>
+                  <a:srgbClr val="151D1A"/>
+                </a:solidFill>
+                <a:latin typeface="Aptos"/>
+                <a:ea typeface="Aptos"/>
+                <a:cs typeface="Aptos"/>
+              </a:rPr>
+              <a:t>言い切り方: “ユーザーインタビューを置き換える”ではなく、“ユーザーインタビュー前に、聞くべき問いと反応仮説を作る”。</a:t>
+            </a:r>
+          </a:p>
+        </p:txBody>
+      </p:sp>
+    </p:spTree>
+    <p:extLst>
+      <p:ext uri="{BB962C8B-B14F-4D97-AF65-F5344CB8AC3E}">
+        <p14:creationId xmlns:p14="http://schemas.microsoft.com/office/powerpoint/2010/main" val="160987543"/>
+      </p:ext>
+    </p:extLst>
+  </p:cSld>
+</p:sld>
+</file>
+
+<file path=ppt/slides/slide11.xml><?xml version="1.0" encoding="utf-8"?>
+<p:sld xmlns:p="http://schemas.openxmlformats.org/presentationml/2006/main">
+  <p:cSld>
+    <p:spTree>
+      <p:nvGrpSpPr>
+        <p:cNvPr id="1" name=""/>
+        <p:cNvGrpSpPr/>
+        <p:nvPr/>
+      </p:nvGrpSpPr>
+      <p:grpSpPr>
+        <a:xfrm xmlns:a="http://schemas.openxmlformats.org/drawingml/2006/main"/>
+      </p:grpSpPr>
+      <p:sp>
+        <p:nvSpPr>
+          <p:cNvPr id="1" name="">
+            <a:extLst xmlns:a="http://schemas.openxmlformats.org/drawingml/2006/main">
+              <a:ext uri="{FF2B5EF4-FFF2-40B4-BE49-F238E27FC236}">
+                <a16:creationId xmlns:a16="http://schemas.microsoft.com/office/drawing/2014/main" id="{734FF0BC-C173-4EB7-BDEE-F1468D0E2949}"/>
+              </a:ext>
+            </a:extLst>
+          </p:cNvPr>
+          <p:cNvSpPr>
+            <a:spLocks xmlns:a="http://schemas.openxmlformats.org/drawingml/2006/main" noGrp="1"/>
+          </p:cNvSpPr>
+          <p:nvPr/>
+        </p:nvSpPr>
+        <p:spPr>
+          <a:xfrm xmlns:a="http://schemas.openxmlformats.org/drawingml/2006/main">
+            <a:off x="0" y="0"/>
+            <a:ext cx="12192000" cy="6858000"/>
+          </a:xfrm>
+          <a:prstGeom xmlns:a="http://schemas.openxmlformats.org/drawingml/2006/main" prst="rect">
+            <a:avLst/>
+          </a:prstGeom>
+          <a:solidFill xmlns:a="http://schemas.openxmlformats.org/drawingml/2006/main">
+            <a:srgbClr val="FFFFFF"/>
+          </a:solidFill>
+          <a:ln xmlns:a="http://schemas.openxmlformats.org/drawingml/2006/main" w="0">
+            <a:solidFill>
+              <a:srgbClr val="000000">
+                <a:alpha val="0"/>
+              </a:srgbClr>
+            </a:solidFill>
+            <a:prstDash val="solid"/>
+          </a:ln>
+        </p:spPr>
+      </p:sp>
+      <p:sp>
+        <p:nvSpPr>
+          <p:cNvPr id="2" name="">
+            <a:extLst xmlns:a="http://schemas.openxmlformats.org/drawingml/2006/main">
+              <a:ext uri="{FF2B5EF4-FFF2-40B4-BE49-F238E27FC236}">
+                <a16:creationId xmlns:a16="http://schemas.microsoft.com/office/drawing/2014/main" id="{5E100451-4D5B-4215-8EDC-F77CA7820B5B}"/>
+              </a:ext>
+            </a:extLst>
+          </p:cNvPr>
+          <p:cNvSpPr>
+            <a:spLocks xmlns:a="http://schemas.openxmlformats.org/drawingml/2006/main" noGrp="1"/>
+          </p:cNvSpPr>
+          <p:nvPr/>
+        </p:nvSpPr>
+        <p:spPr>
+          <a:xfrm xmlns:a="http://schemas.openxmlformats.org/drawingml/2006/main">
+            <a:off x="0" y="0"/>
+            <a:ext cx="12192000" cy="171450"/>
+          </a:xfrm>
+          <a:prstGeom xmlns:a="http://schemas.openxmlformats.org/drawingml/2006/main" prst="rect">
+            <a:avLst/>
+          </a:prstGeom>
+          <a:solidFill xmlns:a="http://schemas.openxmlformats.org/drawingml/2006/main">
+            <a:srgbClr val="10231E"/>
+          </a:solidFill>
+          <a:ln xmlns:a="http://schemas.openxmlformats.org/drawingml/2006/main" w="0">
+            <a:solidFill>
+              <a:srgbClr val="000000">
+                <a:alpha val="0"/>
+              </a:srgbClr>
+            </a:solidFill>
+            <a:prstDash val="solid"/>
+          </a:ln>
+        </p:spPr>
+      </p:sp>
+      <p:sp>
+        <p:nvSpPr>
+          <p:cNvPr id="3" name="">
+            <a:extLst xmlns:a="http://schemas.openxmlformats.org/drawingml/2006/main">
+              <a:ext uri="{FF2B5EF4-FFF2-40B4-BE49-F238E27FC236}">
+                <a16:creationId xmlns:a16="http://schemas.microsoft.com/office/drawing/2014/main" id="{849A19DB-4803-4F88-B373-5B0E27F1EF18}"/>
+              </a:ext>
+            </a:extLst>
+          </p:cNvPr>
+          <p:cNvSpPr>
+            <a:spLocks xmlns:a="http://schemas.openxmlformats.org/drawingml/2006/main" noGrp="1"/>
+          </p:cNvSpPr>
+          <p:nvPr/>
+        </p:nvSpPr>
+        <p:spPr>
+          <a:xfrm xmlns:a="http://schemas.openxmlformats.org/drawingml/2006/main">
+            <a:off x="514350" y="438150"/>
+            <a:ext cx="2476500" cy="228600"/>
+          </a:xfrm>
+          <a:prstGeom xmlns:a="http://schemas.openxmlformats.org/drawingml/2006/main" prst="rect">
+            <a:avLst/>
+          </a:prstGeom>
+          <a:solidFill xmlns:a="http://schemas.openxmlformats.org/drawingml/2006/main">
+            <a:srgbClr val="000000">
+              <a:alpha val="0"/>
+            </a:srgbClr>
+          </a:solidFill>
+          <a:ln xmlns:a="http://schemas.openxmlformats.org/drawingml/2006/main" w="0">
+            <a:solidFill>
+              <a:srgbClr val="000000">
+                <a:alpha val="0"/>
+              </a:srgbClr>
+            </a:solidFill>
+            <a:prstDash val="solid"/>
+          </a:ln>
+        </p:spPr>
+        <p:txBody>
+          <a:bodyPr xmlns:a="http://schemas.openxmlformats.org/drawingml/2006/main" lIns="0" tIns="0" rIns="0" bIns="0" anchor="t"/>
+          <a:lstStyle xmlns:a="http://schemas.openxmlformats.org/drawingml/2006/main"/>
+          <a:p xmlns:a="http://schemas.openxmlformats.org/drawingml/2006/main">
+            <a:pPr algn="l">
+              <a:defRPr sz="1125" b="1">
+                <a:solidFill>
+                  <a:srgbClr val="2F6F8F"/>
+                </a:solidFill>
+                <a:latin typeface="Aptos"/>
+                <a:ea typeface="Aptos"/>
+                <a:cs typeface="Aptos"/>
+              </a:defRPr>
+            </a:pPr>
+            <a:r>
+              <a:rPr sz="1125" b="1">
+                <a:solidFill>
+                  <a:srgbClr val="2F6F8F"/>
+                </a:solidFill>
+                <a:latin typeface="Aptos"/>
+                <a:ea typeface="Aptos"/>
+                <a:cs typeface="Aptos"/>
+              </a:rPr>
+              <a:t>構築イメージ</a:t>
+            </a:r>
+          </a:p>
+        </p:txBody>
+      </p:sp>
+      <p:sp>
+        <p:nvSpPr>
+          <p:cNvPr id="4" name="">
+            <a:extLst xmlns:a="http://schemas.openxmlformats.org/drawingml/2006/main">
+              <a:ext uri="{FF2B5EF4-FFF2-40B4-BE49-F238E27FC236}">
+                <a16:creationId xmlns:a16="http://schemas.microsoft.com/office/drawing/2014/main" id="{0ED5E94B-A04C-4396-BBC3-497E38170C3C}"/>
+              </a:ext>
+            </a:extLst>
+          </p:cNvPr>
+          <p:cNvSpPr>
+            <a:spLocks xmlns:a="http://schemas.openxmlformats.org/drawingml/2006/main" noGrp="1"/>
+          </p:cNvSpPr>
+          <p:nvPr/>
+        </p:nvSpPr>
+        <p:spPr>
+          <a:xfrm xmlns:a="http://schemas.openxmlformats.org/drawingml/2006/main">
+            <a:off x="514350" y="800100"/>
+            <a:ext cx="7810500" cy="838200"/>
+          </a:xfrm>
+          <a:prstGeom xmlns:a="http://schemas.openxmlformats.org/drawingml/2006/main" prst="rect">
+            <a:avLst/>
+          </a:prstGeom>
+          <a:solidFill xmlns:a="http://schemas.openxmlformats.org/drawingml/2006/main">
+            <a:srgbClr val="000000">
+              <a:alpha val="0"/>
+            </a:srgbClr>
+          </a:solidFill>
+          <a:ln xmlns:a="http://schemas.openxmlformats.org/drawingml/2006/main" w="0">
+            <a:solidFill>
+              <a:srgbClr val="000000">
+                <a:alpha val="0"/>
+              </a:srgbClr>
+            </a:solidFill>
+            <a:prstDash val="solid"/>
+          </a:ln>
+        </p:spPr>
+        <p:txBody>
+          <a:bodyPr xmlns:a="http://schemas.openxmlformats.org/drawingml/2006/main" lIns="0" tIns="0" rIns="0" bIns="0" anchor="t"/>
+          <a:lstStyle xmlns:a="http://schemas.openxmlformats.org/drawingml/2006/main"/>
+          <a:p xmlns:a="http://schemas.openxmlformats.org/drawingml/2006/main">
+            <a:pPr algn="l">
+              <a:defRPr sz="2550" b="1">
+                <a:solidFill>
+                  <a:srgbClr val="151D1A"/>
+                </a:solidFill>
+                <a:latin typeface="Aptos"/>
+                <a:ea typeface="Aptos"/>
+                <a:cs typeface="Aptos"/>
+              </a:defRPr>
+            </a:pPr>
+            <a:r>
+              <a:rPr sz="2550" b="1">
+                <a:solidFill>
+                  <a:srgbClr val="151D1A"/>
+                </a:solidFill>
+                <a:latin typeface="Aptos"/>
+                <a:ea typeface="Aptos"/>
+                <a:cs typeface="Aptos"/>
+              </a:rPr>
+              <a:t>作るとしたら、1000人調査は</a:t>
+            </a:r>
+          </a:p>
+          <a:p xmlns:a="http://schemas.openxmlformats.org/drawingml/2006/main">
+            <a:pPr algn="l">
+              <a:defRPr sz="2550" b="1">
+                <a:solidFill>
+                  <a:srgbClr val="151D1A"/>
+                </a:solidFill>
+                <a:latin typeface="Aptos"/>
+                <a:ea typeface="Aptos"/>
+                <a:cs typeface="Aptos"/>
+              </a:defRPr>
+            </a:pPr>
+            <a:r>
+              <a:rPr sz="2550" b="1">
+                <a:solidFill>
+                  <a:srgbClr val="151D1A"/>
+                </a:solidFill>
+                <a:latin typeface="Aptos"/>
+                <a:ea typeface="Aptos"/>
+                <a:cs typeface="Aptos"/>
+              </a:rPr>
+              <a:t>“非同期インタビュー・ジョブ”として構築する</a:t>
+            </a:r>
+          </a:p>
+        </p:txBody>
+      </p:sp>
+      <p:sp>
+        <p:nvSpPr>
+          <p:cNvPr id="5" name="">
+            <a:extLst xmlns:a="http://schemas.openxmlformats.org/drawingml/2006/main">
+              <a:ext uri="{FF2B5EF4-FFF2-40B4-BE49-F238E27FC236}">
+                <a16:creationId xmlns:a16="http://schemas.microsoft.com/office/drawing/2014/main" id="{241CE786-40A7-44CF-A0E4-5A401B80EB95}"/>
+              </a:ext>
+            </a:extLst>
+          </p:cNvPr>
+          <p:cNvSpPr>
+            <a:spLocks xmlns:a="http://schemas.openxmlformats.org/drawingml/2006/main" noGrp="1"/>
+          </p:cNvSpPr>
+          <p:nvPr/>
+        </p:nvSpPr>
+        <p:spPr>
+          <a:xfrm xmlns:a="http://schemas.openxmlformats.org/drawingml/2006/main">
+            <a:off x="533400" y="1809750"/>
+            <a:ext cx="7239000" cy="419100"/>
+          </a:xfrm>
+          <a:prstGeom xmlns:a="http://schemas.openxmlformats.org/drawingml/2006/main" prst="rect">
+            <a:avLst/>
+          </a:prstGeom>
+          <a:solidFill xmlns:a="http://schemas.openxmlformats.org/drawingml/2006/main">
+            <a:srgbClr val="000000">
+              <a:alpha val="0"/>
+            </a:srgbClr>
+          </a:solidFill>
+          <a:ln xmlns:a="http://schemas.openxmlformats.org/drawingml/2006/main" w="0">
+            <a:solidFill>
+              <a:srgbClr val="000000">
+                <a:alpha val="0"/>
+              </a:srgbClr>
+            </a:solidFill>
+            <a:prstDash val="solid"/>
+          </a:ln>
+        </p:spPr>
+        <p:txBody>
+          <a:bodyPr xmlns:a="http://schemas.openxmlformats.org/drawingml/2006/main" lIns="0" tIns="0" rIns="0" bIns="0" anchor="t"/>
+          <a:lstStyle xmlns:a="http://schemas.openxmlformats.org/drawingml/2006/main"/>
+          <a:p xmlns:a="http://schemas.openxmlformats.org/drawingml/2006/main">
+            <a:pPr algn="l">
+              <a:defRPr sz="1275" b="0">
+                <a:solidFill>
+                  <a:srgbClr val="66716B"/>
+                </a:solidFill>
+                <a:latin typeface="Aptos"/>
+                <a:ea typeface="Aptos"/>
+                <a:cs typeface="Aptos"/>
+              </a:defRPr>
+            </a:pPr>
+            <a:r>
+              <a:rPr sz="1275" b="0">
+                <a:solidFill>
+                  <a:srgbClr val="66716B"/>
+                </a:solidFill>
+                <a:latin typeface="Aptos"/>
+                <a:ea typeface="Aptos"/>
+                <a:cs typeface="Aptos"/>
+              </a:rPr>
+              <a:t>複数ユーザーが並行利用できるよう、画面操作とAI処理を分離。1000人は即時応答ではなく、ジョブ実行・集計・通知の流れにする。</a:t>
+            </a:r>
+          </a:p>
+        </p:txBody>
+      </p:sp>
+      <p:sp>
+        <p:nvSpPr>
+          <p:cNvPr id="6" name="">
+            <a:extLst xmlns:a="http://schemas.openxmlformats.org/drawingml/2006/main">
+              <a:ext uri="{FF2B5EF4-FFF2-40B4-BE49-F238E27FC236}">
+                <a16:creationId xmlns:a16="http://schemas.microsoft.com/office/drawing/2014/main" id="{69F659DA-5693-4950-8026-DCF2EB5BECA8}"/>
+              </a:ext>
+            </a:extLst>
+          </p:cNvPr>
+          <p:cNvSpPr>
+            <a:spLocks xmlns:a="http://schemas.openxmlformats.org/drawingml/2006/main" noGrp="1"/>
+          </p:cNvSpPr>
+          <p:nvPr/>
+        </p:nvSpPr>
+        <p:spPr>
+          <a:xfrm xmlns:a="http://schemas.openxmlformats.org/drawingml/2006/main">
+            <a:off x="571500" y="2857500"/>
+            <a:ext cx="2324100" cy="1790700"/>
+          </a:xfrm>
+          <a:prstGeom xmlns:a="http://schemas.openxmlformats.org/drawingml/2006/main" prst="rect">
+            <a:avLst/>
+          </a:prstGeom>
+          <a:solidFill xmlns:a="http://schemas.openxmlformats.org/drawingml/2006/main">
+            <a:srgbClr val="F7F3EA"/>
+          </a:solidFill>
+          <a:ln xmlns:a="http://schemas.openxmlformats.org/drawingml/2006/main" w="9525">
+            <a:solidFill>
+              <a:srgbClr val="D8D2C8"/>
+            </a:solidFill>
+            <a:prstDash val="solid"/>
+          </a:ln>
+        </p:spPr>
+      </p:sp>
+      <p:sp>
+        <p:nvSpPr>
+          <p:cNvPr id="7" name="">
+            <a:extLst xmlns:a="http://schemas.openxmlformats.org/drawingml/2006/main">
+              <a:ext uri="{FF2B5EF4-FFF2-40B4-BE49-F238E27FC236}">
+                <a16:creationId xmlns:a16="http://schemas.microsoft.com/office/drawing/2014/main" id="{5A3FAF3E-0E56-485A-A56B-A9588C52CC07}"/>
+              </a:ext>
+            </a:extLst>
+          </p:cNvPr>
+          <p:cNvSpPr>
+            <a:spLocks xmlns:a="http://schemas.openxmlformats.org/drawingml/2006/main" noGrp="1"/>
+          </p:cNvSpPr>
+          <p:nvPr/>
+        </p:nvSpPr>
+        <p:spPr>
+          <a:xfrm xmlns:a="http://schemas.openxmlformats.org/drawingml/2006/main">
+            <a:off x="762000" y="3105150"/>
+            <a:ext cx="361950" cy="361950"/>
+          </a:xfrm>
+          <a:prstGeom xmlns:a="http://schemas.openxmlformats.org/drawingml/2006/main" prst="rect">
+            <a:avLst/>
+          </a:prstGeom>
+          <a:solidFill xmlns:a="http://schemas.openxmlformats.org/drawingml/2006/main">
+            <a:srgbClr val="D96F32"/>
+          </a:solidFill>
+          <a:ln xmlns:a="http://schemas.openxmlformats.org/drawingml/2006/main" w="0">
+            <a:solidFill>
+              <a:srgbClr val="000000">
+                <a:alpha val="0"/>
+              </a:srgbClr>
+            </a:solidFill>
+            <a:prstDash val="solid"/>
+          </a:ln>
+        </p:spPr>
+      </p:sp>
+      <p:sp>
+        <p:nvSpPr>
+          <p:cNvPr id="8" name="">
+            <a:extLst xmlns:a="http://schemas.openxmlformats.org/drawingml/2006/main">
+              <a:ext uri="{FF2B5EF4-FFF2-40B4-BE49-F238E27FC236}">
+                <a16:creationId xmlns:a16="http://schemas.microsoft.com/office/drawing/2014/main" id="{513C6984-0867-4F49-AB66-B4DBE1393A70}"/>
+              </a:ext>
+            </a:extLst>
+          </p:cNvPr>
+          <p:cNvSpPr>
+            <a:spLocks xmlns:a="http://schemas.openxmlformats.org/drawingml/2006/main" noGrp="1"/>
+          </p:cNvSpPr>
+          <p:nvPr/>
+        </p:nvSpPr>
+        <p:spPr>
+          <a:xfrm xmlns:a="http://schemas.openxmlformats.org/drawingml/2006/main">
+            <a:off x="885825" y="3200400"/>
+            <a:ext cx="114300" cy="133350"/>
+          </a:xfrm>
+          <a:prstGeom xmlns:a="http://schemas.openxmlformats.org/drawingml/2006/main" prst="rect">
+            <a:avLst/>
+          </a:prstGeom>
+          <a:solidFill xmlns:a="http://schemas.openxmlformats.org/drawingml/2006/main">
+            <a:srgbClr val="000000">
+              <a:alpha val="0"/>
+            </a:srgbClr>
+          </a:solidFill>
+          <a:ln xmlns:a="http://schemas.openxmlformats.org/drawingml/2006/main" w="0">
+            <a:solidFill>
+              <a:srgbClr val="000000">
+                <a:alpha val="0"/>
+              </a:srgbClr>
+            </a:solidFill>
+            <a:prstDash val="solid"/>
+          </a:ln>
+        </p:spPr>
+        <p:txBody>
+          <a:bodyPr xmlns:a="http://schemas.openxmlformats.org/drawingml/2006/main" lIns="0" tIns="0" rIns="0" bIns="0" anchor="t"/>
+          <a:lstStyle xmlns:a="http://schemas.openxmlformats.org/drawingml/2006/main"/>
+          <a:p xmlns:a="http://schemas.openxmlformats.org/drawingml/2006/main">
+            <a:pPr algn="ctr">
+              <a:defRPr sz="1125" b="1">
+                <a:solidFill>
+                  <a:srgbClr val="FFFFFF"/>
+                </a:solidFill>
+                <a:latin typeface="Aptos"/>
+                <a:ea typeface="Aptos"/>
+                <a:cs typeface="Aptos"/>
+              </a:defRPr>
+            </a:pPr>
+            <a:r>
+              <a:rPr sz="1125" b="1">
+                <a:solidFill>
+                  <a:srgbClr val="FFFFFF"/>
+                </a:solidFill>
+                <a:latin typeface="Aptos"/>
+                <a:ea typeface="Aptos"/>
+                <a:cs typeface="Aptos"/>
+              </a:rPr>
+              <a:t>1</a:t>
+            </a:r>
+          </a:p>
+        </p:txBody>
+      </p:sp>
+      <p:sp>
+        <p:nvSpPr>
+          <p:cNvPr id="9" name="">
+            <a:extLst xmlns:a="http://schemas.openxmlformats.org/drawingml/2006/main">
+              <a:ext uri="{FF2B5EF4-FFF2-40B4-BE49-F238E27FC236}">
+                <a16:creationId xmlns:a16="http://schemas.microsoft.com/office/drawing/2014/main" id="{F12C9350-0405-4174-BCC2-905659571257}"/>
+              </a:ext>
+            </a:extLst>
+          </p:cNvPr>
+          <p:cNvSpPr>
+            <a:spLocks xmlns:a="http://schemas.openxmlformats.org/drawingml/2006/main" noGrp="1"/>
+          </p:cNvSpPr>
+          <p:nvPr/>
+        </p:nvSpPr>
+        <p:spPr>
+          <a:xfrm xmlns:a="http://schemas.openxmlformats.org/drawingml/2006/main">
+            <a:off x="762000" y="3676650"/>
+            <a:ext cx="1809750" cy="247650"/>
+          </a:xfrm>
+          <a:prstGeom xmlns:a="http://schemas.openxmlformats.org/drawingml/2006/main" prst="rect">
+            <a:avLst/>
+          </a:prstGeom>
+          <a:solidFill xmlns:a="http://schemas.openxmlformats.org/drawingml/2006/main">
+            <a:srgbClr val="000000">
+              <a:alpha val="0"/>
+            </a:srgbClr>
+          </a:solidFill>
+          <a:ln xmlns:a="http://schemas.openxmlformats.org/drawingml/2006/main" w="0">
+            <a:solidFill>
+              <a:srgbClr val="000000">
+                <a:alpha val="0"/>
+              </a:srgbClr>
+            </a:solidFill>
+            <a:prstDash val="solid"/>
+          </a:ln>
+        </p:spPr>
+        <p:txBody>
+          <a:bodyPr xmlns:a="http://schemas.openxmlformats.org/drawingml/2006/main" lIns="0" tIns="0" rIns="0" bIns="0" anchor="t"/>
+          <a:lstStyle xmlns:a="http://schemas.openxmlformats.org/drawingml/2006/main"/>
+          <a:p xmlns:a="http://schemas.openxmlformats.org/drawingml/2006/main">
+            <a:pPr algn="l">
+              <a:defRPr sz="1575" b="1">
+                <a:solidFill>
+                  <a:srgbClr val="151D1A"/>
+                </a:solidFill>
+                <a:latin typeface="Aptos"/>
+                <a:ea typeface="Aptos"/>
+                <a:cs typeface="Aptos"/>
+              </a:defRPr>
+            </a:pPr>
+            <a:r>
+              <a:rPr sz="1575" b="1">
+                <a:solidFill>
+                  <a:srgbClr val="151D1A"/>
+                </a:solidFill>
+                <a:latin typeface="Aptos"/>
+                <a:ea typeface="Aptos"/>
+                <a:cs typeface="Aptos"/>
+              </a:rPr>
+              <a:t>調査設計</a:t>
+            </a:r>
+          </a:p>
+        </p:txBody>
+      </p:sp>
+      <p:sp>
+        <p:nvSpPr>
+          <p:cNvPr id="10" name="">
+            <a:extLst xmlns:a="http://schemas.openxmlformats.org/drawingml/2006/main">
+              <a:ext uri="{FF2B5EF4-FFF2-40B4-BE49-F238E27FC236}">
+                <a16:creationId xmlns:a16="http://schemas.microsoft.com/office/drawing/2014/main" id="{4A5ECE89-F40A-4323-B8D5-5DE54317DA2B}"/>
+              </a:ext>
+            </a:extLst>
+          </p:cNvPr>
+          <p:cNvSpPr>
+            <a:spLocks xmlns:a="http://schemas.openxmlformats.org/drawingml/2006/main" noGrp="1"/>
+          </p:cNvSpPr>
+          <p:nvPr/>
+        </p:nvSpPr>
+        <p:spPr>
+          <a:xfrm xmlns:a="http://schemas.openxmlformats.org/drawingml/2006/main">
+            <a:off x="762000" y="4057650"/>
+            <a:ext cx="1809750" cy="400050"/>
+          </a:xfrm>
+          <a:prstGeom xmlns:a="http://schemas.openxmlformats.org/drawingml/2006/main" prst="rect">
+            <a:avLst/>
+          </a:prstGeom>
+          <a:solidFill xmlns:a="http://schemas.openxmlformats.org/drawingml/2006/main">
+            <a:srgbClr val="000000">
+              <a:alpha val="0"/>
+            </a:srgbClr>
+          </a:solidFill>
+          <a:ln xmlns:a="http://schemas.openxmlformats.org/drawingml/2006/main" w="0">
+            <a:solidFill>
+              <a:srgbClr val="000000">
+                <a:alpha val="0"/>
+              </a:srgbClr>
+            </a:solidFill>
+            <a:prstDash val="solid"/>
+          </a:ln>
+        </p:spPr>
+        <p:txBody>
+          <a:bodyPr xmlns:a="http://schemas.openxmlformats.org/drawingml/2006/main" lIns="0" tIns="0" rIns="0" bIns="0" anchor="t"/>
+          <a:lstStyle xmlns:a="http://schemas.openxmlformats.org/drawingml/2006/main"/>
+          <a:p xmlns:a="http://schemas.openxmlformats.org/drawingml/2006/main">
+            <a:pPr algn="l">
+              <a:defRPr sz="1088" b="0">
+                <a:solidFill>
+                  <a:srgbClr val="66716B"/>
+                </a:solidFill>
+                <a:latin typeface="Aptos"/>
+                <a:ea typeface="Aptos"/>
+                <a:cs typeface="Aptos"/>
+              </a:defRPr>
+            </a:pPr>
+            <a:r>
+              <a:rPr sz="1088" b="0">
+                <a:solidFill>
+                  <a:srgbClr val="66716B"/>
+                </a:solidFill>
+                <a:latin typeface="Aptos"/>
+                <a:ea typeface="Aptos"/>
+                <a:cs typeface="Aptos"/>
+              </a:rPr>
+              <a:t>UI画像A/B、母集団、評価軸、質問リストを登録</a:t>
+            </a:r>
+          </a:p>
+        </p:txBody>
+      </p:sp>
+      <p:sp>
+        <p:nvSpPr>
+          <p:cNvPr id="11" name="">
+            <a:extLst xmlns:a="http://schemas.openxmlformats.org/drawingml/2006/main">
+              <a:ext uri="{FF2B5EF4-FFF2-40B4-BE49-F238E27FC236}">
+                <a16:creationId xmlns:a16="http://schemas.microsoft.com/office/drawing/2014/main" id="{218297F4-A319-43DE-9CBD-D10FF6C0618A}"/>
+              </a:ext>
+            </a:extLst>
+          </p:cNvPr>
+          <p:cNvSpPr>
+            <a:spLocks xmlns:a="http://schemas.openxmlformats.org/drawingml/2006/main" noGrp="1"/>
+          </p:cNvSpPr>
+          <p:nvPr/>
+        </p:nvSpPr>
+        <p:spPr>
+          <a:xfrm xmlns:a="http://schemas.openxmlformats.org/drawingml/2006/main">
+            <a:off x="3352800" y="2857500"/>
+            <a:ext cx="2324100" cy="1790700"/>
+          </a:xfrm>
+          <a:prstGeom xmlns:a="http://schemas.openxmlformats.org/drawingml/2006/main" prst="rect">
+            <a:avLst/>
+          </a:prstGeom>
+          <a:solidFill xmlns:a="http://schemas.openxmlformats.org/drawingml/2006/main">
+            <a:srgbClr val="F7F3EA"/>
+          </a:solidFill>
+          <a:ln xmlns:a="http://schemas.openxmlformats.org/drawingml/2006/main" w="9525">
+            <a:solidFill>
+              <a:srgbClr val="D8D2C8"/>
+            </a:solidFill>
+            <a:prstDash val="solid"/>
+          </a:ln>
+        </p:spPr>
+      </p:sp>
+      <p:sp>
+        <p:nvSpPr>
+          <p:cNvPr id="12" name="">
+            <a:extLst xmlns:a="http://schemas.openxmlformats.org/drawingml/2006/main">
+              <a:ext uri="{FF2B5EF4-FFF2-40B4-BE49-F238E27FC236}">
+                <a16:creationId xmlns:a16="http://schemas.microsoft.com/office/drawing/2014/main" id="{893A96DB-68CD-4589-8524-313C23DABDB3}"/>
+              </a:ext>
+            </a:extLst>
+          </p:cNvPr>
+          <p:cNvSpPr>
+            <a:spLocks xmlns:a="http://schemas.openxmlformats.org/drawingml/2006/main" noGrp="1"/>
+          </p:cNvSpPr>
+          <p:nvPr/>
+        </p:nvSpPr>
+        <p:spPr>
+          <a:xfrm xmlns:a="http://schemas.openxmlformats.org/drawingml/2006/main">
+            <a:off x="3543300" y="3105150"/>
+            <a:ext cx="361950" cy="361950"/>
+          </a:xfrm>
+          <a:prstGeom xmlns:a="http://schemas.openxmlformats.org/drawingml/2006/main" prst="rect">
+            <a:avLst/>
+          </a:prstGeom>
+          <a:solidFill xmlns:a="http://schemas.openxmlformats.org/drawingml/2006/main">
+            <a:srgbClr val="2F6F8F"/>
+          </a:solidFill>
+          <a:ln xmlns:a="http://schemas.openxmlformats.org/drawingml/2006/main" w="0">
+            <a:solidFill>
+              <a:srgbClr val="000000">
+                <a:alpha val="0"/>
+              </a:srgbClr>
+            </a:solidFill>
+            <a:prstDash val="solid"/>
+          </a:ln>
+        </p:spPr>
+      </p:sp>
+      <p:sp>
+        <p:nvSpPr>
+          <p:cNvPr id="13" name="">
+            <a:extLst xmlns:a="http://schemas.openxmlformats.org/drawingml/2006/main">
+              <a:ext uri="{FF2B5EF4-FFF2-40B4-BE49-F238E27FC236}">
+                <a16:creationId xmlns:a16="http://schemas.microsoft.com/office/drawing/2014/main" id="{62640915-2C3A-478F-A323-735A66970F48}"/>
+              </a:ext>
+            </a:extLst>
+          </p:cNvPr>
+          <p:cNvSpPr>
+            <a:spLocks xmlns:a="http://schemas.openxmlformats.org/drawingml/2006/main" noGrp="1"/>
+          </p:cNvSpPr>
+          <p:nvPr/>
+        </p:nvSpPr>
+        <p:spPr>
+          <a:xfrm xmlns:a="http://schemas.openxmlformats.org/drawingml/2006/main">
+            <a:off x="3667125" y="3200400"/>
+            <a:ext cx="114300" cy="133350"/>
+          </a:xfrm>
+          <a:prstGeom xmlns:a="http://schemas.openxmlformats.org/drawingml/2006/main" prst="rect">
+            <a:avLst/>
+          </a:prstGeom>
+          <a:solidFill xmlns:a="http://schemas.openxmlformats.org/drawingml/2006/main">
+            <a:srgbClr val="000000">
+              <a:alpha val="0"/>
+            </a:srgbClr>
+          </a:solidFill>
+          <a:ln xmlns:a="http://schemas.openxmlformats.org/drawingml/2006/main" w="0">
+            <a:solidFill>
+              <a:srgbClr val="000000">
+                <a:alpha val="0"/>
+              </a:srgbClr>
+            </a:solidFill>
+            <a:prstDash val="solid"/>
+          </a:ln>
+        </p:spPr>
+        <p:txBody>
+          <a:bodyPr xmlns:a="http://schemas.openxmlformats.org/drawingml/2006/main" lIns="0" tIns="0" rIns="0" bIns="0" anchor="t"/>
+          <a:lstStyle xmlns:a="http://schemas.openxmlformats.org/drawingml/2006/main"/>
+          <a:p xmlns:a="http://schemas.openxmlformats.org/drawingml/2006/main">
+            <a:pPr algn="ctr">
+              <a:defRPr sz="1125" b="1">
+                <a:solidFill>
+                  <a:srgbClr val="FFFFFF"/>
+                </a:solidFill>
+                <a:latin typeface="Aptos"/>
+                <a:ea typeface="Aptos"/>
+                <a:cs typeface="Aptos"/>
+              </a:defRPr>
+            </a:pPr>
+            <a:r>
+              <a:rPr sz="1125" b="1">
+                <a:solidFill>
+                  <a:srgbClr val="FFFFFF"/>
+                </a:solidFill>
+                <a:latin typeface="Aptos"/>
+                <a:ea typeface="Aptos"/>
+                <a:cs typeface="Aptos"/>
+              </a:rPr>
+              <a:t>2</a:t>
+            </a:r>
+          </a:p>
+        </p:txBody>
+      </p:sp>
+      <p:sp>
+        <p:nvSpPr>
+          <p:cNvPr id="14" name="">
+            <a:extLst xmlns:a="http://schemas.openxmlformats.org/drawingml/2006/main">
+              <a:ext uri="{FF2B5EF4-FFF2-40B4-BE49-F238E27FC236}">
+                <a16:creationId xmlns:a16="http://schemas.microsoft.com/office/drawing/2014/main" id="{BD21F623-4190-4847-BC56-734D1B9AAFDA}"/>
+              </a:ext>
+            </a:extLst>
+          </p:cNvPr>
+          <p:cNvSpPr>
+            <a:spLocks xmlns:a="http://schemas.openxmlformats.org/drawingml/2006/main" noGrp="1"/>
+          </p:cNvSpPr>
+          <p:nvPr/>
+        </p:nvSpPr>
+        <p:spPr>
+          <a:xfrm xmlns:a="http://schemas.openxmlformats.org/drawingml/2006/main">
+            <a:off x="3543300" y="3676650"/>
+            <a:ext cx="1809750" cy="247650"/>
+          </a:xfrm>
+          <a:prstGeom xmlns:a="http://schemas.openxmlformats.org/drawingml/2006/main" prst="rect">
+            <a:avLst/>
+          </a:prstGeom>
+          <a:solidFill xmlns:a="http://schemas.openxmlformats.org/drawingml/2006/main">
+            <a:srgbClr val="000000">
+              <a:alpha val="0"/>
+            </a:srgbClr>
+          </a:solidFill>
+          <a:ln xmlns:a="http://schemas.openxmlformats.org/drawingml/2006/main" w="0">
+            <a:solidFill>
+              <a:srgbClr val="000000">
+                <a:alpha val="0"/>
+              </a:srgbClr>
+            </a:solidFill>
+            <a:prstDash val="solid"/>
+          </a:ln>
+        </p:spPr>
+        <p:txBody>
+          <a:bodyPr xmlns:a="http://schemas.openxmlformats.org/drawingml/2006/main" lIns="0" tIns="0" rIns="0" bIns="0" anchor="t"/>
+          <a:lstStyle xmlns:a="http://schemas.openxmlformats.org/drawingml/2006/main"/>
+          <a:p xmlns:a="http://schemas.openxmlformats.org/drawingml/2006/main">
+            <a:pPr algn="l">
+              <a:defRPr sz="1575" b="1">
+                <a:solidFill>
+                  <a:srgbClr val="151D1A"/>
+                </a:solidFill>
+                <a:latin typeface="Aptos"/>
+                <a:ea typeface="Aptos"/>
+                <a:cs typeface="Aptos"/>
+              </a:defRPr>
+            </a:pPr>
+            <a:r>
+              <a:rPr sz="1575" b="1">
+                <a:solidFill>
+                  <a:srgbClr val="151D1A"/>
+                </a:solidFill>
+                <a:latin typeface="Aptos"/>
+                <a:ea typeface="Aptos"/>
+                <a:cs typeface="Aptos"/>
+              </a:rPr>
+              <a:t>ペルソナ生成</a:t>
+            </a:r>
+          </a:p>
+        </p:txBody>
+      </p:sp>
+      <p:sp>
+        <p:nvSpPr>
+          <p:cNvPr id="15" name="">
+            <a:extLst xmlns:a="http://schemas.openxmlformats.org/drawingml/2006/main">
+              <a:ext uri="{FF2B5EF4-FFF2-40B4-BE49-F238E27FC236}">
+                <a16:creationId xmlns:a16="http://schemas.microsoft.com/office/drawing/2014/main" id="{033ADF7F-F451-4066-89A2-088E1CC0BCFE}"/>
+              </a:ext>
+            </a:extLst>
+          </p:cNvPr>
+          <p:cNvSpPr>
+            <a:spLocks xmlns:a="http://schemas.openxmlformats.org/drawingml/2006/main" noGrp="1"/>
+          </p:cNvSpPr>
+          <p:nvPr/>
+        </p:nvSpPr>
+        <p:spPr>
+          <a:xfrm xmlns:a="http://schemas.openxmlformats.org/drawingml/2006/main">
+            <a:off x="3543300" y="4057650"/>
+            <a:ext cx="1809750" cy="400050"/>
+          </a:xfrm>
+          <a:prstGeom xmlns:a="http://schemas.openxmlformats.org/drawingml/2006/main" prst="rect">
+            <a:avLst/>
+          </a:prstGeom>
+          <a:solidFill xmlns:a="http://schemas.openxmlformats.org/drawingml/2006/main">
+            <a:srgbClr val="000000">
+              <a:alpha val="0"/>
+            </a:srgbClr>
+          </a:solidFill>
+          <a:ln xmlns:a="http://schemas.openxmlformats.org/drawingml/2006/main" w="0">
+            <a:solidFill>
+              <a:srgbClr val="000000">
+                <a:alpha val="0"/>
+              </a:srgbClr>
+            </a:solidFill>
+            <a:prstDash val="solid"/>
+          </a:ln>
+        </p:spPr>
+        <p:txBody>
+          <a:bodyPr xmlns:a="http://schemas.openxmlformats.org/drawingml/2006/main" lIns="0" tIns="0" rIns="0" bIns="0" anchor="t"/>
+          <a:lstStyle xmlns:a="http://schemas.openxmlformats.org/drawingml/2006/main"/>
+          <a:p xmlns:a="http://schemas.openxmlformats.org/drawingml/2006/main">
+            <a:pPr algn="l">
+              <a:defRPr sz="1088" b="0">
+                <a:solidFill>
+                  <a:srgbClr val="66716B"/>
+                </a:solidFill>
+                <a:latin typeface="Aptos"/>
+                <a:ea typeface="Aptos"/>
+                <a:cs typeface="Aptos"/>
+              </a:defRPr>
+            </a:pPr>
+            <a:r>
+              <a:rPr sz="1088" b="0">
+                <a:solidFill>
+                  <a:srgbClr val="66716B"/>
+                </a:solidFill>
+                <a:latin typeface="Aptos"/>
+                <a:ea typeface="Aptos"/>
+                <a:cs typeface="Aptos"/>
+              </a:rPr>
+              <a:t>銀行IB利用者100〜1000人を年齢・利用頻度別に生成</a:t>
+            </a:r>
+          </a:p>
+        </p:txBody>
+      </p:sp>
+      <p:sp>
+        <p:nvSpPr>
+          <p:cNvPr id="16" name="">
+            <a:extLst xmlns:a="http://schemas.openxmlformats.org/drawingml/2006/main">
+              <a:ext uri="{FF2B5EF4-FFF2-40B4-BE49-F238E27FC236}">
+                <a16:creationId xmlns:a16="http://schemas.microsoft.com/office/drawing/2014/main" id="{3B5D2B6A-5F7A-401E-8557-44219345E0CC}"/>
+              </a:ext>
+            </a:extLst>
+          </p:cNvPr>
+          <p:cNvSpPr>
+            <a:spLocks xmlns:a="http://schemas.openxmlformats.org/drawingml/2006/main" noGrp="1"/>
+          </p:cNvSpPr>
+          <p:nvPr/>
+        </p:nvSpPr>
+        <p:spPr>
+          <a:xfrm xmlns:a="http://schemas.openxmlformats.org/drawingml/2006/main">
+            <a:off x="6134100" y="2857500"/>
+            <a:ext cx="2324100" cy="1790700"/>
+          </a:xfrm>
+          <a:prstGeom xmlns:a="http://schemas.openxmlformats.org/drawingml/2006/main" prst="rect">
+            <a:avLst/>
+          </a:prstGeom>
+          <a:solidFill xmlns:a="http://schemas.openxmlformats.org/drawingml/2006/main">
+            <a:srgbClr val="F7F3EA"/>
+          </a:solidFill>
+          <a:ln xmlns:a="http://schemas.openxmlformats.org/drawingml/2006/main" w="9525">
+            <a:solidFill>
+              <a:srgbClr val="D8D2C8"/>
+            </a:solidFill>
+            <a:prstDash val="solid"/>
+          </a:ln>
+        </p:spPr>
+      </p:sp>
+      <p:sp>
+        <p:nvSpPr>
+          <p:cNvPr id="17" name="">
+            <a:extLst xmlns:a="http://schemas.openxmlformats.org/drawingml/2006/main">
+              <a:ext uri="{FF2B5EF4-FFF2-40B4-BE49-F238E27FC236}">
+                <a16:creationId xmlns:a16="http://schemas.microsoft.com/office/drawing/2014/main" id="{0CE776B4-AF6F-4DDE-8308-7A9960C26E86}"/>
+              </a:ext>
+            </a:extLst>
+          </p:cNvPr>
+          <p:cNvSpPr>
+            <a:spLocks xmlns:a="http://schemas.openxmlformats.org/drawingml/2006/main" noGrp="1"/>
+          </p:cNvSpPr>
+          <p:nvPr/>
+        </p:nvSpPr>
+        <p:spPr>
+          <a:xfrm xmlns:a="http://schemas.openxmlformats.org/drawingml/2006/main">
+            <a:off x="6324600" y="3105150"/>
+            <a:ext cx="361950" cy="361950"/>
+          </a:xfrm>
+          <a:prstGeom xmlns:a="http://schemas.openxmlformats.org/drawingml/2006/main" prst="rect">
+            <a:avLst/>
+          </a:prstGeom>
+          <a:solidFill xmlns:a="http://schemas.openxmlformats.org/drawingml/2006/main">
+            <a:srgbClr val="105B47"/>
+          </a:solidFill>
+          <a:ln xmlns:a="http://schemas.openxmlformats.org/drawingml/2006/main" w="0">
+            <a:solidFill>
+              <a:srgbClr val="000000">
+                <a:alpha val="0"/>
+              </a:srgbClr>
+            </a:solidFill>
+            <a:prstDash val="solid"/>
+          </a:ln>
+        </p:spPr>
+      </p:sp>
+      <p:sp>
+        <p:nvSpPr>
+          <p:cNvPr id="18" name="">
+            <a:extLst xmlns:a="http://schemas.openxmlformats.org/drawingml/2006/main">
+              <a:ext uri="{FF2B5EF4-FFF2-40B4-BE49-F238E27FC236}">
+                <a16:creationId xmlns:a16="http://schemas.microsoft.com/office/drawing/2014/main" id="{B7092856-D0F0-48BF-9C15-36C11E8AA18E}"/>
+              </a:ext>
+            </a:extLst>
+          </p:cNvPr>
+          <p:cNvSpPr>
+            <a:spLocks xmlns:a="http://schemas.openxmlformats.org/drawingml/2006/main" noGrp="1"/>
+          </p:cNvSpPr>
+          <p:nvPr/>
+        </p:nvSpPr>
+        <p:spPr>
+          <a:xfrm xmlns:a="http://schemas.openxmlformats.org/drawingml/2006/main">
+            <a:off x="6448425" y="3200400"/>
+            <a:ext cx="114300" cy="133350"/>
+          </a:xfrm>
+          <a:prstGeom xmlns:a="http://schemas.openxmlformats.org/drawingml/2006/main" prst="rect">
+            <a:avLst/>
+          </a:prstGeom>
+          <a:solidFill xmlns:a="http://schemas.openxmlformats.org/drawingml/2006/main">
+            <a:srgbClr val="000000">
+              <a:alpha val="0"/>
+            </a:srgbClr>
+          </a:solidFill>
+          <a:ln xmlns:a="http://schemas.openxmlformats.org/drawingml/2006/main" w="0">
+            <a:solidFill>
+              <a:srgbClr val="000000">
+                <a:alpha val="0"/>
+              </a:srgbClr>
+            </a:solidFill>
+            <a:prstDash val="solid"/>
+          </a:ln>
+        </p:spPr>
+        <p:txBody>
+          <a:bodyPr xmlns:a="http://schemas.openxmlformats.org/drawingml/2006/main" lIns="0" tIns="0" rIns="0" bIns="0" anchor="t"/>
+          <a:lstStyle xmlns:a="http://schemas.openxmlformats.org/drawingml/2006/main"/>
+          <a:p xmlns:a="http://schemas.openxmlformats.org/drawingml/2006/main">
+            <a:pPr algn="ctr">
+              <a:defRPr sz="1125" b="1">
+                <a:solidFill>
+                  <a:srgbClr val="FFFFFF"/>
+                </a:solidFill>
+                <a:latin typeface="Aptos"/>
+                <a:ea typeface="Aptos"/>
+                <a:cs typeface="Aptos"/>
+              </a:defRPr>
+            </a:pPr>
+            <a:r>
+              <a:rPr sz="1125" b="1">
+                <a:solidFill>
+                  <a:srgbClr val="FFFFFF"/>
+                </a:solidFill>
+                <a:latin typeface="Aptos"/>
+                <a:ea typeface="Aptos"/>
+                <a:cs typeface="Aptos"/>
+              </a:rPr>
+              <a:t>3</a:t>
+            </a:r>
+          </a:p>
+        </p:txBody>
+      </p:sp>
+      <p:sp>
+        <p:nvSpPr>
+          <p:cNvPr id="19" name="">
+            <a:extLst xmlns:a="http://schemas.openxmlformats.org/drawingml/2006/main">
+              <a:ext uri="{FF2B5EF4-FFF2-40B4-BE49-F238E27FC236}">
+                <a16:creationId xmlns:a16="http://schemas.microsoft.com/office/drawing/2014/main" id="{45586BA4-130E-4F42-9FD0-356298E4902C}"/>
+              </a:ext>
+            </a:extLst>
+          </p:cNvPr>
+          <p:cNvSpPr>
+            <a:spLocks xmlns:a="http://schemas.openxmlformats.org/drawingml/2006/main" noGrp="1"/>
+          </p:cNvSpPr>
+          <p:nvPr/>
+        </p:nvSpPr>
+        <p:spPr>
+          <a:xfrm xmlns:a="http://schemas.openxmlformats.org/drawingml/2006/main">
+            <a:off x="6324600" y="3676650"/>
+            <a:ext cx="1809750" cy="247650"/>
+          </a:xfrm>
+          <a:prstGeom xmlns:a="http://schemas.openxmlformats.org/drawingml/2006/main" prst="rect">
+            <a:avLst/>
+          </a:prstGeom>
+          <a:solidFill xmlns:a="http://schemas.openxmlformats.org/drawingml/2006/main">
+            <a:srgbClr val="000000">
+              <a:alpha val="0"/>
+            </a:srgbClr>
+          </a:solidFill>
+          <a:ln xmlns:a="http://schemas.openxmlformats.org/drawingml/2006/main" w="0">
+            <a:solidFill>
+              <a:srgbClr val="000000">
+                <a:alpha val="0"/>
+              </a:srgbClr>
+            </a:solidFill>
+            <a:prstDash val="solid"/>
+          </a:ln>
+        </p:spPr>
+        <p:txBody>
+          <a:bodyPr xmlns:a="http://schemas.openxmlformats.org/drawingml/2006/main" lIns="0" tIns="0" rIns="0" bIns="0" anchor="t"/>
+          <a:lstStyle xmlns:a="http://schemas.openxmlformats.org/drawingml/2006/main"/>
+          <a:p xmlns:a="http://schemas.openxmlformats.org/drawingml/2006/main">
+            <a:pPr algn="l">
+              <a:defRPr sz="1575" b="1">
+                <a:solidFill>
+                  <a:srgbClr val="151D1A"/>
+                </a:solidFill>
+                <a:latin typeface="Aptos"/>
+                <a:ea typeface="Aptos"/>
+                <a:cs typeface="Aptos"/>
+              </a:defRPr>
+            </a:pPr>
+            <a:r>
+              <a:rPr sz="1575" b="1">
+                <a:solidFill>
+                  <a:srgbClr val="151D1A"/>
+                </a:solidFill>
+                <a:latin typeface="Aptos"/>
+                <a:ea typeface="Aptos"/>
+                <a:cs typeface="Aptos"/>
+              </a:rPr>
+              <a:t>AIインタビュー</a:t>
+            </a:r>
+          </a:p>
+        </p:txBody>
+      </p:sp>
+      <p:sp>
+        <p:nvSpPr>
+          <p:cNvPr id="20" name="">
+            <a:extLst xmlns:a="http://schemas.openxmlformats.org/drawingml/2006/main">
+              <a:ext uri="{FF2B5EF4-FFF2-40B4-BE49-F238E27FC236}">
+                <a16:creationId xmlns:a16="http://schemas.microsoft.com/office/drawing/2014/main" id="{EADC227C-ABE1-48B2-8254-4E46BE9AC0A2}"/>
+              </a:ext>
+            </a:extLst>
+          </p:cNvPr>
+          <p:cNvSpPr>
+            <a:spLocks xmlns:a="http://schemas.openxmlformats.org/drawingml/2006/main" noGrp="1"/>
+          </p:cNvSpPr>
+          <p:nvPr/>
+        </p:nvSpPr>
+        <p:spPr>
+          <a:xfrm xmlns:a="http://schemas.openxmlformats.org/drawingml/2006/main">
+            <a:off x="6324600" y="4057650"/>
+            <a:ext cx="1809750" cy="400050"/>
+          </a:xfrm>
+          <a:prstGeom xmlns:a="http://schemas.openxmlformats.org/drawingml/2006/main" prst="rect">
+            <a:avLst/>
+          </a:prstGeom>
+          <a:solidFill xmlns:a="http://schemas.openxmlformats.org/drawingml/2006/main">
+            <a:srgbClr val="000000">
+              <a:alpha val="0"/>
+            </a:srgbClr>
+          </a:solidFill>
+          <a:ln xmlns:a="http://schemas.openxmlformats.org/drawingml/2006/main" w="0">
+            <a:solidFill>
+              <a:srgbClr val="000000">
+                <a:alpha val="0"/>
+              </a:srgbClr>
+            </a:solidFill>
+            <a:prstDash val="solid"/>
+          </a:ln>
+        </p:spPr>
+        <p:txBody>
+          <a:bodyPr xmlns:a="http://schemas.openxmlformats.org/drawingml/2006/main" lIns="0" tIns="0" rIns="0" bIns="0" anchor="t"/>
+          <a:lstStyle xmlns:a="http://schemas.openxmlformats.org/drawingml/2006/main"/>
+          <a:p xmlns:a="http://schemas.openxmlformats.org/drawingml/2006/main">
+            <a:pPr algn="l">
+              <a:defRPr sz="1088" b="0">
+                <a:solidFill>
+                  <a:srgbClr val="66716B"/>
+                </a:solidFill>
+                <a:latin typeface="Aptos"/>
+                <a:ea typeface="Aptos"/>
+                <a:cs typeface="Aptos"/>
+              </a:defRPr>
+            </a:pPr>
+            <a:r>
+              <a:rPr sz="1088" b="0">
+                <a:solidFill>
+                  <a:srgbClr val="66716B"/>
+                </a:solidFill>
+                <a:latin typeface="Aptos"/>
+                <a:ea typeface="Aptos"/>
+                <a:cs typeface="Aptos"/>
+              </a:rPr>
+              <a:t>各ペルソナに一問一答で反応・懸念・深掘り回答を生成</a:t>
+            </a:r>
+          </a:p>
+        </p:txBody>
+      </p:sp>
+      <p:sp>
+        <p:nvSpPr>
+          <p:cNvPr id="21" name="">
+            <a:extLst xmlns:a="http://schemas.openxmlformats.org/drawingml/2006/main">
+              <a:ext uri="{FF2B5EF4-FFF2-40B4-BE49-F238E27FC236}">
+                <a16:creationId xmlns:a16="http://schemas.microsoft.com/office/drawing/2014/main" id="{FD0CA08D-1626-423B-A10A-098AD6B51FB6}"/>
+              </a:ext>
+            </a:extLst>
+          </p:cNvPr>
+          <p:cNvSpPr>
+            <a:spLocks xmlns:a="http://schemas.openxmlformats.org/drawingml/2006/main" noGrp="1"/>
+          </p:cNvSpPr>
+          <p:nvPr/>
+        </p:nvSpPr>
+        <p:spPr>
+          <a:xfrm xmlns:a="http://schemas.openxmlformats.org/drawingml/2006/main">
+            <a:off x="8915400" y="2857500"/>
+            <a:ext cx="2324100" cy="1790700"/>
+          </a:xfrm>
+          <a:prstGeom xmlns:a="http://schemas.openxmlformats.org/drawingml/2006/main" prst="rect">
+            <a:avLst/>
+          </a:prstGeom>
+          <a:solidFill xmlns:a="http://schemas.openxmlformats.org/drawingml/2006/main">
+            <a:srgbClr val="10231E"/>
+          </a:solidFill>
+          <a:ln xmlns:a="http://schemas.openxmlformats.org/drawingml/2006/main" w="9525">
+            <a:solidFill>
+              <a:srgbClr val="D8D2C8"/>
+            </a:solidFill>
+            <a:prstDash val="solid"/>
+          </a:ln>
+        </p:spPr>
+      </p:sp>
+      <p:sp>
+        <p:nvSpPr>
+          <p:cNvPr id="22" name="">
+            <a:extLst xmlns:a="http://schemas.openxmlformats.org/drawingml/2006/main">
+              <a:ext uri="{FF2B5EF4-FFF2-40B4-BE49-F238E27FC236}">
+                <a16:creationId xmlns:a16="http://schemas.microsoft.com/office/drawing/2014/main" id="{14041AE1-54DD-4342-8376-636743299EAC}"/>
+              </a:ext>
+            </a:extLst>
+          </p:cNvPr>
+          <p:cNvSpPr>
+            <a:spLocks xmlns:a="http://schemas.openxmlformats.org/drawingml/2006/main" noGrp="1"/>
+          </p:cNvSpPr>
+          <p:nvPr/>
+        </p:nvSpPr>
+        <p:spPr>
+          <a:xfrm xmlns:a="http://schemas.openxmlformats.org/drawingml/2006/main">
+            <a:off x="9105900" y="3105150"/>
+            <a:ext cx="361950" cy="361950"/>
+          </a:xfrm>
+          <a:prstGeom xmlns:a="http://schemas.openxmlformats.org/drawingml/2006/main" prst="rect">
+            <a:avLst/>
+          </a:prstGeom>
+          <a:solidFill xmlns:a="http://schemas.openxmlformats.org/drawingml/2006/main">
+            <a:srgbClr val="10231E"/>
+          </a:solidFill>
+          <a:ln xmlns:a="http://schemas.openxmlformats.org/drawingml/2006/main" w="0">
+            <a:solidFill>
+              <a:srgbClr val="000000">
+                <a:alpha val="0"/>
+              </a:srgbClr>
+            </a:solidFill>
+            <a:prstDash val="solid"/>
+          </a:ln>
+        </p:spPr>
+      </p:sp>
+      <p:sp>
+        <p:nvSpPr>
+          <p:cNvPr id="23" name="">
+            <a:extLst xmlns:a="http://schemas.openxmlformats.org/drawingml/2006/main">
+              <a:ext uri="{FF2B5EF4-FFF2-40B4-BE49-F238E27FC236}">
+                <a16:creationId xmlns:a16="http://schemas.microsoft.com/office/drawing/2014/main" id="{7068518D-B01B-44A4-8755-7CBF27E395DB}"/>
+              </a:ext>
+            </a:extLst>
+          </p:cNvPr>
+          <p:cNvSpPr>
+            <a:spLocks xmlns:a="http://schemas.openxmlformats.org/drawingml/2006/main" noGrp="1"/>
+          </p:cNvSpPr>
+          <p:nvPr/>
+        </p:nvSpPr>
+        <p:spPr>
+          <a:xfrm xmlns:a="http://schemas.openxmlformats.org/drawingml/2006/main">
+            <a:off x="9229725" y="3200400"/>
+            <a:ext cx="114300" cy="133350"/>
+          </a:xfrm>
+          <a:prstGeom xmlns:a="http://schemas.openxmlformats.org/drawingml/2006/main" prst="rect">
+            <a:avLst/>
+          </a:prstGeom>
+          <a:solidFill xmlns:a="http://schemas.openxmlformats.org/drawingml/2006/main">
+            <a:srgbClr val="000000">
+              <a:alpha val="0"/>
+            </a:srgbClr>
+          </a:solidFill>
+          <a:ln xmlns:a="http://schemas.openxmlformats.org/drawingml/2006/main" w="0">
+            <a:solidFill>
+              <a:srgbClr val="000000">
+                <a:alpha val="0"/>
+              </a:srgbClr>
+            </a:solidFill>
+            <a:prstDash val="solid"/>
+          </a:ln>
+        </p:spPr>
+        <p:txBody>
+          <a:bodyPr xmlns:a="http://schemas.openxmlformats.org/drawingml/2006/main" lIns="0" tIns="0" rIns="0" bIns="0" anchor="t"/>
+          <a:lstStyle xmlns:a="http://schemas.openxmlformats.org/drawingml/2006/main"/>
+          <a:p xmlns:a="http://schemas.openxmlformats.org/drawingml/2006/main">
+            <a:pPr algn="ctr">
+              <a:defRPr sz="1125" b="1">
+                <a:solidFill>
+                  <a:srgbClr val="FFFFFF"/>
+                </a:solidFill>
+                <a:latin typeface="Aptos"/>
+                <a:ea typeface="Aptos"/>
+                <a:cs typeface="Aptos"/>
+              </a:defRPr>
+            </a:pPr>
+            <a:r>
+              <a:rPr sz="1125" b="1">
+                <a:solidFill>
+                  <a:srgbClr val="FFFFFF"/>
+                </a:solidFill>
+                <a:latin typeface="Aptos"/>
+                <a:ea typeface="Aptos"/>
+                <a:cs typeface="Aptos"/>
+              </a:rPr>
+              <a:t>4</a:t>
+            </a:r>
+          </a:p>
+        </p:txBody>
+      </p:sp>
+      <p:sp>
+        <p:nvSpPr>
+          <p:cNvPr id="24" name="">
+            <a:extLst xmlns:a="http://schemas.openxmlformats.org/drawingml/2006/main">
+              <a:ext uri="{FF2B5EF4-FFF2-40B4-BE49-F238E27FC236}">
+                <a16:creationId xmlns:a16="http://schemas.microsoft.com/office/drawing/2014/main" id="{01F745D8-C02F-4F0A-B5E5-23398BBB7F01}"/>
+              </a:ext>
+            </a:extLst>
+          </p:cNvPr>
+          <p:cNvSpPr>
+            <a:spLocks xmlns:a="http://schemas.openxmlformats.org/drawingml/2006/main" noGrp="1"/>
+          </p:cNvSpPr>
+          <p:nvPr/>
+        </p:nvSpPr>
+        <p:spPr>
+          <a:xfrm xmlns:a="http://schemas.openxmlformats.org/drawingml/2006/main">
+            <a:off x="9105900" y="3676650"/>
+            <a:ext cx="1809750" cy="247650"/>
+          </a:xfrm>
+          <a:prstGeom xmlns:a="http://schemas.openxmlformats.org/drawingml/2006/main" prst="rect">
+            <a:avLst/>
+          </a:prstGeom>
+          <a:solidFill xmlns:a="http://schemas.openxmlformats.org/drawingml/2006/main">
+            <a:srgbClr val="000000">
+              <a:alpha val="0"/>
+            </a:srgbClr>
+          </a:solidFill>
+          <a:ln xmlns:a="http://schemas.openxmlformats.org/drawingml/2006/main" w="0">
+            <a:solidFill>
+              <a:srgbClr val="000000">
+                <a:alpha val="0"/>
+              </a:srgbClr>
+            </a:solidFill>
+            <a:prstDash val="solid"/>
+          </a:ln>
+        </p:spPr>
+        <p:txBody>
+          <a:bodyPr xmlns:a="http://schemas.openxmlformats.org/drawingml/2006/main" lIns="0" tIns="0" rIns="0" bIns="0" anchor="t"/>
+          <a:lstStyle xmlns:a="http://schemas.openxmlformats.org/drawingml/2006/main"/>
+          <a:p xmlns:a="http://schemas.openxmlformats.org/drawingml/2006/main">
+            <a:pPr algn="l">
+              <a:defRPr sz="1575" b="1">
+                <a:solidFill>
+                  <a:srgbClr val="FFFFFF"/>
+                </a:solidFill>
+                <a:latin typeface="Aptos"/>
+                <a:ea typeface="Aptos"/>
+                <a:cs typeface="Aptos"/>
+              </a:defRPr>
+            </a:pPr>
+            <a:r>
+              <a:rPr sz="1575" b="1">
+                <a:solidFill>
+                  <a:srgbClr val="FFFFFF"/>
+                </a:solidFill>
+                <a:latin typeface="Aptos"/>
+                <a:ea typeface="Aptos"/>
+                <a:cs typeface="Aptos"/>
+              </a:rPr>
+              <a:t>集計・示唆化</a:t>
+            </a:r>
+          </a:p>
+        </p:txBody>
+      </p:sp>
+      <p:sp>
+        <p:nvSpPr>
+          <p:cNvPr id="25" name="">
+            <a:extLst xmlns:a="http://schemas.openxmlformats.org/drawingml/2006/main">
+              <a:ext uri="{FF2B5EF4-FFF2-40B4-BE49-F238E27FC236}">
+                <a16:creationId xmlns:a16="http://schemas.microsoft.com/office/drawing/2014/main" id="{5EEFC69A-8890-4EDD-872B-389BF52CAEE9}"/>
+              </a:ext>
+            </a:extLst>
+          </p:cNvPr>
+          <p:cNvSpPr>
+            <a:spLocks xmlns:a="http://schemas.openxmlformats.org/drawingml/2006/main" noGrp="1"/>
+          </p:cNvSpPr>
+          <p:nvPr/>
+        </p:nvSpPr>
+        <p:spPr>
+          <a:xfrm xmlns:a="http://schemas.openxmlformats.org/drawingml/2006/main">
+            <a:off x="9105900" y="4057650"/>
+            <a:ext cx="1809750" cy="400050"/>
+          </a:xfrm>
+          <a:prstGeom xmlns:a="http://schemas.openxmlformats.org/drawingml/2006/main" prst="rect">
+            <a:avLst/>
+          </a:prstGeom>
+          <a:solidFill xmlns:a="http://schemas.openxmlformats.org/drawingml/2006/main">
+            <a:srgbClr val="000000">
+              <a:alpha val="0"/>
+            </a:srgbClr>
+          </a:solidFill>
+          <a:ln xmlns:a="http://schemas.openxmlformats.org/drawingml/2006/main" w="0">
+            <a:solidFill>
+              <a:srgbClr val="000000">
+                <a:alpha val="0"/>
+              </a:srgbClr>
+            </a:solidFill>
+            <a:prstDash val="solid"/>
+          </a:ln>
+        </p:spPr>
+        <p:txBody>
+          <a:bodyPr xmlns:a="http://schemas.openxmlformats.org/drawingml/2006/main" lIns="0" tIns="0" rIns="0" bIns="0" anchor="t"/>
+          <a:lstStyle xmlns:a="http://schemas.openxmlformats.org/drawingml/2006/main"/>
+          <a:p xmlns:a="http://schemas.openxmlformats.org/drawingml/2006/main">
+            <a:pPr algn="l">
+              <a:defRPr sz="1088" b="0">
+                <a:solidFill>
+                  <a:srgbClr val="DCEBE7"/>
+                </a:solidFill>
+                <a:latin typeface="Aptos"/>
+                <a:ea typeface="Aptos"/>
+                <a:cs typeface="Aptos"/>
+              </a:defRPr>
+            </a:pPr>
+            <a:r>
+              <a:rPr sz="1088" b="0">
+                <a:solidFill>
+                  <a:srgbClr val="DCEBE7"/>
+                </a:solidFill>
+                <a:latin typeface="Aptos"/>
+                <a:ea typeface="Aptos"/>
+                <a:cs typeface="Aptos"/>
+              </a:rPr>
+              <a:t>年代別/利用頻度別に、発話・スコア・代表コメントを要約</a:t>
+            </a:r>
+          </a:p>
+        </p:txBody>
+      </p:sp>
+      <p:sp>
+        <p:nvSpPr>
+          <p:cNvPr id="26" name="">
+            <a:extLst xmlns:a="http://schemas.openxmlformats.org/drawingml/2006/main">
+              <a:ext uri="{FF2B5EF4-FFF2-40B4-BE49-F238E27FC236}">
+                <a16:creationId xmlns:a16="http://schemas.microsoft.com/office/drawing/2014/main" id="{60C34ADF-7BBE-428E-9600-DEACB2D82F0B}"/>
+              </a:ext>
+            </a:extLst>
+          </p:cNvPr>
+          <p:cNvSpPr>
+            <a:spLocks xmlns:a="http://schemas.openxmlformats.org/drawingml/2006/main" noGrp="1"/>
+          </p:cNvSpPr>
+          <p:nvPr/>
+        </p:nvSpPr>
+        <p:spPr>
+          <a:xfrm xmlns:a="http://schemas.openxmlformats.org/drawingml/2006/main">
+            <a:off x="571500" y="5219700"/>
+            <a:ext cx="4953000" cy="742950"/>
+          </a:xfrm>
+          <a:prstGeom xmlns:a="http://schemas.openxmlformats.org/drawingml/2006/main" prst="rect">
+            <a:avLst/>
+          </a:prstGeom>
+          <a:solidFill xmlns:a="http://schemas.openxmlformats.org/drawingml/2006/main">
+            <a:srgbClr val="F7FAF8"/>
+          </a:solidFill>
+          <a:ln xmlns:a="http://schemas.openxmlformats.org/drawingml/2006/main" w="9525">
+            <a:solidFill>
+              <a:srgbClr val="D8D2C8"/>
+            </a:solidFill>
+            <a:prstDash val="solid"/>
+          </a:ln>
+        </p:spPr>
+      </p:sp>
+      <p:sp>
+        <p:nvSpPr>
+          <p:cNvPr id="27" name="">
+            <a:extLst xmlns:a="http://schemas.openxmlformats.org/drawingml/2006/main">
+              <a:ext uri="{FF2B5EF4-FFF2-40B4-BE49-F238E27FC236}">
+                <a16:creationId xmlns:a16="http://schemas.microsoft.com/office/drawing/2014/main" id="{F988659F-E79E-4BEF-81C0-C14E9DC0861C}"/>
+              </a:ext>
+            </a:extLst>
+          </p:cNvPr>
+          <p:cNvSpPr>
+            <a:spLocks xmlns:a="http://schemas.openxmlformats.org/drawingml/2006/main" noGrp="1"/>
+          </p:cNvSpPr>
+          <p:nvPr/>
+        </p:nvSpPr>
+        <p:spPr>
+          <a:xfrm xmlns:a="http://schemas.openxmlformats.org/drawingml/2006/main">
+            <a:off x="819150" y="5429250"/>
+            <a:ext cx="1524000" cy="209550"/>
+          </a:xfrm>
+          <a:prstGeom xmlns:a="http://schemas.openxmlformats.org/drawingml/2006/main" prst="rect">
+            <a:avLst/>
+          </a:prstGeom>
+          <a:solidFill xmlns:a="http://schemas.openxmlformats.org/drawingml/2006/main">
+            <a:srgbClr val="000000">
+              <a:alpha val="0"/>
+            </a:srgbClr>
+          </a:solidFill>
+          <a:ln xmlns:a="http://schemas.openxmlformats.org/drawingml/2006/main" w="0">
+            <a:solidFill>
+              <a:srgbClr val="000000">
+                <a:alpha val="0"/>
+              </a:srgbClr>
+            </a:solidFill>
+            <a:prstDash val="solid"/>
+          </a:ln>
+        </p:spPr>
+        <p:txBody>
+          <a:bodyPr xmlns:a="http://schemas.openxmlformats.org/drawingml/2006/main" lIns="0" tIns="0" rIns="0" bIns="0" anchor="t"/>
+          <a:lstStyle xmlns:a="http://schemas.openxmlformats.org/drawingml/2006/main"/>
+          <a:p xmlns:a="http://schemas.openxmlformats.org/drawingml/2006/main">
+            <a:pPr algn="l">
+              <a:defRPr sz="1575" b="1">
+                <a:solidFill>
+                  <a:srgbClr val="105B47"/>
+                </a:solidFill>
+                <a:latin typeface="Aptos"/>
+                <a:ea typeface="Aptos"/>
+                <a:cs typeface="Aptos"/>
+              </a:defRPr>
+            </a:pPr>
+            <a:r>
+              <a:rPr sz="1575" b="1">
+                <a:solidFill>
+                  <a:srgbClr val="105B47"/>
+                </a:solidFill>
+                <a:latin typeface="Aptos"/>
+                <a:ea typeface="Aptos"/>
+                <a:cs typeface="Aptos"/>
+              </a:rPr>
+              <a:t>並行利用</a:t>
+            </a:r>
+          </a:p>
+        </p:txBody>
+      </p:sp>
+      <p:sp>
+        <p:nvSpPr>
+          <p:cNvPr id="28" name="">
+            <a:extLst xmlns:a="http://schemas.openxmlformats.org/drawingml/2006/main">
+              <a:ext uri="{FF2B5EF4-FFF2-40B4-BE49-F238E27FC236}">
+                <a16:creationId xmlns:a16="http://schemas.microsoft.com/office/drawing/2014/main" id="{E372D7CB-4F4B-487D-926C-9A91D803F911}"/>
+              </a:ext>
+            </a:extLst>
+          </p:cNvPr>
+          <p:cNvSpPr>
+            <a:spLocks xmlns:a="http://schemas.openxmlformats.org/drawingml/2006/main" noGrp="1"/>
+          </p:cNvSpPr>
+          <p:nvPr/>
+        </p:nvSpPr>
+        <p:spPr>
+          <a:xfrm xmlns:a="http://schemas.openxmlformats.org/drawingml/2006/main">
+            <a:off x="2381250" y="5429250"/>
+            <a:ext cx="2667000" cy="323850"/>
+          </a:xfrm>
+          <a:prstGeom xmlns:a="http://schemas.openxmlformats.org/drawingml/2006/main" prst="rect">
+            <a:avLst/>
+          </a:prstGeom>
+          <a:solidFill xmlns:a="http://schemas.openxmlformats.org/drawingml/2006/main">
+            <a:srgbClr val="000000">
+              <a:alpha val="0"/>
+            </a:srgbClr>
+          </a:solidFill>
+          <a:ln xmlns:a="http://schemas.openxmlformats.org/drawingml/2006/main" w="0">
+            <a:solidFill>
+              <a:srgbClr val="000000">
+                <a:alpha val="0"/>
+              </a:srgbClr>
+            </a:solidFill>
+            <a:prstDash val="solid"/>
+          </a:ln>
+        </p:spPr>
+        <p:txBody>
+          <a:bodyPr xmlns:a="http://schemas.openxmlformats.org/drawingml/2006/main" lIns="0" tIns="0" rIns="0" bIns="0" anchor="t"/>
+          <a:lstStyle xmlns:a="http://schemas.openxmlformats.org/drawingml/2006/main"/>
+          <a:p xmlns:a="http://schemas.openxmlformats.org/drawingml/2006/main">
+            <a:pPr algn="l">
+              <a:defRPr sz="1163" b="0">
+                <a:solidFill>
+                  <a:srgbClr val="66716B"/>
+                </a:solidFill>
+                <a:latin typeface="Aptos"/>
+                <a:ea typeface="Aptos"/>
+                <a:cs typeface="Aptos"/>
+              </a:defRPr>
+            </a:pPr>
+            <a:r>
+              <a:rPr sz="1163" b="0">
+                <a:solidFill>
+                  <a:srgbClr val="66716B"/>
+                </a:solidFill>
+                <a:latin typeface="Aptos"/>
+                <a:ea typeface="Aptos"/>
+                <a:cs typeface="Aptos"/>
+              </a:rPr>
+              <a:t>ユーザー/部署ごとにプロジェクトとジョブを分離し、キューで順次処理。</a:t>
+            </a:r>
+          </a:p>
+        </p:txBody>
+      </p:sp>
+      <p:sp>
+        <p:nvSpPr>
+          <p:cNvPr id="29" name="">
+            <a:extLst xmlns:a="http://schemas.openxmlformats.org/drawingml/2006/main">
+              <a:ext uri="{FF2B5EF4-FFF2-40B4-BE49-F238E27FC236}">
+                <a16:creationId xmlns:a16="http://schemas.microsoft.com/office/drawing/2014/main" id="{C02C867F-45C2-49E6-9243-4AEBE396E4A3}"/>
+              </a:ext>
+            </a:extLst>
+          </p:cNvPr>
+          <p:cNvSpPr>
+            <a:spLocks xmlns:a="http://schemas.openxmlformats.org/drawingml/2006/main" noGrp="1"/>
+          </p:cNvSpPr>
+          <p:nvPr/>
+        </p:nvSpPr>
+        <p:spPr>
+          <a:xfrm xmlns:a="http://schemas.openxmlformats.org/drawingml/2006/main">
+            <a:off x="5943600" y="5219700"/>
+            <a:ext cx="4953000" cy="742950"/>
+          </a:xfrm>
+          <a:prstGeom xmlns:a="http://schemas.openxmlformats.org/drawingml/2006/main" prst="rect">
+            <a:avLst/>
+          </a:prstGeom>
+          <a:solidFill xmlns:a="http://schemas.openxmlformats.org/drawingml/2006/main">
+            <a:srgbClr val="FFF7F1"/>
+          </a:solidFill>
+          <a:ln xmlns:a="http://schemas.openxmlformats.org/drawingml/2006/main" w="9525">
+            <a:solidFill>
+              <a:srgbClr val="D8D2C8"/>
+            </a:solidFill>
+            <a:prstDash val="solid"/>
+          </a:ln>
+        </p:spPr>
+      </p:sp>
+      <p:sp>
+        <p:nvSpPr>
+          <p:cNvPr id="30" name="">
+            <a:extLst xmlns:a="http://schemas.openxmlformats.org/drawingml/2006/main">
+              <a:ext uri="{FF2B5EF4-FFF2-40B4-BE49-F238E27FC236}">
+                <a16:creationId xmlns:a16="http://schemas.microsoft.com/office/drawing/2014/main" id="{904C39FB-1C69-4D36-A4C8-82B6AF61E7E9}"/>
+              </a:ext>
+            </a:extLst>
+          </p:cNvPr>
+          <p:cNvSpPr>
+            <a:spLocks xmlns:a="http://schemas.openxmlformats.org/drawingml/2006/main" noGrp="1"/>
+          </p:cNvSpPr>
+          <p:nvPr/>
+        </p:nvSpPr>
+        <p:spPr>
+          <a:xfrm xmlns:a="http://schemas.openxmlformats.org/drawingml/2006/main">
+            <a:off x="6191250" y="5429250"/>
+            <a:ext cx="1524000" cy="209550"/>
+          </a:xfrm>
+          <a:prstGeom xmlns:a="http://schemas.openxmlformats.org/drawingml/2006/main" prst="rect">
+            <a:avLst/>
+          </a:prstGeom>
+          <a:solidFill xmlns:a="http://schemas.openxmlformats.org/drawingml/2006/main">
+            <a:srgbClr val="000000">
+              <a:alpha val="0"/>
+            </a:srgbClr>
+          </a:solidFill>
+          <a:ln xmlns:a="http://schemas.openxmlformats.org/drawingml/2006/main" w="0">
+            <a:solidFill>
+              <a:srgbClr val="000000">
+                <a:alpha val="0"/>
+              </a:srgbClr>
+            </a:solidFill>
+            <a:prstDash val="solid"/>
+          </a:ln>
+        </p:spPr>
+        <p:txBody>
+          <a:bodyPr xmlns:a="http://schemas.openxmlformats.org/drawingml/2006/main" lIns="0" tIns="0" rIns="0" bIns="0" anchor="t"/>
+          <a:lstStyle xmlns:a="http://schemas.openxmlformats.org/drawingml/2006/main"/>
+          <a:p xmlns:a="http://schemas.openxmlformats.org/drawingml/2006/main">
+            <a:pPr algn="l">
+              <a:defRPr sz="1575" b="1">
+                <a:solidFill>
+                  <a:srgbClr val="D96F32"/>
+                </a:solidFill>
+                <a:latin typeface="Aptos"/>
+                <a:ea typeface="Aptos"/>
+                <a:cs typeface="Aptos"/>
+              </a:defRPr>
+            </a:pPr>
+            <a:r>
+              <a:rPr sz="1575" b="1">
+                <a:solidFill>
+                  <a:srgbClr val="D96F32"/>
+                </a:solidFill>
+                <a:latin typeface="Aptos"/>
+                <a:ea typeface="Aptos"/>
+                <a:cs typeface="Aptos"/>
+              </a:rPr>
+              <a:t>リスクヘッジ</a:t>
+            </a:r>
+          </a:p>
+        </p:txBody>
+      </p:sp>
+      <p:sp>
+        <p:nvSpPr>
+          <p:cNvPr id="31" name="">
+            <a:extLst xmlns:a="http://schemas.openxmlformats.org/drawingml/2006/main">
+              <a:ext uri="{FF2B5EF4-FFF2-40B4-BE49-F238E27FC236}">
+                <a16:creationId xmlns:a16="http://schemas.microsoft.com/office/drawing/2014/main" id="{298F581C-C490-400C-B798-27DD70CEE22D}"/>
+              </a:ext>
+            </a:extLst>
+          </p:cNvPr>
+          <p:cNvSpPr>
+            <a:spLocks xmlns:a="http://schemas.openxmlformats.org/drawingml/2006/main" noGrp="1"/>
+          </p:cNvSpPr>
+          <p:nvPr/>
+        </p:nvSpPr>
+        <p:spPr>
+          <a:xfrm xmlns:a="http://schemas.openxmlformats.org/drawingml/2006/main">
+            <a:off x="7848600" y="5429250"/>
+            <a:ext cx="2667000" cy="323850"/>
+          </a:xfrm>
+          <a:prstGeom xmlns:a="http://schemas.openxmlformats.org/drawingml/2006/main" prst="rect">
+            <a:avLst/>
+          </a:prstGeom>
+          <a:solidFill xmlns:a="http://schemas.openxmlformats.org/drawingml/2006/main">
+            <a:srgbClr val="000000">
+              <a:alpha val="0"/>
+            </a:srgbClr>
+          </a:solidFill>
+          <a:ln xmlns:a="http://schemas.openxmlformats.org/drawingml/2006/main" w="0">
+            <a:solidFill>
+              <a:srgbClr val="000000">
+                <a:alpha val="0"/>
+              </a:srgbClr>
+            </a:solidFill>
+            <a:prstDash val="solid"/>
+          </a:ln>
+        </p:spPr>
+        <p:txBody>
+          <a:bodyPr xmlns:a="http://schemas.openxmlformats.org/drawingml/2006/main" lIns="0" tIns="0" rIns="0" bIns="0" anchor="t"/>
+          <a:lstStyle xmlns:a="http://schemas.openxmlformats.org/drawingml/2006/main"/>
+          <a:p xmlns:a="http://schemas.openxmlformats.org/drawingml/2006/main">
+            <a:pPr algn="l">
+              <a:defRPr sz="1163" b="0">
+                <a:solidFill>
+                  <a:srgbClr val="66716B"/>
+                </a:solidFill>
+                <a:latin typeface="Aptos"/>
+                <a:ea typeface="Aptos"/>
+                <a:cs typeface="Aptos"/>
+              </a:defRPr>
+            </a:pPr>
+            <a:r>
+              <a:rPr sz="1163" b="0">
+                <a:solidFill>
+                  <a:srgbClr val="66716B"/>
+                </a:solidFill>
+                <a:latin typeface="Aptos"/>
+                <a:ea typeface="Aptos"/>
+                <a:cs typeface="Aptos"/>
+              </a:rPr>
+              <a:t>機密画像・実顧客データは投入しない。出力は意思決定ではなく調査設計材料。</a:t>
+            </a:r>
+          </a:p>
+        </p:txBody>
+      </p:sp>
+    </p:spTree>
+    <p:extLst>
+      <p:ext uri="{BB962C8B-B14F-4D97-AF65-F5344CB8AC3E}">
+        <p14:creationId xmlns:p14="http://schemas.microsoft.com/office/powerpoint/2010/main" val="891060731"/>
       </p:ext>
     </p:extLst>
   </p:cSld>
@@ -2521,7 +5508,7 @@
           <p:cNvPr id="1" name="">
             <a:extLst xmlns:a="http://schemas.openxmlformats.org/drawingml/2006/main">
               <a:ext uri="{FF2B5EF4-FFF2-40B4-BE49-F238E27FC236}">
-                <a16:creationId xmlns:a16="http://schemas.microsoft.com/office/drawing/2014/main" id="{76A7213B-2069-40B6-9E2B-5CF7E682E081}"/>
+                <a16:creationId xmlns:a16="http://schemas.microsoft.com/office/drawing/2014/main" id="{D7505844-3F58-49A9-9961-550642320CA6}"/>
               </a:ext>
             </a:extLst>
           </p:cNvPr>
@@ -2556,7 +5543,7 @@
           <p:cNvPr id="2" name="">
             <a:extLst xmlns:a="http://schemas.openxmlformats.org/drawingml/2006/main">
               <a:ext uri="{FF2B5EF4-FFF2-40B4-BE49-F238E27FC236}">
-                <a16:creationId xmlns:a16="http://schemas.microsoft.com/office/drawing/2014/main" id="{2D9D29B2-AEE8-4549-9291-71F4E556429B}"/>
+                <a16:creationId xmlns:a16="http://schemas.microsoft.com/office/drawing/2014/main" id="{74602245-CF66-4B5F-BEEB-D9F414E73CE6}"/>
               </a:ext>
             </a:extLst>
           </p:cNvPr>
@@ -2620,7 +5607,7 @@
           <p:cNvPr id="3" name="">
             <a:extLst xmlns:a="http://schemas.openxmlformats.org/drawingml/2006/main">
               <a:ext uri="{FF2B5EF4-FFF2-40B4-BE49-F238E27FC236}">
-                <a16:creationId xmlns:a16="http://schemas.microsoft.com/office/drawing/2014/main" id="{62F84520-817A-4EFE-82F4-C728BAF3F0B1}"/>
+                <a16:creationId xmlns:a16="http://schemas.microsoft.com/office/drawing/2014/main" id="{74D0E2B2-C632-4A68-A2CE-F8E23C3A08BA}"/>
               </a:ext>
             </a:extLst>
           </p:cNvPr>
@@ -2684,7 +5671,7 @@
           <p:cNvPr id="4" name="">
             <a:extLst xmlns:a="http://schemas.openxmlformats.org/drawingml/2006/main">
               <a:ext uri="{FF2B5EF4-FFF2-40B4-BE49-F238E27FC236}">
-                <a16:creationId xmlns:a16="http://schemas.microsoft.com/office/drawing/2014/main" id="{40BF2BAC-CF4F-4334-BFF2-DC3379921FE7}"/>
+                <a16:creationId xmlns:a16="http://schemas.microsoft.com/office/drawing/2014/main" id="{10A44D49-F803-4C03-93F6-4EE125C5FDDF}"/>
               </a:ext>
             </a:extLst>
           </p:cNvPr>
@@ -2748,7 +5735,7 @@
           <p:cNvPr id="5" name="">
             <a:extLst xmlns:a="http://schemas.openxmlformats.org/drawingml/2006/main">
               <a:ext uri="{FF2B5EF4-FFF2-40B4-BE49-F238E27FC236}">
-                <a16:creationId xmlns:a16="http://schemas.microsoft.com/office/drawing/2014/main" id="{F028D0AE-C592-4A9C-A89C-D71263B02D51}"/>
+                <a16:creationId xmlns:a16="http://schemas.microsoft.com/office/drawing/2014/main" id="{DFA9A287-E885-4B6E-BD14-24211DDAC060}"/>
               </a:ext>
             </a:extLst>
           </p:cNvPr>
@@ -2783,7 +5770,7 @@
           <p:cNvPr id="6" name="">
             <a:extLst xmlns:a="http://schemas.openxmlformats.org/drawingml/2006/main">
               <a:ext uri="{FF2B5EF4-FFF2-40B4-BE49-F238E27FC236}">
-                <a16:creationId xmlns:a16="http://schemas.microsoft.com/office/drawing/2014/main" id="{23D12A48-0645-4D37-ACAB-0E5FE8DA53C0}"/>
+                <a16:creationId xmlns:a16="http://schemas.microsoft.com/office/drawing/2014/main" id="{F02B1CC9-40A8-440F-9054-FC7ECE158A94}"/>
               </a:ext>
             </a:extLst>
           </p:cNvPr>
@@ -2818,7 +5805,7 @@
           <p:cNvPr id="7" name="">
             <a:extLst xmlns:a="http://schemas.openxmlformats.org/drawingml/2006/main">
               <a:ext uri="{FF2B5EF4-FFF2-40B4-BE49-F238E27FC236}">
-                <a16:creationId xmlns:a16="http://schemas.microsoft.com/office/drawing/2014/main" id="{B03342FD-6AD6-4F1E-845D-C54D60CA8193}"/>
+                <a16:creationId xmlns:a16="http://schemas.microsoft.com/office/drawing/2014/main" id="{7C784171-B164-40CE-AD69-72477DE40F30}"/>
               </a:ext>
             </a:extLst>
           </p:cNvPr>
@@ -2882,7 +5869,7 @@
           <p:cNvPr id="8" name="">
             <a:extLst xmlns:a="http://schemas.openxmlformats.org/drawingml/2006/main">
               <a:ext uri="{FF2B5EF4-FFF2-40B4-BE49-F238E27FC236}">
-                <a16:creationId xmlns:a16="http://schemas.microsoft.com/office/drawing/2014/main" id="{5AC53DEF-002E-4CED-8E22-28C8B2090C82}"/>
+                <a16:creationId xmlns:a16="http://schemas.microsoft.com/office/drawing/2014/main" id="{D4988F02-1734-4E38-BFE8-249DC3087AB2}"/>
               </a:ext>
             </a:extLst>
           </p:cNvPr>
@@ -2992,7 +5979,7 @@
           <p:cNvPr id="9" name="">
             <a:extLst xmlns:a="http://schemas.openxmlformats.org/drawingml/2006/main">
               <a:ext uri="{FF2B5EF4-FFF2-40B4-BE49-F238E27FC236}">
-                <a16:creationId xmlns:a16="http://schemas.microsoft.com/office/drawing/2014/main" id="{B09C99CC-3BBE-47A1-BC46-B0B625B77A20}"/>
+                <a16:creationId xmlns:a16="http://schemas.microsoft.com/office/drawing/2014/main" id="{189FBCA3-11A3-43C4-B3F7-A79866A92438}"/>
               </a:ext>
             </a:extLst>
           </p:cNvPr>
@@ -3027,7 +6014,7 @@
           <p:cNvPr id="10" name="">
             <a:extLst xmlns:a="http://schemas.openxmlformats.org/drawingml/2006/main">
               <a:ext uri="{FF2B5EF4-FFF2-40B4-BE49-F238E27FC236}">
-                <a16:creationId xmlns:a16="http://schemas.microsoft.com/office/drawing/2014/main" id="{69850CB2-E79D-4FA6-A363-4C9A64C26A0F}"/>
+                <a16:creationId xmlns:a16="http://schemas.microsoft.com/office/drawing/2014/main" id="{3EE003CB-4D28-48E7-ABD8-0EADC0379CA6}"/>
               </a:ext>
             </a:extLst>
           </p:cNvPr>
@@ -3062,7 +6049,7 @@
           <p:cNvPr id="11" name="">
             <a:extLst xmlns:a="http://schemas.openxmlformats.org/drawingml/2006/main">
               <a:ext uri="{FF2B5EF4-FFF2-40B4-BE49-F238E27FC236}">
-                <a16:creationId xmlns:a16="http://schemas.microsoft.com/office/drawing/2014/main" id="{CC79EE72-F98E-4DE0-8EF9-37767BDA0F6A}"/>
+                <a16:creationId xmlns:a16="http://schemas.microsoft.com/office/drawing/2014/main" id="{099BCDC9-579F-47C5-9CF6-83B6C8268C9A}"/>
               </a:ext>
             </a:extLst>
           </p:cNvPr>
@@ -3126,7 +6113,7 @@
           <p:cNvPr id="12" name="">
             <a:extLst xmlns:a="http://schemas.openxmlformats.org/drawingml/2006/main">
               <a:ext uri="{FF2B5EF4-FFF2-40B4-BE49-F238E27FC236}">
-                <a16:creationId xmlns:a16="http://schemas.microsoft.com/office/drawing/2014/main" id="{40C8FE74-BC00-489E-9986-D3E1D82181E7}"/>
+                <a16:creationId xmlns:a16="http://schemas.microsoft.com/office/drawing/2014/main" id="{57D3AD3B-6FB8-4C80-A9E4-55C8D64509E3}"/>
               </a:ext>
             </a:extLst>
           </p:cNvPr>
@@ -3259,7 +6246,7 @@
           <p:cNvPr id="13" name="">
             <a:extLst xmlns:a="http://schemas.openxmlformats.org/drawingml/2006/main">
               <a:ext uri="{FF2B5EF4-FFF2-40B4-BE49-F238E27FC236}">
-                <a16:creationId xmlns:a16="http://schemas.microsoft.com/office/drawing/2014/main" id="{2EB41D72-EF37-44C4-B41A-1CFD4972F625}"/>
+                <a16:creationId xmlns:a16="http://schemas.microsoft.com/office/drawing/2014/main" id="{958125D2-F600-41A4-8646-3A88BC8B1E77}"/>
               </a:ext>
             </a:extLst>
           </p:cNvPr>
@@ -3294,7 +6281,7 @@
           <p:cNvPr id="14" name="">
             <a:extLst xmlns:a="http://schemas.openxmlformats.org/drawingml/2006/main">
               <a:ext uri="{FF2B5EF4-FFF2-40B4-BE49-F238E27FC236}">
-                <a16:creationId xmlns:a16="http://schemas.microsoft.com/office/drawing/2014/main" id="{9A773F06-5FCE-47B7-8144-A31E4C719CAF}"/>
+                <a16:creationId xmlns:a16="http://schemas.microsoft.com/office/drawing/2014/main" id="{3FB62911-7B43-403A-92A1-9E5E78BF0000}"/>
               </a:ext>
             </a:extLst>
           </p:cNvPr>
@@ -3329,7 +6316,7 @@
           <p:cNvPr id="15" name="">
             <a:extLst xmlns:a="http://schemas.openxmlformats.org/drawingml/2006/main">
               <a:ext uri="{FF2B5EF4-FFF2-40B4-BE49-F238E27FC236}">
-                <a16:creationId xmlns:a16="http://schemas.microsoft.com/office/drawing/2014/main" id="{740E7A25-119A-488C-B4BE-D48EDCC3B1B2}"/>
+                <a16:creationId xmlns:a16="http://schemas.microsoft.com/office/drawing/2014/main" id="{0FCED00D-48D6-4F1E-B2DB-5A80779B289B}"/>
               </a:ext>
             </a:extLst>
           </p:cNvPr>
@@ -3393,7 +6380,7 @@
           <p:cNvPr id="16" name="">
             <a:extLst xmlns:a="http://schemas.openxmlformats.org/drawingml/2006/main">
               <a:ext uri="{FF2B5EF4-FFF2-40B4-BE49-F238E27FC236}">
-                <a16:creationId xmlns:a16="http://schemas.microsoft.com/office/drawing/2014/main" id="{ECCD0702-BCAF-4C64-A59B-7EC8DA1A679D}"/>
+                <a16:creationId xmlns:a16="http://schemas.microsoft.com/office/drawing/2014/main" id="{3A8BF7C7-1AC3-4C88-A0FF-B7FA8E088469}"/>
               </a:ext>
             </a:extLst>
           </p:cNvPr>
@@ -3526,7 +6513,7 @@
           <p:cNvPr id="17" name="">
             <a:extLst xmlns:a="http://schemas.openxmlformats.org/drawingml/2006/main">
               <a:ext uri="{FF2B5EF4-FFF2-40B4-BE49-F238E27FC236}">
-                <a16:creationId xmlns:a16="http://schemas.microsoft.com/office/drawing/2014/main" id="{CB8F47AC-88F9-4AF7-8FCB-5CB41D7BF296}"/>
+                <a16:creationId xmlns:a16="http://schemas.microsoft.com/office/drawing/2014/main" id="{4FFF1E0D-0AAB-4AC4-AAF3-2CFF432A9227}"/>
               </a:ext>
             </a:extLst>
           </p:cNvPr>
@@ -3588,7 +6575,7 @@
     </p:spTree>
     <p:extLst>
       <p:ext uri="{BB962C8B-B14F-4D97-AF65-F5344CB8AC3E}">
-        <p14:creationId xmlns:p14="http://schemas.microsoft.com/office/powerpoint/2010/main" val="559215631"/>
+        <p14:creationId xmlns:p14="http://schemas.microsoft.com/office/powerpoint/2010/main" val="983051003"/>
       </p:ext>
     </p:extLst>
   </p:cSld>
@@ -3612,7 +6599,7 @@
           <p:cNvPr id="1" name="">
             <a:extLst xmlns:a="http://schemas.openxmlformats.org/drawingml/2006/main">
               <a:ext uri="{FF2B5EF4-FFF2-40B4-BE49-F238E27FC236}">
-                <a16:creationId xmlns:a16="http://schemas.microsoft.com/office/drawing/2014/main" id="{38D20B79-39BE-4063-A701-824FAE12275C}"/>
+                <a16:creationId xmlns:a16="http://schemas.microsoft.com/office/drawing/2014/main" id="{1A51C025-D1AA-4A7E-BE87-774612651843}"/>
               </a:ext>
             </a:extLst>
           </p:cNvPr>
@@ -3647,7 +6634,7 @@
           <p:cNvPr id="2" name="">
             <a:extLst xmlns:a="http://schemas.openxmlformats.org/drawingml/2006/main">
               <a:ext uri="{FF2B5EF4-FFF2-40B4-BE49-F238E27FC236}">
-                <a16:creationId xmlns:a16="http://schemas.microsoft.com/office/drawing/2014/main" id="{3A61C4EB-B64C-49AB-8484-C32D263B723C}"/>
+                <a16:creationId xmlns:a16="http://schemas.microsoft.com/office/drawing/2014/main" id="{5673B8EB-302D-46B5-B9E1-2D91E7FFFA74}"/>
               </a:ext>
             </a:extLst>
           </p:cNvPr>
@@ -3711,7 +6698,7 @@
           <p:cNvPr id="3" name="">
             <a:extLst xmlns:a="http://schemas.openxmlformats.org/drawingml/2006/main">
               <a:ext uri="{FF2B5EF4-FFF2-40B4-BE49-F238E27FC236}">
-                <a16:creationId xmlns:a16="http://schemas.microsoft.com/office/drawing/2014/main" id="{A3CE5386-F7E2-4128-AC30-D471A91DB931}"/>
+                <a16:creationId xmlns:a16="http://schemas.microsoft.com/office/drawing/2014/main" id="{6FFDDFF6-0673-4E52-B254-F874275D45AD}"/>
               </a:ext>
             </a:extLst>
           </p:cNvPr>
@@ -3798,7 +6785,7 @@
           <p:cNvPr id="4" name="">
             <a:extLst xmlns:a="http://schemas.openxmlformats.org/drawingml/2006/main">
               <a:ext uri="{FF2B5EF4-FFF2-40B4-BE49-F238E27FC236}">
-                <a16:creationId xmlns:a16="http://schemas.microsoft.com/office/drawing/2014/main" id="{1145300B-4E34-46B9-A5B5-D8F17A6E2B38}"/>
+                <a16:creationId xmlns:a16="http://schemas.microsoft.com/office/drawing/2014/main" id="{08741370-03AE-4ACA-AD9D-CCEADB70937F}"/>
               </a:ext>
             </a:extLst>
           </p:cNvPr>
@@ -3833,7 +6820,7 @@
           <p:cNvPr id="5" name="">
             <a:extLst xmlns:a="http://schemas.openxmlformats.org/drawingml/2006/main">
               <a:ext uri="{FF2B5EF4-FFF2-40B4-BE49-F238E27FC236}">
-                <a16:creationId xmlns:a16="http://schemas.microsoft.com/office/drawing/2014/main" id="{AB7E0C07-3532-4B30-AA21-DDF074E997BB}"/>
+                <a16:creationId xmlns:a16="http://schemas.microsoft.com/office/drawing/2014/main" id="{7701BEF5-EC32-4840-8E0C-F4F2481E1213}"/>
               </a:ext>
             </a:extLst>
           </p:cNvPr>
@@ -3897,7 +6884,7 @@
           <p:cNvPr id="6" name="">
             <a:extLst xmlns:a="http://schemas.openxmlformats.org/drawingml/2006/main">
               <a:ext uri="{FF2B5EF4-FFF2-40B4-BE49-F238E27FC236}">
-                <a16:creationId xmlns:a16="http://schemas.microsoft.com/office/drawing/2014/main" id="{6D419FD4-B840-4FD0-B670-66F665150F83}"/>
+                <a16:creationId xmlns:a16="http://schemas.microsoft.com/office/drawing/2014/main" id="{B5A51177-4DA2-428C-81E2-30A21E33FFE3}"/>
               </a:ext>
             </a:extLst>
           </p:cNvPr>
@@ -3961,7 +6948,7 @@
           <p:cNvPr id="7" name="">
             <a:extLst xmlns:a="http://schemas.openxmlformats.org/drawingml/2006/main">
               <a:ext uri="{FF2B5EF4-FFF2-40B4-BE49-F238E27FC236}">
-                <a16:creationId xmlns:a16="http://schemas.microsoft.com/office/drawing/2014/main" id="{C98E76F3-FE55-4EA6-A484-6863E1DF811C}"/>
+                <a16:creationId xmlns:a16="http://schemas.microsoft.com/office/drawing/2014/main" id="{6AFCFADD-FB35-41C4-8F75-0A4C6D684AAD}"/>
               </a:ext>
             </a:extLst>
           </p:cNvPr>
@@ -4025,7 +7012,7 @@
           <p:cNvPr id="8" name="">
             <a:extLst xmlns:a="http://schemas.openxmlformats.org/drawingml/2006/main">
               <a:ext uri="{FF2B5EF4-FFF2-40B4-BE49-F238E27FC236}">
-                <a16:creationId xmlns:a16="http://schemas.microsoft.com/office/drawing/2014/main" id="{4DCC9F61-53AA-424C-9F12-32A26FA6F333}"/>
+                <a16:creationId xmlns:a16="http://schemas.microsoft.com/office/drawing/2014/main" id="{45A28754-9D9A-4B31-827E-26FDEC0D70B0}"/>
               </a:ext>
             </a:extLst>
           </p:cNvPr>
@@ -4060,7 +7047,7 @@
           <p:cNvPr id="9" name="">
             <a:extLst xmlns:a="http://schemas.openxmlformats.org/drawingml/2006/main">
               <a:ext uri="{FF2B5EF4-FFF2-40B4-BE49-F238E27FC236}">
-                <a16:creationId xmlns:a16="http://schemas.microsoft.com/office/drawing/2014/main" id="{B3B92210-E3FF-4458-AB02-F65C62D5A966}"/>
+                <a16:creationId xmlns:a16="http://schemas.microsoft.com/office/drawing/2014/main" id="{062A211A-80F5-4F3F-AD36-821C0326D7C0}"/>
               </a:ext>
             </a:extLst>
           </p:cNvPr>
@@ -4095,7 +7082,7 @@
           <p:cNvPr id="10" name="">
             <a:extLst xmlns:a="http://schemas.openxmlformats.org/drawingml/2006/main">
               <a:ext uri="{FF2B5EF4-FFF2-40B4-BE49-F238E27FC236}">
-                <a16:creationId xmlns:a16="http://schemas.microsoft.com/office/drawing/2014/main" id="{4F2B9D46-E314-46C3-A90F-A61183B406A2}"/>
+                <a16:creationId xmlns:a16="http://schemas.microsoft.com/office/drawing/2014/main" id="{651E0660-9A16-4B9F-A154-BAAD6615CD7B}"/>
               </a:ext>
             </a:extLst>
           </p:cNvPr>
@@ -4159,7 +7146,7 @@
           <p:cNvPr id="11" name="">
             <a:extLst xmlns:a="http://schemas.openxmlformats.org/drawingml/2006/main">
               <a:ext uri="{FF2B5EF4-FFF2-40B4-BE49-F238E27FC236}">
-                <a16:creationId xmlns:a16="http://schemas.microsoft.com/office/drawing/2014/main" id="{3A04938D-B631-4AC4-B30E-06434BD2C67E}"/>
+                <a16:creationId xmlns:a16="http://schemas.microsoft.com/office/drawing/2014/main" id="{F9428BAF-ABE1-4BF6-8D66-DA0F5068BB18}"/>
               </a:ext>
             </a:extLst>
           </p:cNvPr>
@@ -4223,7 +7210,7 @@
           <p:cNvPr id="12" name="">
             <a:extLst xmlns:a="http://schemas.openxmlformats.org/drawingml/2006/main">
               <a:ext uri="{FF2B5EF4-FFF2-40B4-BE49-F238E27FC236}">
-                <a16:creationId xmlns:a16="http://schemas.microsoft.com/office/drawing/2014/main" id="{6858246B-4915-46F5-A718-371DBFDBF800}"/>
+                <a16:creationId xmlns:a16="http://schemas.microsoft.com/office/drawing/2014/main" id="{A44C60DC-D7CC-415A-9055-542CF4E66878}"/>
               </a:ext>
             </a:extLst>
           </p:cNvPr>
@@ -4287,7 +7274,7 @@
           <p:cNvPr id="13" name="">
             <a:extLst xmlns:a="http://schemas.openxmlformats.org/drawingml/2006/main">
               <a:ext uri="{FF2B5EF4-FFF2-40B4-BE49-F238E27FC236}">
-                <a16:creationId xmlns:a16="http://schemas.microsoft.com/office/drawing/2014/main" id="{CEC93956-EE40-4225-B00F-F95136F74E6F}"/>
+                <a16:creationId xmlns:a16="http://schemas.microsoft.com/office/drawing/2014/main" id="{08406F12-57AD-459C-8DE7-7C33077C7B9C}"/>
               </a:ext>
             </a:extLst>
           </p:cNvPr>
@@ -4322,7 +7309,7 @@
           <p:cNvPr id="14" name="">
             <a:extLst xmlns:a="http://schemas.openxmlformats.org/drawingml/2006/main">
               <a:ext uri="{FF2B5EF4-FFF2-40B4-BE49-F238E27FC236}">
-                <a16:creationId xmlns:a16="http://schemas.microsoft.com/office/drawing/2014/main" id="{81312AC4-78DF-4D30-9320-50003A42BDEC}"/>
+                <a16:creationId xmlns:a16="http://schemas.microsoft.com/office/drawing/2014/main" id="{1F17BEF9-BCE5-4E4B-B2CA-49E3C30B58E7}"/>
               </a:ext>
             </a:extLst>
           </p:cNvPr>
@@ -4357,7 +7344,7 @@
           <p:cNvPr id="15" name="">
             <a:extLst xmlns:a="http://schemas.openxmlformats.org/drawingml/2006/main">
               <a:ext uri="{FF2B5EF4-FFF2-40B4-BE49-F238E27FC236}">
-                <a16:creationId xmlns:a16="http://schemas.microsoft.com/office/drawing/2014/main" id="{55DB23E6-A95F-4902-BC37-9F2C591AA967}"/>
+                <a16:creationId xmlns:a16="http://schemas.microsoft.com/office/drawing/2014/main" id="{31973641-5536-4460-850E-13B714F6E46E}"/>
               </a:ext>
             </a:extLst>
           </p:cNvPr>
@@ -4421,7 +7408,7 @@
           <p:cNvPr id="16" name="">
             <a:extLst xmlns:a="http://schemas.openxmlformats.org/drawingml/2006/main">
               <a:ext uri="{FF2B5EF4-FFF2-40B4-BE49-F238E27FC236}">
-                <a16:creationId xmlns:a16="http://schemas.microsoft.com/office/drawing/2014/main" id="{127EF92E-85C7-4EE3-A67F-5E30FDC16FC9}"/>
+                <a16:creationId xmlns:a16="http://schemas.microsoft.com/office/drawing/2014/main" id="{E202A03C-F1AE-4CF2-B141-80948DEB26E1}"/>
               </a:ext>
             </a:extLst>
           </p:cNvPr>
@@ -4485,7 +7472,7 @@
           <p:cNvPr id="17" name="">
             <a:extLst xmlns:a="http://schemas.openxmlformats.org/drawingml/2006/main">
               <a:ext uri="{FF2B5EF4-FFF2-40B4-BE49-F238E27FC236}">
-                <a16:creationId xmlns:a16="http://schemas.microsoft.com/office/drawing/2014/main" id="{E4B1A403-0914-41FC-9C09-349DF06EF21A}"/>
+                <a16:creationId xmlns:a16="http://schemas.microsoft.com/office/drawing/2014/main" id="{6E334D74-B2EB-4710-B21A-AC560F9180F6}"/>
               </a:ext>
             </a:extLst>
           </p:cNvPr>
@@ -4549,7 +7536,7 @@
           <p:cNvPr id="18" name="">
             <a:extLst xmlns:a="http://schemas.openxmlformats.org/drawingml/2006/main">
               <a:ext uri="{FF2B5EF4-FFF2-40B4-BE49-F238E27FC236}">
-                <a16:creationId xmlns:a16="http://schemas.microsoft.com/office/drawing/2014/main" id="{5BD92238-1C65-458A-A73C-B6833392A54F}"/>
+                <a16:creationId xmlns:a16="http://schemas.microsoft.com/office/drawing/2014/main" id="{F6C4B69B-8F1B-4A47-A747-A6A51598E7C5}"/>
               </a:ext>
             </a:extLst>
           </p:cNvPr>
@@ -4584,7 +7571,7 @@
           <p:cNvPr id="19" name="">
             <a:extLst xmlns:a="http://schemas.openxmlformats.org/drawingml/2006/main">
               <a:ext uri="{FF2B5EF4-FFF2-40B4-BE49-F238E27FC236}">
-                <a16:creationId xmlns:a16="http://schemas.microsoft.com/office/drawing/2014/main" id="{6D801FC1-BB94-4F46-9FD6-57A53447BDA1}"/>
+                <a16:creationId xmlns:a16="http://schemas.microsoft.com/office/drawing/2014/main" id="{D19C3186-F2C1-493D-AA85-A6D3AB0A7236}"/>
               </a:ext>
             </a:extLst>
           </p:cNvPr>
@@ -4619,7 +7606,7 @@
           <p:cNvPr id="20" name="">
             <a:extLst xmlns:a="http://schemas.openxmlformats.org/drawingml/2006/main">
               <a:ext uri="{FF2B5EF4-FFF2-40B4-BE49-F238E27FC236}">
-                <a16:creationId xmlns:a16="http://schemas.microsoft.com/office/drawing/2014/main" id="{A5B7D70F-FCA2-4BCE-8E3A-862D3F532C36}"/>
+                <a16:creationId xmlns:a16="http://schemas.microsoft.com/office/drawing/2014/main" id="{D023DB46-F7DA-4FE2-BF38-19B14F556685}"/>
               </a:ext>
             </a:extLst>
           </p:cNvPr>
@@ -4683,7 +7670,7 @@
           <p:cNvPr id="21" name="">
             <a:extLst xmlns:a="http://schemas.openxmlformats.org/drawingml/2006/main">
               <a:ext uri="{FF2B5EF4-FFF2-40B4-BE49-F238E27FC236}">
-                <a16:creationId xmlns:a16="http://schemas.microsoft.com/office/drawing/2014/main" id="{8805FAAF-2B4F-4E16-9E4A-88AB156AA411}"/>
+                <a16:creationId xmlns:a16="http://schemas.microsoft.com/office/drawing/2014/main" id="{858C727C-6C93-47C4-840C-5E5C6677D3C5}"/>
               </a:ext>
             </a:extLst>
           </p:cNvPr>
@@ -4745,7 +7732,7 @@
     </p:spTree>
     <p:extLst>
       <p:ext uri="{BB962C8B-B14F-4D97-AF65-F5344CB8AC3E}">
-        <p14:creationId xmlns:p14="http://schemas.microsoft.com/office/powerpoint/2010/main" val="987872329"/>
+        <p14:creationId xmlns:p14="http://schemas.microsoft.com/office/powerpoint/2010/main" val="1573111421"/>
       </p:ext>
     </p:extLst>
   </p:cSld>
@@ -4769,7 +7756,7 @@
           <p:cNvPr id="1" name="">
             <a:extLst xmlns:a="http://schemas.openxmlformats.org/drawingml/2006/main">
               <a:ext uri="{FF2B5EF4-FFF2-40B4-BE49-F238E27FC236}">
-                <a16:creationId xmlns:a16="http://schemas.microsoft.com/office/drawing/2014/main" id="{A89C0143-BED5-4883-A8C2-F800B1CDB2D2}"/>
+                <a16:creationId xmlns:a16="http://schemas.microsoft.com/office/drawing/2014/main" id="{2CC94F2D-9A12-4233-8ADE-B0A235C981F1}"/>
               </a:ext>
             </a:extLst>
           </p:cNvPr>
@@ -4804,7 +7791,7 @@
           <p:cNvPr id="2" name="">
             <a:extLst xmlns:a="http://schemas.openxmlformats.org/drawingml/2006/main">
               <a:ext uri="{FF2B5EF4-FFF2-40B4-BE49-F238E27FC236}">
-                <a16:creationId xmlns:a16="http://schemas.microsoft.com/office/drawing/2014/main" id="{79BEC77A-A7C0-4765-A2E1-E4E8D2AF63DD}"/>
+                <a16:creationId xmlns:a16="http://schemas.microsoft.com/office/drawing/2014/main" id="{E3BBA29E-750F-4F9C-BF84-714E20AD738E}"/>
               </a:ext>
             </a:extLst>
           </p:cNvPr>
@@ -4839,7 +7826,7 @@
           <p:cNvPr id="3" name="">
             <a:extLst xmlns:a="http://schemas.openxmlformats.org/drawingml/2006/main">
               <a:ext uri="{FF2B5EF4-FFF2-40B4-BE49-F238E27FC236}">
-                <a16:creationId xmlns:a16="http://schemas.microsoft.com/office/drawing/2014/main" id="{49E50DB1-8429-490F-B4D2-429EA00D7133}"/>
+                <a16:creationId xmlns:a16="http://schemas.microsoft.com/office/drawing/2014/main" id="{A383EAA2-C3DA-4334-ABAE-57D6E00DF71D}"/>
               </a:ext>
             </a:extLst>
           </p:cNvPr>
@@ -4903,7 +7890,7 @@
           <p:cNvPr id="4" name="">
             <a:extLst xmlns:a="http://schemas.openxmlformats.org/drawingml/2006/main">
               <a:ext uri="{FF2B5EF4-FFF2-40B4-BE49-F238E27FC236}">
-                <a16:creationId xmlns:a16="http://schemas.microsoft.com/office/drawing/2014/main" id="{5C68C607-50DA-4233-BF2D-AEA746934DE2}"/>
+                <a16:creationId xmlns:a16="http://schemas.microsoft.com/office/drawing/2014/main" id="{75AA7592-3D54-405E-B896-4B2D43BA1CC0}"/>
               </a:ext>
             </a:extLst>
           </p:cNvPr>
@@ -4990,7 +7977,7 @@
           <p:cNvPr id="5" name="">
             <a:extLst xmlns:a="http://schemas.openxmlformats.org/drawingml/2006/main">
               <a:ext uri="{FF2B5EF4-FFF2-40B4-BE49-F238E27FC236}">
-                <a16:creationId xmlns:a16="http://schemas.microsoft.com/office/drawing/2014/main" id="{34350ADA-339C-4205-A346-01CB2931D4A7}"/>
+                <a16:creationId xmlns:a16="http://schemas.microsoft.com/office/drawing/2014/main" id="{36516110-6CE8-4B75-A975-643D69DAC3D6}"/>
               </a:ext>
             </a:extLst>
           </p:cNvPr>
@@ -5025,7 +8012,7 @@
           <p:cNvPr id="6" name="">
             <a:extLst xmlns:a="http://schemas.openxmlformats.org/drawingml/2006/main">
               <a:ext uri="{FF2B5EF4-FFF2-40B4-BE49-F238E27FC236}">
-                <a16:creationId xmlns:a16="http://schemas.microsoft.com/office/drawing/2014/main" id="{23908E88-8BDA-41CA-AC45-40B3F5338E20}"/>
+                <a16:creationId xmlns:a16="http://schemas.microsoft.com/office/drawing/2014/main" id="{5D1ED861-CCF0-4A65-B666-6EB5CEAC6FA5}"/>
               </a:ext>
             </a:extLst>
           </p:cNvPr>
@@ -5112,7 +8099,7 @@
           <p:cNvPr id="7" name="">
             <a:extLst xmlns:a="http://schemas.openxmlformats.org/drawingml/2006/main">
               <a:ext uri="{FF2B5EF4-FFF2-40B4-BE49-F238E27FC236}">
-                <a16:creationId xmlns:a16="http://schemas.microsoft.com/office/drawing/2014/main" id="{E3AA1DD9-1294-4A2F-9510-D481E274A623}"/>
+                <a16:creationId xmlns:a16="http://schemas.microsoft.com/office/drawing/2014/main" id="{5DE8A56B-84C2-46EE-889A-2F7E491197C4}"/>
               </a:ext>
             </a:extLst>
           </p:cNvPr>
@@ -5147,7 +8134,7 @@
           <p:cNvPr id="8" name="">
             <a:extLst xmlns:a="http://schemas.openxmlformats.org/drawingml/2006/main">
               <a:ext uri="{FF2B5EF4-FFF2-40B4-BE49-F238E27FC236}">
-                <a16:creationId xmlns:a16="http://schemas.microsoft.com/office/drawing/2014/main" id="{4792DF81-CBE6-466A-A6E2-618A7F10D702}"/>
+                <a16:creationId xmlns:a16="http://schemas.microsoft.com/office/drawing/2014/main" id="{22B3585B-B9C7-4CB3-A85E-590CE667B06A}"/>
               </a:ext>
             </a:extLst>
           </p:cNvPr>
@@ -5180,7 +8167,7 @@
           <p:cNvPr id="9" name="">
             <a:extLst xmlns:a="http://schemas.openxmlformats.org/drawingml/2006/main">
               <a:ext uri="{FF2B5EF4-FFF2-40B4-BE49-F238E27FC236}">
-                <a16:creationId xmlns:a16="http://schemas.microsoft.com/office/drawing/2014/main" id="{4394C270-1677-4681-A9F0-D09018F0A6DA}"/>
+                <a16:creationId xmlns:a16="http://schemas.microsoft.com/office/drawing/2014/main" id="{E6BEDEB4-B023-4773-BDB2-6FB2B382C5C3}"/>
               </a:ext>
             </a:extLst>
           </p:cNvPr>
@@ -5244,7 +8231,7 @@
           <p:cNvPr id="10" name="">
             <a:extLst xmlns:a="http://schemas.openxmlformats.org/drawingml/2006/main">
               <a:ext uri="{FF2B5EF4-FFF2-40B4-BE49-F238E27FC236}">
-                <a16:creationId xmlns:a16="http://schemas.microsoft.com/office/drawing/2014/main" id="{9DF0E297-C4CB-40BD-8CCB-165B128A72B7}"/>
+                <a16:creationId xmlns:a16="http://schemas.microsoft.com/office/drawing/2014/main" id="{C1DC7AB3-1EFA-4682-AAD5-8E942E0EC108}"/>
               </a:ext>
             </a:extLst>
           </p:cNvPr>
@@ -5308,7 +8295,7 @@
           <p:cNvPr id="11" name="">
             <a:extLst xmlns:a="http://schemas.openxmlformats.org/drawingml/2006/main">
               <a:ext uri="{FF2B5EF4-FFF2-40B4-BE49-F238E27FC236}">
-                <a16:creationId xmlns:a16="http://schemas.microsoft.com/office/drawing/2014/main" id="{17A7BBDA-54D0-4841-8605-CF88A208EB40}"/>
+                <a16:creationId xmlns:a16="http://schemas.microsoft.com/office/drawing/2014/main" id="{C80E12EF-99A8-4F8E-962D-9EE9AAC91C1D}"/>
               </a:ext>
             </a:extLst>
           </p:cNvPr>
@@ -5372,7 +8359,7 @@
           <p:cNvPr id="12" name="">
             <a:extLst xmlns:a="http://schemas.openxmlformats.org/drawingml/2006/main">
               <a:ext uri="{FF2B5EF4-FFF2-40B4-BE49-F238E27FC236}">
-                <a16:creationId xmlns:a16="http://schemas.microsoft.com/office/drawing/2014/main" id="{A539344C-5C15-4E60-8AB3-50BCD4472E3B}"/>
+                <a16:creationId xmlns:a16="http://schemas.microsoft.com/office/drawing/2014/main" id="{4203503B-9B03-42CA-81B6-0F0B883CFF66}"/>
               </a:ext>
             </a:extLst>
           </p:cNvPr>
@@ -5407,7 +8394,7 @@
           <p:cNvPr id="13" name="">
             <a:extLst xmlns:a="http://schemas.openxmlformats.org/drawingml/2006/main">
               <a:ext uri="{FF2B5EF4-FFF2-40B4-BE49-F238E27FC236}">
-                <a16:creationId xmlns:a16="http://schemas.microsoft.com/office/drawing/2014/main" id="{5A7D8D2D-BEB1-4FBE-9063-292F61162F27}"/>
+                <a16:creationId xmlns:a16="http://schemas.microsoft.com/office/drawing/2014/main" id="{E2868606-8CFD-4C98-817F-B2A6CBE697B7}"/>
               </a:ext>
             </a:extLst>
           </p:cNvPr>
@@ -5440,7 +8427,7 @@
           <p:cNvPr id="14" name="">
             <a:extLst xmlns:a="http://schemas.openxmlformats.org/drawingml/2006/main">
               <a:ext uri="{FF2B5EF4-FFF2-40B4-BE49-F238E27FC236}">
-                <a16:creationId xmlns:a16="http://schemas.microsoft.com/office/drawing/2014/main" id="{3365DA3F-07B1-4C54-BF71-B5FB63800977}"/>
+                <a16:creationId xmlns:a16="http://schemas.microsoft.com/office/drawing/2014/main" id="{409A22A8-8391-47E9-88CF-13EC8AAE40B8}"/>
               </a:ext>
             </a:extLst>
           </p:cNvPr>
@@ -5504,7 +8491,7 @@
           <p:cNvPr id="15" name="">
             <a:extLst xmlns:a="http://schemas.openxmlformats.org/drawingml/2006/main">
               <a:ext uri="{FF2B5EF4-FFF2-40B4-BE49-F238E27FC236}">
-                <a16:creationId xmlns:a16="http://schemas.microsoft.com/office/drawing/2014/main" id="{7A2A27D3-5206-4C39-B758-4A21A1683A21}"/>
+                <a16:creationId xmlns:a16="http://schemas.microsoft.com/office/drawing/2014/main" id="{928144EA-8276-443C-9823-E44E370DE22E}"/>
               </a:ext>
             </a:extLst>
           </p:cNvPr>
@@ -5568,7 +8555,7 @@
           <p:cNvPr id="16" name="">
             <a:extLst xmlns:a="http://schemas.openxmlformats.org/drawingml/2006/main">
               <a:ext uri="{FF2B5EF4-FFF2-40B4-BE49-F238E27FC236}">
-                <a16:creationId xmlns:a16="http://schemas.microsoft.com/office/drawing/2014/main" id="{07A57D73-038B-4D35-BEAF-8A5E03A7E543}"/>
+                <a16:creationId xmlns:a16="http://schemas.microsoft.com/office/drawing/2014/main" id="{08C789DC-A698-4318-AFAC-4E8CA3243CEF}"/>
               </a:ext>
             </a:extLst>
           </p:cNvPr>
@@ -5632,7 +8619,7 @@
           <p:cNvPr id="17" name="">
             <a:extLst xmlns:a="http://schemas.openxmlformats.org/drawingml/2006/main">
               <a:ext uri="{FF2B5EF4-FFF2-40B4-BE49-F238E27FC236}">
-                <a16:creationId xmlns:a16="http://schemas.microsoft.com/office/drawing/2014/main" id="{BFEA88CF-5C6C-4BCE-A521-7B64C9A8840E}"/>
+                <a16:creationId xmlns:a16="http://schemas.microsoft.com/office/drawing/2014/main" id="{52E61B6F-D9D6-410A-9D57-925F371B7EE9}"/>
               </a:ext>
             </a:extLst>
           </p:cNvPr>
@@ -5667,7 +8654,7 @@
           <p:cNvPr id="18" name="">
             <a:extLst xmlns:a="http://schemas.openxmlformats.org/drawingml/2006/main">
               <a:ext uri="{FF2B5EF4-FFF2-40B4-BE49-F238E27FC236}">
-                <a16:creationId xmlns:a16="http://schemas.microsoft.com/office/drawing/2014/main" id="{CBF956C1-C043-4200-ACB8-7D954F4BBCFE}"/>
+                <a16:creationId xmlns:a16="http://schemas.microsoft.com/office/drawing/2014/main" id="{CEFD428A-CD1A-4B46-B798-117B11E9FE91}"/>
               </a:ext>
             </a:extLst>
           </p:cNvPr>
@@ -5700,7 +8687,7 @@
           <p:cNvPr id="19" name="">
             <a:extLst xmlns:a="http://schemas.openxmlformats.org/drawingml/2006/main">
               <a:ext uri="{FF2B5EF4-FFF2-40B4-BE49-F238E27FC236}">
-                <a16:creationId xmlns:a16="http://schemas.microsoft.com/office/drawing/2014/main" id="{36C42B20-A78E-4011-B697-6D3EA375F972}"/>
+                <a16:creationId xmlns:a16="http://schemas.microsoft.com/office/drawing/2014/main" id="{B0FB83E3-3DAB-4A3F-A5B0-99584796202C}"/>
               </a:ext>
             </a:extLst>
           </p:cNvPr>
@@ -5764,7 +8751,7 @@
           <p:cNvPr id="20" name="">
             <a:extLst xmlns:a="http://schemas.openxmlformats.org/drawingml/2006/main">
               <a:ext uri="{FF2B5EF4-FFF2-40B4-BE49-F238E27FC236}">
-                <a16:creationId xmlns:a16="http://schemas.microsoft.com/office/drawing/2014/main" id="{F6091254-7901-4A06-93D1-F7E5DA0DA106}"/>
+                <a16:creationId xmlns:a16="http://schemas.microsoft.com/office/drawing/2014/main" id="{FE0C21E2-C08A-4F77-ACA1-2AF08BB2F0F9}"/>
               </a:ext>
             </a:extLst>
           </p:cNvPr>
@@ -5828,7 +8815,7 @@
           <p:cNvPr id="21" name="">
             <a:extLst xmlns:a="http://schemas.openxmlformats.org/drawingml/2006/main">
               <a:ext uri="{FF2B5EF4-FFF2-40B4-BE49-F238E27FC236}">
-                <a16:creationId xmlns:a16="http://schemas.microsoft.com/office/drawing/2014/main" id="{3B5A9FF2-BD51-4165-93B2-D0985DE4BCDD}"/>
+                <a16:creationId xmlns:a16="http://schemas.microsoft.com/office/drawing/2014/main" id="{7E01B488-7C07-4770-B217-7786E55748FA}"/>
               </a:ext>
             </a:extLst>
           </p:cNvPr>
@@ -5892,7 +8879,7 @@
           <p:cNvPr id="22" name="">
             <a:extLst xmlns:a="http://schemas.openxmlformats.org/drawingml/2006/main">
               <a:ext uri="{FF2B5EF4-FFF2-40B4-BE49-F238E27FC236}">
-                <a16:creationId xmlns:a16="http://schemas.microsoft.com/office/drawing/2014/main" id="{2AD365CF-A4EC-41D4-BF93-5D3079B19381}"/>
+                <a16:creationId xmlns:a16="http://schemas.microsoft.com/office/drawing/2014/main" id="{D8665B12-EF6C-45FE-9BD1-ED3514BA29DE}"/>
               </a:ext>
             </a:extLst>
           </p:cNvPr>
@@ -5925,7 +8912,7 @@
           <p:cNvPr id="23" name="">
             <a:extLst xmlns:a="http://schemas.openxmlformats.org/drawingml/2006/main">
               <a:ext uri="{FF2B5EF4-FFF2-40B4-BE49-F238E27FC236}">
-                <a16:creationId xmlns:a16="http://schemas.microsoft.com/office/drawing/2014/main" id="{51FB9E1C-AD55-4D48-A3A9-B3393EB470A0}"/>
+                <a16:creationId xmlns:a16="http://schemas.microsoft.com/office/drawing/2014/main" id="{34B0FC5D-5DEC-464C-AAEC-C70F1A350989}"/>
               </a:ext>
             </a:extLst>
           </p:cNvPr>
@@ -5989,7 +8976,7 @@
           <p:cNvPr id="24" name="">
             <a:extLst xmlns:a="http://schemas.openxmlformats.org/drawingml/2006/main">
               <a:ext uri="{FF2B5EF4-FFF2-40B4-BE49-F238E27FC236}">
-                <a16:creationId xmlns:a16="http://schemas.microsoft.com/office/drawing/2014/main" id="{DC001167-9779-4E72-9056-AB451AA740FF}"/>
+                <a16:creationId xmlns:a16="http://schemas.microsoft.com/office/drawing/2014/main" id="{E5F7768C-61AA-4A70-B7BC-0F6424962F08}"/>
               </a:ext>
             </a:extLst>
           </p:cNvPr>
@@ -6051,7 +9038,7 @@
     </p:spTree>
     <p:extLst>
       <p:ext uri="{BB962C8B-B14F-4D97-AF65-F5344CB8AC3E}">
-        <p14:creationId xmlns:p14="http://schemas.microsoft.com/office/powerpoint/2010/main" val="317587474"/>
+        <p14:creationId xmlns:p14="http://schemas.microsoft.com/office/powerpoint/2010/main" val="1909278252"/>
       </p:ext>
     </p:extLst>
   </p:cSld>
@@ -6075,7 +9062,7 @@
           <p:cNvPr id="1" name="">
             <a:extLst xmlns:a="http://schemas.openxmlformats.org/drawingml/2006/main">
               <a:ext uri="{FF2B5EF4-FFF2-40B4-BE49-F238E27FC236}">
-                <a16:creationId xmlns:a16="http://schemas.microsoft.com/office/drawing/2014/main" id="{3602F5E7-58CB-429B-98D3-687871C4C882}"/>
+                <a16:creationId xmlns:a16="http://schemas.microsoft.com/office/drawing/2014/main" id="{37E35856-FC28-4F81-AD75-B695DDE5C652}"/>
               </a:ext>
             </a:extLst>
           </p:cNvPr>
@@ -6110,7 +9097,7 @@
           <p:cNvPr id="2" name="">
             <a:extLst xmlns:a="http://schemas.openxmlformats.org/drawingml/2006/main">
               <a:ext uri="{FF2B5EF4-FFF2-40B4-BE49-F238E27FC236}">
-                <a16:creationId xmlns:a16="http://schemas.microsoft.com/office/drawing/2014/main" id="{E96140EB-177C-442B-A27E-E69A98EC709B}"/>
+                <a16:creationId xmlns:a16="http://schemas.microsoft.com/office/drawing/2014/main" id="{F8098E3F-8D1A-4BE7-9242-83DF56FFFFB1}"/>
               </a:ext>
             </a:extLst>
           </p:cNvPr>
@@ -6174,7 +9161,7 @@
           <p:cNvPr id="3" name="">
             <a:extLst xmlns:a="http://schemas.openxmlformats.org/drawingml/2006/main">
               <a:ext uri="{FF2B5EF4-FFF2-40B4-BE49-F238E27FC236}">
-                <a16:creationId xmlns:a16="http://schemas.microsoft.com/office/drawing/2014/main" id="{C9D4E0B1-06A4-4B0E-B236-D352428DD2B8}"/>
+                <a16:creationId xmlns:a16="http://schemas.microsoft.com/office/drawing/2014/main" id="{0F166BF4-F886-4839-B40A-CFA517D801FC}"/>
               </a:ext>
             </a:extLst>
           </p:cNvPr>
@@ -6261,7 +9248,7 @@
           <p:cNvPr id="4" name="">
             <a:extLst xmlns:a="http://schemas.openxmlformats.org/drawingml/2006/main">
               <a:ext uri="{FF2B5EF4-FFF2-40B4-BE49-F238E27FC236}">
-                <a16:creationId xmlns:a16="http://schemas.microsoft.com/office/drawing/2014/main" id="{73BD5066-0F19-4A31-8F6A-793ADE664C56}"/>
+                <a16:creationId xmlns:a16="http://schemas.microsoft.com/office/drawing/2014/main" id="{74038B3B-F7BB-4753-A3E1-B8B58D9786DC}"/>
               </a:ext>
             </a:extLst>
           </p:cNvPr>
@@ -6325,7 +9312,7 @@
           <p:cNvPr id="5" name="">
             <a:extLst xmlns:a="http://schemas.openxmlformats.org/drawingml/2006/main">
               <a:ext uri="{FF2B5EF4-FFF2-40B4-BE49-F238E27FC236}">
-                <a16:creationId xmlns:a16="http://schemas.microsoft.com/office/drawing/2014/main" id="{BEB4C635-5405-4116-B55D-EAE78E65329A}"/>
+                <a16:creationId xmlns:a16="http://schemas.microsoft.com/office/drawing/2014/main" id="{AB24F256-5B8E-448B-B868-81934A1CB1AF}"/>
               </a:ext>
             </a:extLst>
           </p:cNvPr>
@@ -6358,7 +9345,7 @@
           <p:cNvPr id="6" name="">
             <a:extLst xmlns:a="http://schemas.openxmlformats.org/drawingml/2006/main">
               <a:ext uri="{FF2B5EF4-FFF2-40B4-BE49-F238E27FC236}">
-                <a16:creationId xmlns:a16="http://schemas.microsoft.com/office/drawing/2014/main" id="{59A8D1BA-D52F-4052-9796-867875FD5BF0}"/>
+                <a16:creationId xmlns:a16="http://schemas.microsoft.com/office/drawing/2014/main" id="{FF2C2398-9B5E-41A8-BDE0-6B95E56D0B5A}"/>
               </a:ext>
             </a:extLst>
           </p:cNvPr>
@@ -6393,7 +9380,7 @@
           <p:cNvPr id="7" name="">
             <a:extLst xmlns:a="http://schemas.openxmlformats.org/drawingml/2006/main">
               <a:ext uri="{FF2B5EF4-FFF2-40B4-BE49-F238E27FC236}">
-                <a16:creationId xmlns:a16="http://schemas.microsoft.com/office/drawing/2014/main" id="{5371A7A2-0666-4ECA-A234-60C0BFE695A0}"/>
+                <a16:creationId xmlns:a16="http://schemas.microsoft.com/office/drawing/2014/main" id="{5473166C-EC77-47A5-9582-C4F737A8B4EF}"/>
               </a:ext>
             </a:extLst>
           </p:cNvPr>
@@ -6457,7 +9444,7 @@
           <p:cNvPr id="8" name="">
             <a:extLst xmlns:a="http://schemas.openxmlformats.org/drawingml/2006/main">
               <a:ext uri="{FF2B5EF4-FFF2-40B4-BE49-F238E27FC236}">
-                <a16:creationId xmlns:a16="http://schemas.microsoft.com/office/drawing/2014/main" id="{8BD4C992-B8E5-4323-AEF8-222D49EA9F10}"/>
+                <a16:creationId xmlns:a16="http://schemas.microsoft.com/office/drawing/2014/main" id="{437E7019-C631-41E2-AEB7-3BB960240FF1}"/>
               </a:ext>
             </a:extLst>
           </p:cNvPr>
@@ -6567,7 +9554,7 @@
           <p:cNvPr id="9" name="">
             <a:extLst xmlns:a="http://schemas.openxmlformats.org/drawingml/2006/main">
               <a:ext uri="{FF2B5EF4-FFF2-40B4-BE49-F238E27FC236}">
-                <a16:creationId xmlns:a16="http://schemas.microsoft.com/office/drawing/2014/main" id="{08CD868E-8067-4B0E-80EA-75004C6CC22F}"/>
+                <a16:creationId xmlns:a16="http://schemas.microsoft.com/office/drawing/2014/main" id="{53407266-F8AE-4B62-BEBB-B59694E42335}"/>
               </a:ext>
             </a:extLst>
           </p:cNvPr>
@@ -6602,7 +9589,7 @@
           <p:cNvPr id="10" name="">
             <a:extLst xmlns:a="http://schemas.openxmlformats.org/drawingml/2006/main">
               <a:ext uri="{FF2B5EF4-FFF2-40B4-BE49-F238E27FC236}">
-                <a16:creationId xmlns:a16="http://schemas.microsoft.com/office/drawing/2014/main" id="{BB35884C-511C-495E-B0CC-3C04362EBB87}"/>
+                <a16:creationId xmlns:a16="http://schemas.microsoft.com/office/drawing/2014/main" id="{F60C9FC0-D13B-420D-AE82-7EC290C4EB18}"/>
               </a:ext>
             </a:extLst>
           </p:cNvPr>
@@ -6635,7 +9622,7 @@
           <p:cNvPr id="11" name="">
             <a:extLst xmlns:a="http://schemas.openxmlformats.org/drawingml/2006/main">
               <a:ext uri="{FF2B5EF4-FFF2-40B4-BE49-F238E27FC236}">
-                <a16:creationId xmlns:a16="http://schemas.microsoft.com/office/drawing/2014/main" id="{F2851BBC-8AD0-43EE-A3FA-96EB56441556}"/>
+                <a16:creationId xmlns:a16="http://schemas.microsoft.com/office/drawing/2014/main" id="{64CFABB8-A135-4263-BAFA-4D5F22544B79}"/>
               </a:ext>
             </a:extLst>
           </p:cNvPr>
@@ -6670,7 +9657,7 @@
           <p:cNvPr id="12" name="">
             <a:extLst xmlns:a="http://schemas.openxmlformats.org/drawingml/2006/main">
               <a:ext uri="{FF2B5EF4-FFF2-40B4-BE49-F238E27FC236}">
-                <a16:creationId xmlns:a16="http://schemas.microsoft.com/office/drawing/2014/main" id="{6573DDD7-96A8-46C2-AFC1-3BA4A5314C22}"/>
+                <a16:creationId xmlns:a16="http://schemas.microsoft.com/office/drawing/2014/main" id="{C295FB08-0221-4CD1-925E-0D0E9E7534FD}"/>
               </a:ext>
             </a:extLst>
           </p:cNvPr>
@@ -6734,7 +9721,7 @@
           <p:cNvPr id="13" name="">
             <a:extLst xmlns:a="http://schemas.openxmlformats.org/drawingml/2006/main">
               <a:ext uri="{FF2B5EF4-FFF2-40B4-BE49-F238E27FC236}">
-                <a16:creationId xmlns:a16="http://schemas.microsoft.com/office/drawing/2014/main" id="{891E1349-9894-41F8-A1B9-73171DCB932A}"/>
+                <a16:creationId xmlns:a16="http://schemas.microsoft.com/office/drawing/2014/main" id="{CF930301-5A26-4DB8-8D89-1ACFA592A5A9}"/>
               </a:ext>
             </a:extLst>
           </p:cNvPr>
@@ -6867,7 +9854,7 @@
           <p:cNvPr id="14" name="">
             <a:extLst xmlns:a="http://schemas.openxmlformats.org/drawingml/2006/main">
               <a:ext uri="{FF2B5EF4-FFF2-40B4-BE49-F238E27FC236}">
-                <a16:creationId xmlns:a16="http://schemas.microsoft.com/office/drawing/2014/main" id="{01F06DD9-8F9D-49F4-B851-BA8EEE77FD90}"/>
+                <a16:creationId xmlns:a16="http://schemas.microsoft.com/office/drawing/2014/main" id="{AA40385D-918A-4BF7-9C58-E5F219BA2C9E}"/>
               </a:ext>
             </a:extLst>
           </p:cNvPr>
@@ -6902,7 +9889,7 @@
           <p:cNvPr id="15" name="">
             <a:extLst xmlns:a="http://schemas.openxmlformats.org/drawingml/2006/main">
               <a:ext uri="{FF2B5EF4-FFF2-40B4-BE49-F238E27FC236}">
-                <a16:creationId xmlns:a16="http://schemas.microsoft.com/office/drawing/2014/main" id="{0FFBA032-F264-4CBE-88EC-BA15F0DE3CC7}"/>
+                <a16:creationId xmlns:a16="http://schemas.microsoft.com/office/drawing/2014/main" id="{10D27F6B-33DC-42A4-AE0F-AAF04361120D}"/>
               </a:ext>
             </a:extLst>
           </p:cNvPr>
@@ -6935,7 +9922,7 @@
           <p:cNvPr id="16" name="">
             <a:extLst xmlns:a="http://schemas.openxmlformats.org/drawingml/2006/main">
               <a:ext uri="{FF2B5EF4-FFF2-40B4-BE49-F238E27FC236}">
-                <a16:creationId xmlns:a16="http://schemas.microsoft.com/office/drawing/2014/main" id="{2BC5EC8D-8C06-4A1C-9800-03D66DC6EC09}"/>
+                <a16:creationId xmlns:a16="http://schemas.microsoft.com/office/drawing/2014/main" id="{E79DAFEB-FC2F-43A9-BEFF-9BC067E95C4C}"/>
               </a:ext>
             </a:extLst>
           </p:cNvPr>
@@ -6970,7 +9957,7 @@
           <p:cNvPr id="17" name="">
             <a:extLst xmlns:a="http://schemas.openxmlformats.org/drawingml/2006/main">
               <a:ext uri="{FF2B5EF4-FFF2-40B4-BE49-F238E27FC236}">
-                <a16:creationId xmlns:a16="http://schemas.microsoft.com/office/drawing/2014/main" id="{B70F0BED-2D9D-49B8-9117-74EF5AA3C4E7}"/>
+                <a16:creationId xmlns:a16="http://schemas.microsoft.com/office/drawing/2014/main" id="{124E8A41-40D9-4C13-AC3F-F03A7DC820A8}"/>
               </a:ext>
             </a:extLst>
           </p:cNvPr>
@@ -7034,7 +10021,7 @@
           <p:cNvPr id="18" name="">
             <a:extLst xmlns:a="http://schemas.openxmlformats.org/drawingml/2006/main">
               <a:ext uri="{FF2B5EF4-FFF2-40B4-BE49-F238E27FC236}">
-                <a16:creationId xmlns:a16="http://schemas.microsoft.com/office/drawing/2014/main" id="{34FDDE8F-8069-40BC-8403-C215A9937F43}"/>
+                <a16:creationId xmlns:a16="http://schemas.microsoft.com/office/drawing/2014/main" id="{59AA6B8D-6283-4F5E-947B-DE1AF9EE2FBF}"/>
               </a:ext>
             </a:extLst>
           </p:cNvPr>
@@ -7167,7 +10154,7 @@
           <p:cNvPr id="19" name="">
             <a:extLst xmlns:a="http://schemas.openxmlformats.org/drawingml/2006/main">
               <a:ext uri="{FF2B5EF4-FFF2-40B4-BE49-F238E27FC236}">
-                <a16:creationId xmlns:a16="http://schemas.microsoft.com/office/drawing/2014/main" id="{B7738A03-8D41-41D1-97E5-096EF189A22C}"/>
+                <a16:creationId xmlns:a16="http://schemas.microsoft.com/office/drawing/2014/main" id="{83B9112D-D510-4B3F-831E-37DCA7B8CC43}"/>
               </a:ext>
             </a:extLst>
           </p:cNvPr>
@@ -7202,7 +10189,7 @@
           <p:cNvPr id="20" name="">
             <a:extLst xmlns:a="http://schemas.openxmlformats.org/drawingml/2006/main">
               <a:ext uri="{FF2B5EF4-FFF2-40B4-BE49-F238E27FC236}">
-                <a16:creationId xmlns:a16="http://schemas.microsoft.com/office/drawing/2014/main" id="{3FA76B74-F750-4338-AB2C-F603CC50E14A}"/>
+                <a16:creationId xmlns:a16="http://schemas.microsoft.com/office/drawing/2014/main" id="{B604C66E-13D1-4A78-B24D-C84BE1164B8C}"/>
               </a:ext>
             </a:extLst>
           </p:cNvPr>
@@ -7264,7 +10251,7 @@
     </p:spTree>
     <p:extLst>
       <p:ext uri="{BB962C8B-B14F-4D97-AF65-F5344CB8AC3E}">
-        <p14:creationId xmlns:p14="http://schemas.microsoft.com/office/powerpoint/2010/main" val="936665663"/>
+        <p14:creationId xmlns:p14="http://schemas.microsoft.com/office/powerpoint/2010/main" val="977027627"/>
       </p:ext>
     </p:extLst>
   </p:cSld>
@@ -7288,7 +10275,7 @@
           <p:cNvPr id="1" name="">
             <a:extLst xmlns:a="http://schemas.openxmlformats.org/drawingml/2006/main">
               <a:ext uri="{FF2B5EF4-FFF2-40B4-BE49-F238E27FC236}">
-                <a16:creationId xmlns:a16="http://schemas.microsoft.com/office/drawing/2014/main" id="{53EBCC7C-14DC-4384-8DB6-56FCDF91B263}"/>
+                <a16:creationId xmlns:a16="http://schemas.microsoft.com/office/drawing/2014/main" id="{8225B51F-EFC0-42E3-970A-BDD387DC3C3D}"/>
               </a:ext>
             </a:extLst>
           </p:cNvPr>
@@ -7323,7 +10310,7 @@
           <p:cNvPr id="2" name="">
             <a:extLst xmlns:a="http://schemas.openxmlformats.org/drawingml/2006/main">
               <a:ext uri="{FF2B5EF4-FFF2-40B4-BE49-F238E27FC236}">
-                <a16:creationId xmlns:a16="http://schemas.microsoft.com/office/drawing/2014/main" id="{64407B75-929F-4E2E-A005-CFC10C6F3BBA}"/>
+                <a16:creationId xmlns:a16="http://schemas.microsoft.com/office/drawing/2014/main" id="{B8E390AE-908C-4C25-B548-CD01F733CCE1}"/>
               </a:ext>
             </a:extLst>
           </p:cNvPr>
@@ -7387,7 +10374,7 @@
           <p:cNvPr id="3" name="">
             <a:extLst xmlns:a="http://schemas.openxmlformats.org/drawingml/2006/main">
               <a:ext uri="{FF2B5EF4-FFF2-40B4-BE49-F238E27FC236}">
-                <a16:creationId xmlns:a16="http://schemas.microsoft.com/office/drawing/2014/main" id="{EFB3A27D-2E74-4196-9A9A-7D5FC5B2743E}"/>
+                <a16:creationId xmlns:a16="http://schemas.microsoft.com/office/drawing/2014/main" id="{21CF2784-3EDB-4E23-8241-9B35A15FBB31}"/>
               </a:ext>
             </a:extLst>
           </p:cNvPr>
@@ -7474,7 +10461,7 @@
           <p:cNvPr id="4" name="">
             <a:extLst xmlns:a="http://schemas.openxmlformats.org/drawingml/2006/main">
               <a:ext uri="{FF2B5EF4-FFF2-40B4-BE49-F238E27FC236}">
-                <a16:creationId xmlns:a16="http://schemas.microsoft.com/office/drawing/2014/main" id="{B7D4DC89-E2BB-4A30-AF8B-B49D8FA5F156}"/>
+                <a16:creationId xmlns:a16="http://schemas.microsoft.com/office/drawing/2014/main" id="{A6648E52-DA3F-4609-91AA-413AD4667F58}"/>
               </a:ext>
             </a:extLst>
           </p:cNvPr>
@@ -7507,7 +10494,7 @@
           <p:cNvPr id="5" name="">
             <a:extLst xmlns:a="http://schemas.openxmlformats.org/drawingml/2006/main">
               <a:ext uri="{FF2B5EF4-FFF2-40B4-BE49-F238E27FC236}">
-                <a16:creationId xmlns:a16="http://schemas.microsoft.com/office/drawing/2014/main" id="{F93F9CA1-30AD-443E-A5C1-FA48FCE1EBC1}"/>
+                <a16:creationId xmlns:a16="http://schemas.microsoft.com/office/drawing/2014/main" id="{99E17268-9FAE-49FD-9661-EC36EADD2A5F}"/>
               </a:ext>
             </a:extLst>
           </p:cNvPr>
@@ -7542,7 +10529,7 @@
           <p:cNvPr id="6" name="">
             <a:extLst xmlns:a="http://schemas.openxmlformats.org/drawingml/2006/main">
               <a:ext uri="{FF2B5EF4-FFF2-40B4-BE49-F238E27FC236}">
-                <a16:creationId xmlns:a16="http://schemas.microsoft.com/office/drawing/2014/main" id="{7F21B80F-AE00-465A-BA13-477DCD92B967}"/>
+                <a16:creationId xmlns:a16="http://schemas.microsoft.com/office/drawing/2014/main" id="{A3AD3495-BAAF-474C-A557-83827BFAE242}"/>
               </a:ext>
             </a:extLst>
           </p:cNvPr>
@@ -7606,7 +10593,7 @@
           <p:cNvPr id="7" name="">
             <a:extLst xmlns:a="http://schemas.openxmlformats.org/drawingml/2006/main">
               <a:ext uri="{FF2B5EF4-FFF2-40B4-BE49-F238E27FC236}">
-                <a16:creationId xmlns:a16="http://schemas.microsoft.com/office/drawing/2014/main" id="{8A219AFD-FF19-420D-896B-275C1423CA8B}"/>
+                <a16:creationId xmlns:a16="http://schemas.microsoft.com/office/drawing/2014/main" id="{B89CE5A9-4F63-4288-A3BA-1FF9EDE6674E}"/>
               </a:ext>
             </a:extLst>
           </p:cNvPr>
@@ -7670,7 +10657,7 @@
           <p:cNvPr id="8" name="">
             <a:extLst xmlns:a="http://schemas.openxmlformats.org/drawingml/2006/main">
               <a:ext uri="{FF2B5EF4-FFF2-40B4-BE49-F238E27FC236}">
-                <a16:creationId xmlns:a16="http://schemas.microsoft.com/office/drawing/2014/main" id="{7FD17D13-AE69-4F14-AE56-5B1E095ABBD1}"/>
+                <a16:creationId xmlns:a16="http://schemas.microsoft.com/office/drawing/2014/main" id="{7BF26673-CEC0-4249-ADE5-7FAC650CF49C}"/>
               </a:ext>
             </a:extLst>
           </p:cNvPr>
@@ -7705,7 +10692,7 @@
           <p:cNvPr id="9" name="">
             <a:extLst xmlns:a="http://schemas.openxmlformats.org/drawingml/2006/main">
               <a:ext uri="{FF2B5EF4-FFF2-40B4-BE49-F238E27FC236}">
-                <a16:creationId xmlns:a16="http://schemas.microsoft.com/office/drawing/2014/main" id="{5F971793-BF15-47FA-9D09-D8A28A363BB1}"/>
+                <a16:creationId xmlns:a16="http://schemas.microsoft.com/office/drawing/2014/main" id="{4CACFFF0-497E-45FF-BD81-152296BC2DBD}"/>
               </a:ext>
             </a:extLst>
           </p:cNvPr>
@@ -7769,7 +10756,7 @@
           <p:cNvPr id="10" name="">
             <a:extLst xmlns:a="http://schemas.openxmlformats.org/drawingml/2006/main">
               <a:ext uri="{FF2B5EF4-FFF2-40B4-BE49-F238E27FC236}">
-                <a16:creationId xmlns:a16="http://schemas.microsoft.com/office/drawing/2014/main" id="{A53F4BF2-F653-44C8-A13C-42B82DE9E6A5}"/>
+                <a16:creationId xmlns:a16="http://schemas.microsoft.com/office/drawing/2014/main" id="{5AD59022-7F0A-4049-8087-703CE3CA4889}"/>
               </a:ext>
             </a:extLst>
           </p:cNvPr>
@@ -7833,7 +10820,7 @@
           <p:cNvPr id="11" name="">
             <a:extLst xmlns:a="http://schemas.openxmlformats.org/drawingml/2006/main">
               <a:ext uri="{FF2B5EF4-FFF2-40B4-BE49-F238E27FC236}">
-                <a16:creationId xmlns:a16="http://schemas.microsoft.com/office/drawing/2014/main" id="{3EA690A1-B9C6-4723-A5B2-4318D7A2E0BC}"/>
+                <a16:creationId xmlns:a16="http://schemas.microsoft.com/office/drawing/2014/main" id="{FBEBEAC3-4925-42B3-9A32-7712036E60DA}"/>
               </a:ext>
             </a:extLst>
           </p:cNvPr>
@@ -7868,7 +10855,7 @@
           <p:cNvPr id="12" name="">
             <a:extLst xmlns:a="http://schemas.openxmlformats.org/drawingml/2006/main">
               <a:ext uri="{FF2B5EF4-FFF2-40B4-BE49-F238E27FC236}">
-                <a16:creationId xmlns:a16="http://schemas.microsoft.com/office/drawing/2014/main" id="{56F9133B-BCD2-4329-A92E-69C6A8D6E392}"/>
+                <a16:creationId xmlns:a16="http://schemas.microsoft.com/office/drawing/2014/main" id="{E4F7C52A-4C1E-43A3-9D3A-A30AFC0B9603}"/>
               </a:ext>
             </a:extLst>
           </p:cNvPr>
@@ -7932,7 +10919,7 @@
           <p:cNvPr id="13" name="">
             <a:extLst xmlns:a="http://schemas.openxmlformats.org/drawingml/2006/main">
               <a:ext uri="{FF2B5EF4-FFF2-40B4-BE49-F238E27FC236}">
-                <a16:creationId xmlns:a16="http://schemas.microsoft.com/office/drawing/2014/main" id="{434A7A6B-B532-4644-851E-B9BD1F0C9550}"/>
+                <a16:creationId xmlns:a16="http://schemas.microsoft.com/office/drawing/2014/main" id="{2D939577-5ED4-49AB-AFAE-40ED9958DF8E}"/>
               </a:ext>
             </a:extLst>
           </p:cNvPr>
@@ -7996,7 +10983,7 @@
           <p:cNvPr id="14" name="">
             <a:extLst xmlns:a="http://schemas.openxmlformats.org/drawingml/2006/main">
               <a:ext uri="{FF2B5EF4-FFF2-40B4-BE49-F238E27FC236}">
-                <a16:creationId xmlns:a16="http://schemas.microsoft.com/office/drawing/2014/main" id="{10883A74-23DC-47B2-AD4C-D57DC3F19E4A}"/>
+                <a16:creationId xmlns:a16="http://schemas.microsoft.com/office/drawing/2014/main" id="{50EADDB2-2BF1-41D0-AE2B-2D4C457F14F3}"/>
               </a:ext>
             </a:extLst>
           </p:cNvPr>
@@ -8031,7 +11018,7 @@
           <p:cNvPr id="15" name="">
             <a:extLst xmlns:a="http://schemas.openxmlformats.org/drawingml/2006/main">
               <a:ext uri="{FF2B5EF4-FFF2-40B4-BE49-F238E27FC236}">
-                <a16:creationId xmlns:a16="http://schemas.microsoft.com/office/drawing/2014/main" id="{554AD223-93AD-46C9-98A2-520B16E081D1}"/>
+                <a16:creationId xmlns:a16="http://schemas.microsoft.com/office/drawing/2014/main" id="{C5F8588D-B40D-46E1-8672-E98ADB537693}"/>
               </a:ext>
             </a:extLst>
           </p:cNvPr>
@@ -8095,7 +11082,7 @@
           <p:cNvPr id="16" name="">
             <a:extLst xmlns:a="http://schemas.openxmlformats.org/drawingml/2006/main">
               <a:ext uri="{FF2B5EF4-FFF2-40B4-BE49-F238E27FC236}">
-                <a16:creationId xmlns:a16="http://schemas.microsoft.com/office/drawing/2014/main" id="{26EC7192-FB08-4C71-AC0B-DF266AAEB61D}"/>
+                <a16:creationId xmlns:a16="http://schemas.microsoft.com/office/drawing/2014/main" id="{FC0983FE-39BF-44F7-9EE2-FC2CF8417BA4}"/>
               </a:ext>
             </a:extLst>
           </p:cNvPr>
@@ -8159,7 +11146,7 @@
           <p:cNvPr id="17" name="">
             <a:extLst xmlns:a="http://schemas.openxmlformats.org/drawingml/2006/main">
               <a:ext uri="{FF2B5EF4-FFF2-40B4-BE49-F238E27FC236}">
-                <a16:creationId xmlns:a16="http://schemas.microsoft.com/office/drawing/2014/main" id="{7AB18FB6-6A9C-4AFA-957E-B028E80086CA}"/>
+                <a16:creationId xmlns:a16="http://schemas.microsoft.com/office/drawing/2014/main" id="{4862CBB4-9A6C-403D-A658-335C5AFB1B23}"/>
               </a:ext>
             </a:extLst>
           </p:cNvPr>
@@ -8194,7 +11181,7 @@
           <p:cNvPr id="18" name="">
             <a:extLst xmlns:a="http://schemas.openxmlformats.org/drawingml/2006/main">
               <a:ext uri="{FF2B5EF4-FFF2-40B4-BE49-F238E27FC236}">
-                <a16:creationId xmlns:a16="http://schemas.microsoft.com/office/drawing/2014/main" id="{15282E74-2385-464C-9702-57FE0884713A}"/>
+                <a16:creationId xmlns:a16="http://schemas.microsoft.com/office/drawing/2014/main" id="{4CD8B36B-DD49-41BD-8131-9CE8AD594532}"/>
               </a:ext>
             </a:extLst>
           </p:cNvPr>
@@ -8258,7 +11245,7 @@
           <p:cNvPr id="19" name="">
             <a:extLst xmlns:a="http://schemas.openxmlformats.org/drawingml/2006/main">
               <a:ext uri="{FF2B5EF4-FFF2-40B4-BE49-F238E27FC236}">
-                <a16:creationId xmlns:a16="http://schemas.microsoft.com/office/drawing/2014/main" id="{DC20F71D-8B6F-45D4-BED0-9EE2165B8BDF}"/>
+                <a16:creationId xmlns:a16="http://schemas.microsoft.com/office/drawing/2014/main" id="{741FE467-8E47-4C68-BD43-AB9C40663188}"/>
               </a:ext>
             </a:extLst>
           </p:cNvPr>
@@ -8322,7 +11309,7 @@
           <p:cNvPr id="20" name="">
             <a:extLst xmlns:a="http://schemas.openxmlformats.org/drawingml/2006/main">
               <a:ext uri="{FF2B5EF4-FFF2-40B4-BE49-F238E27FC236}">
-                <a16:creationId xmlns:a16="http://schemas.microsoft.com/office/drawing/2014/main" id="{AD424058-65CB-47DD-A44E-600C1BE89DA0}"/>
+                <a16:creationId xmlns:a16="http://schemas.microsoft.com/office/drawing/2014/main" id="{88BE7DDB-5D49-4930-8CEB-2D165F0CBDFA}"/>
               </a:ext>
             </a:extLst>
           </p:cNvPr>
@@ -8357,7 +11344,7 @@
           <p:cNvPr id="21" name="">
             <a:extLst xmlns:a="http://schemas.openxmlformats.org/drawingml/2006/main">
               <a:ext uri="{FF2B5EF4-FFF2-40B4-BE49-F238E27FC236}">
-                <a16:creationId xmlns:a16="http://schemas.microsoft.com/office/drawing/2014/main" id="{754D8FA6-C8E2-4387-B70A-CAC47E8BFBCD}"/>
+                <a16:creationId xmlns:a16="http://schemas.microsoft.com/office/drawing/2014/main" id="{4E4FDEBA-5D15-41F8-8C06-E033A5DA7804}"/>
               </a:ext>
             </a:extLst>
           </p:cNvPr>
@@ -8421,7 +11408,7 @@
           <p:cNvPr id="22" name="">
             <a:extLst xmlns:a="http://schemas.openxmlformats.org/drawingml/2006/main">
               <a:ext uri="{FF2B5EF4-FFF2-40B4-BE49-F238E27FC236}">
-                <a16:creationId xmlns:a16="http://schemas.microsoft.com/office/drawing/2014/main" id="{6B4A7B19-7976-4C03-BC57-3100B34FAEB9}"/>
+                <a16:creationId xmlns:a16="http://schemas.microsoft.com/office/drawing/2014/main" id="{2F62B18B-4C48-4647-8344-455A972B8D26}"/>
               </a:ext>
             </a:extLst>
           </p:cNvPr>
@@ -8529,7 +11516,7 @@
     </p:spTree>
     <p:extLst>
       <p:ext uri="{BB962C8B-B14F-4D97-AF65-F5344CB8AC3E}">
-        <p14:creationId xmlns:p14="http://schemas.microsoft.com/office/powerpoint/2010/main" val="308739182"/>
+        <p14:creationId xmlns:p14="http://schemas.microsoft.com/office/powerpoint/2010/main" val="1130887440"/>
       </p:ext>
     </p:extLst>
   </p:cSld>
@@ -8553,7 +11540,7 @@
           <p:cNvPr id="1" name="">
             <a:extLst xmlns:a="http://schemas.openxmlformats.org/drawingml/2006/main">
               <a:ext uri="{FF2B5EF4-FFF2-40B4-BE49-F238E27FC236}">
-                <a16:creationId xmlns:a16="http://schemas.microsoft.com/office/drawing/2014/main" id="{02CE36FE-A544-4B75-B298-78D3C045104B}"/>
+                <a16:creationId xmlns:a16="http://schemas.microsoft.com/office/drawing/2014/main" id="{46E71A5B-9F4E-4A84-B82D-193F980E54BB}"/>
               </a:ext>
             </a:extLst>
           </p:cNvPr>
@@ -8588,7 +11575,7 @@
           <p:cNvPr id="2" name="">
             <a:extLst xmlns:a="http://schemas.openxmlformats.org/drawingml/2006/main">
               <a:ext uri="{FF2B5EF4-FFF2-40B4-BE49-F238E27FC236}">
-                <a16:creationId xmlns:a16="http://schemas.microsoft.com/office/drawing/2014/main" id="{635AD2BF-7849-4570-B3BC-B2DA33D2B8B4}"/>
+                <a16:creationId xmlns:a16="http://schemas.microsoft.com/office/drawing/2014/main" id="{8FF48BD0-F18A-465B-BE41-9BC49D2E760E}"/>
               </a:ext>
             </a:extLst>
           </p:cNvPr>
@@ -8623,7 +11610,7 @@
           <p:cNvPr id="3" name="">
             <a:extLst xmlns:a="http://schemas.openxmlformats.org/drawingml/2006/main">
               <a:ext uri="{FF2B5EF4-FFF2-40B4-BE49-F238E27FC236}">
-                <a16:creationId xmlns:a16="http://schemas.microsoft.com/office/drawing/2014/main" id="{CC21C77D-BD23-4E43-94BD-E6452E4039A6}"/>
+                <a16:creationId xmlns:a16="http://schemas.microsoft.com/office/drawing/2014/main" id="{9F6E2A18-DB21-4237-BA97-B30FD1C3561B}"/>
               </a:ext>
             </a:extLst>
           </p:cNvPr>
@@ -8687,7 +11674,7 @@
           <p:cNvPr id="4" name="">
             <a:extLst xmlns:a="http://schemas.openxmlformats.org/drawingml/2006/main">
               <a:ext uri="{FF2B5EF4-FFF2-40B4-BE49-F238E27FC236}">
-                <a16:creationId xmlns:a16="http://schemas.microsoft.com/office/drawing/2014/main" id="{DF4A5D85-5209-4EE4-B6A9-F3000CF66E28}"/>
+                <a16:creationId xmlns:a16="http://schemas.microsoft.com/office/drawing/2014/main" id="{86DAA07A-26D4-4F11-BE6C-4D8C00A99CFA}"/>
               </a:ext>
             </a:extLst>
           </p:cNvPr>
@@ -8774,7 +11761,7 @@
           <p:cNvPr id="5" name="">
             <a:extLst xmlns:a="http://schemas.openxmlformats.org/drawingml/2006/main">
               <a:ext uri="{FF2B5EF4-FFF2-40B4-BE49-F238E27FC236}">
-                <a16:creationId xmlns:a16="http://schemas.microsoft.com/office/drawing/2014/main" id="{11C15989-393C-49A0-A6A8-314097B2B0AD}"/>
+                <a16:creationId xmlns:a16="http://schemas.microsoft.com/office/drawing/2014/main" id="{902089DB-0ED0-486A-BDAB-4EFBA017BFF9}"/>
               </a:ext>
             </a:extLst>
           </p:cNvPr>
@@ -8838,7 +11825,7 @@
           <p:cNvPr id="6" name="">
             <a:extLst xmlns:a="http://schemas.openxmlformats.org/drawingml/2006/main">
               <a:ext uri="{FF2B5EF4-FFF2-40B4-BE49-F238E27FC236}">
-                <a16:creationId xmlns:a16="http://schemas.microsoft.com/office/drawing/2014/main" id="{126A79AB-A8C0-4D02-BDDB-E219F6D34E8A}"/>
+                <a16:creationId xmlns:a16="http://schemas.microsoft.com/office/drawing/2014/main" id="{0C8F219F-ADE5-4A7A-BA90-041C61F00881}"/>
               </a:ext>
             </a:extLst>
           </p:cNvPr>
@@ -8871,7 +11858,7 @@
           <p:cNvPr id="7" name="">
             <a:extLst xmlns:a="http://schemas.openxmlformats.org/drawingml/2006/main">
               <a:ext uri="{FF2B5EF4-FFF2-40B4-BE49-F238E27FC236}">
-                <a16:creationId xmlns:a16="http://schemas.microsoft.com/office/drawing/2014/main" id="{B8EA3B1D-3520-4FA9-BEF0-249D9857164A}"/>
+                <a16:creationId xmlns:a16="http://schemas.microsoft.com/office/drawing/2014/main" id="{3EB819B2-AB29-4059-8DCD-E8AB25F5535F}"/>
               </a:ext>
             </a:extLst>
           </p:cNvPr>
@@ -8935,7 +11922,7 @@
           <p:cNvPr id="8" name="">
             <a:extLst xmlns:a="http://schemas.openxmlformats.org/drawingml/2006/main">
               <a:ext uri="{FF2B5EF4-FFF2-40B4-BE49-F238E27FC236}">
-                <a16:creationId xmlns:a16="http://schemas.microsoft.com/office/drawing/2014/main" id="{51CB02B3-E2B6-4631-990C-E66AAF45C552}"/>
+                <a16:creationId xmlns:a16="http://schemas.microsoft.com/office/drawing/2014/main" id="{88DF1FEF-C9A9-4B33-8B1A-8AC13C3EE9B0}"/>
               </a:ext>
             </a:extLst>
           </p:cNvPr>
@@ -8968,7 +11955,7 @@
           <p:cNvPr id="9" name="">
             <a:extLst xmlns:a="http://schemas.openxmlformats.org/drawingml/2006/main">
               <a:ext uri="{FF2B5EF4-FFF2-40B4-BE49-F238E27FC236}">
-                <a16:creationId xmlns:a16="http://schemas.microsoft.com/office/drawing/2014/main" id="{29AFC240-025B-431F-A688-D8A0F043D2F2}"/>
+                <a16:creationId xmlns:a16="http://schemas.microsoft.com/office/drawing/2014/main" id="{68185240-CC13-4FB9-A93B-73A041F2A9AE}"/>
               </a:ext>
             </a:extLst>
           </p:cNvPr>
@@ -9032,7 +12019,7 @@
           <p:cNvPr id="10" name="">
             <a:extLst xmlns:a="http://schemas.openxmlformats.org/drawingml/2006/main">
               <a:ext uri="{FF2B5EF4-FFF2-40B4-BE49-F238E27FC236}">
-                <a16:creationId xmlns:a16="http://schemas.microsoft.com/office/drawing/2014/main" id="{510E5401-4762-4F64-A73E-EE5F417D47B5}"/>
+                <a16:creationId xmlns:a16="http://schemas.microsoft.com/office/drawing/2014/main" id="{AAB1CA50-226E-4DCB-BEFF-C53CFF82BCAC}"/>
               </a:ext>
             </a:extLst>
           </p:cNvPr>
@@ -9065,7 +12052,7 @@
           <p:cNvPr id="11" name="">
             <a:extLst xmlns:a="http://schemas.openxmlformats.org/drawingml/2006/main">
               <a:ext uri="{FF2B5EF4-FFF2-40B4-BE49-F238E27FC236}">
-                <a16:creationId xmlns:a16="http://schemas.microsoft.com/office/drawing/2014/main" id="{A2E32112-6C46-4851-9E10-A6803959F353}"/>
+                <a16:creationId xmlns:a16="http://schemas.microsoft.com/office/drawing/2014/main" id="{649AAA2C-30DD-4D72-A0CC-134D42FCD912}"/>
               </a:ext>
             </a:extLst>
           </p:cNvPr>
@@ -9129,7 +12116,7 @@
           <p:cNvPr id="12" name="">
             <a:extLst xmlns:a="http://schemas.openxmlformats.org/drawingml/2006/main">
               <a:ext uri="{FF2B5EF4-FFF2-40B4-BE49-F238E27FC236}">
-                <a16:creationId xmlns:a16="http://schemas.microsoft.com/office/drawing/2014/main" id="{73842775-8060-48C9-B5EE-C0A693952812}"/>
+                <a16:creationId xmlns:a16="http://schemas.microsoft.com/office/drawing/2014/main" id="{3283CBC4-92ED-44DA-AA7D-0B07A9B67FF8}"/>
               </a:ext>
             </a:extLst>
           </p:cNvPr>
@@ -9162,7 +12149,7 @@
           <p:cNvPr id="13" name="">
             <a:extLst xmlns:a="http://schemas.openxmlformats.org/drawingml/2006/main">
               <a:ext uri="{FF2B5EF4-FFF2-40B4-BE49-F238E27FC236}">
-                <a16:creationId xmlns:a16="http://schemas.microsoft.com/office/drawing/2014/main" id="{3DF99602-CB58-4F9F-9E1C-F5BD4AA666AC}"/>
+                <a16:creationId xmlns:a16="http://schemas.microsoft.com/office/drawing/2014/main" id="{023F19BE-CF1B-4B13-8568-BDE4C3AAB615}"/>
               </a:ext>
             </a:extLst>
           </p:cNvPr>
@@ -9226,7 +12213,7 @@
           <p:cNvPr id="14" name="">
             <a:extLst xmlns:a="http://schemas.openxmlformats.org/drawingml/2006/main">
               <a:ext uri="{FF2B5EF4-FFF2-40B4-BE49-F238E27FC236}">
-                <a16:creationId xmlns:a16="http://schemas.microsoft.com/office/drawing/2014/main" id="{24954971-C953-449E-95C3-91C110418D9F}"/>
+                <a16:creationId xmlns:a16="http://schemas.microsoft.com/office/drawing/2014/main" id="{C036AC8E-7219-45B1-BB4A-ED7DB2A9E949}"/>
               </a:ext>
             </a:extLst>
           </p:cNvPr>
@@ -9259,7 +12246,7 @@
           <p:cNvPr id="15" name="">
             <a:extLst xmlns:a="http://schemas.openxmlformats.org/drawingml/2006/main">
               <a:ext uri="{FF2B5EF4-FFF2-40B4-BE49-F238E27FC236}">
-                <a16:creationId xmlns:a16="http://schemas.microsoft.com/office/drawing/2014/main" id="{08BEBEF1-3F59-421A-9D94-26AE4F1E426C}"/>
+                <a16:creationId xmlns:a16="http://schemas.microsoft.com/office/drawing/2014/main" id="{797CBB0F-EE88-4202-A7E8-A7C66112715D}"/>
               </a:ext>
             </a:extLst>
           </p:cNvPr>
@@ -9323,7 +12310,7 @@
           <p:cNvPr id="16" name="">
             <a:extLst xmlns:a="http://schemas.openxmlformats.org/drawingml/2006/main">
               <a:ext uri="{FF2B5EF4-FFF2-40B4-BE49-F238E27FC236}">
-                <a16:creationId xmlns:a16="http://schemas.microsoft.com/office/drawing/2014/main" id="{7EB0C7C2-58FD-4508-A6EC-5A3128D484FB}"/>
+                <a16:creationId xmlns:a16="http://schemas.microsoft.com/office/drawing/2014/main" id="{B1630A82-B063-46B5-8B0F-75D51377551B}"/>
               </a:ext>
             </a:extLst>
           </p:cNvPr>
@@ -9356,7 +12343,7 @@
           <p:cNvPr id="17" name="">
             <a:extLst xmlns:a="http://schemas.openxmlformats.org/drawingml/2006/main">
               <a:ext uri="{FF2B5EF4-FFF2-40B4-BE49-F238E27FC236}">
-                <a16:creationId xmlns:a16="http://schemas.microsoft.com/office/drawing/2014/main" id="{E2821F69-3457-48A0-A972-5D7331EF99AD}"/>
+                <a16:creationId xmlns:a16="http://schemas.microsoft.com/office/drawing/2014/main" id="{8F3BB246-FB04-41B8-A716-94E2B42C6E02}"/>
               </a:ext>
             </a:extLst>
           </p:cNvPr>
@@ -9420,7 +12407,7 @@
           <p:cNvPr id="18" name="">
             <a:extLst xmlns:a="http://schemas.openxmlformats.org/drawingml/2006/main">
               <a:ext uri="{FF2B5EF4-FFF2-40B4-BE49-F238E27FC236}">
-                <a16:creationId xmlns:a16="http://schemas.microsoft.com/office/drawing/2014/main" id="{CF294FFC-0C04-4E0F-A8E8-2957FF7ABA8A}"/>
+                <a16:creationId xmlns:a16="http://schemas.microsoft.com/office/drawing/2014/main" id="{24061779-E815-4923-9610-05587DCB7B85}"/>
               </a:ext>
             </a:extLst>
           </p:cNvPr>
@@ -9453,7 +12440,7 @@
           <p:cNvPr id="19" name="">
             <a:extLst xmlns:a="http://schemas.openxmlformats.org/drawingml/2006/main">
               <a:ext uri="{FF2B5EF4-FFF2-40B4-BE49-F238E27FC236}">
-                <a16:creationId xmlns:a16="http://schemas.microsoft.com/office/drawing/2014/main" id="{95957F64-291A-46ED-9ADB-D93CA809A40A}"/>
+                <a16:creationId xmlns:a16="http://schemas.microsoft.com/office/drawing/2014/main" id="{7F45C7BB-C6AE-4780-997F-3D293A065592}"/>
               </a:ext>
             </a:extLst>
           </p:cNvPr>
@@ -9517,7 +12504,7 @@
           <p:cNvPr id="20" name="">
             <a:extLst xmlns:a="http://schemas.openxmlformats.org/drawingml/2006/main">
               <a:ext uri="{FF2B5EF4-FFF2-40B4-BE49-F238E27FC236}">
-                <a16:creationId xmlns:a16="http://schemas.microsoft.com/office/drawing/2014/main" id="{DED4D9DA-1EB2-44CB-9AD4-DED2B590B140}"/>
+                <a16:creationId xmlns:a16="http://schemas.microsoft.com/office/drawing/2014/main" id="{71BF33FA-A191-41D2-833F-2189C6E43E8B}"/>
               </a:ext>
             </a:extLst>
           </p:cNvPr>
@@ -9550,7 +12537,7 @@
           <p:cNvPr id="21" name="">
             <a:extLst xmlns:a="http://schemas.openxmlformats.org/drawingml/2006/main">
               <a:ext uri="{FF2B5EF4-FFF2-40B4-BE49-F238E27FC236}">
-                <a16:creationId xmlns:a16="http://schemas.microsoft.com/office/drawing/2014/main" id="{35E6F4A7-E3BF-461C-B927-CEDC16C5FD21}"/>
+                <a16:creationId xmlns:a16="http://schemas.microsoft.com/office/drawing/2014/main" id="{B32F8193-03BA-42B5-BB10-5EFEE8C2DB93}"/>
               </a:ext>
             </a:extLst>
           </p:cNvPr>
@@ -9614,7 +12601,7 @@
           <p:cNvPr id="22" name="">
             <a:extLst xmlns:a="http://schemas.openxmlformats.org/drawingml/2006/main">
               <a:ext uri="{FF2B5EF4-FFF2-40B4-BE49-F238E27FC236}">
-                <a16:creationId xmlns:a16="http://schemas.microsoft.com/office/drawing/2014/main" id="{D098E43F-86E9-481A-BD67-E690BDF8B4D7}"/>
+                <a16:creationId xmlns:a16="http://schemas.microsoft.com/office/drawing/2014/main" id="{2C124D7B-E236-4C76-88B2-7C5239BC0977}"/>
               </a:ext>
             </a:extLst>
           </p:cNvPr>
@@ -9647,7 +12634,7 @@
           <p:cNvPr id="23" name="">
             <a:extLst xmlns:a="http://schemas.openxmlformats.org/drawingml/2006/main">
               <a:ext uri="{FF2B5EF4-FFF2-40B4-BE49-F238E27FC236}">
-                <a16:creationId xmlns:a16="http://schemas.microsoft.com/office/drawing/2014/main" id="{F1B6065A-3BDA-4B05-9B68-476F76058752}"/>
+                <a16:creationId xmlns:a16="http://schemas.microsoft.com/office/drawing/2014/main" id="{AAAECE25-82C4-4BC6-9A1E-4BBAFE6BB111}"/>
               </a:ext>
             </a:extLst>
           </p:cNvPr>
@@ -9711,7 +12698,7 @@
           <p:cNvPr id="24" name="">
             <a:extLst xmlns:a="http://schemas.openxmlformats.org/drawingml/2006/main">
               <a:ext uri="{FF2B5EF4-FFF2-40B4-BE49-F238E27FC236}">
-                <a16:creationId xmlns:a16="http://schemas.microsoft.com/office/drawing/2014/main" id="{1719C9C1-403B-41F2-8A33-474CCA1480DB}"/>
+                <a16:creationId xmlns:a16="http://schemas.microsoft.com/office/drawing/2014/main" id="{7B683031-EE63-4F22-B9F4-B597EBEF6590}"/>
               </a:ext>
             </a:extLst>
           </p:cNvPr>
@@ -9744,7 +12731,7 @@
           <p:cNvPr id="25" name="">
             <a:extLst xmlns:a="http://schemas.openxmlformats.org/drawingml/2006/main">
               <a:ext uri="{FF2B5EF4-FFF2-40B4-BE49-F238E27FC236}">
-                <a16:creationId xmlns:a16="http://schemas.microsoft.com/office/drawing/2014/main" id="{5151FB86-6BEB-482D-B59F-335FF47B1A7E}"/>
+                <a16:creationId xmlns:a16="http://schemas.microsoft.com/office/drawing/2014/main" id="{68B7456E-9DCC-4294-8A01-DBA81282073D}"/>
               </a:ext>
             </a:extLst>
           </p:cNvPr>
@@ -9808,7 +12795,7 @@
           <p:cNvPr id="26" name="">
             <a:extLst xmlns:a="http://schemas.openxmlformats.org/drawingml/2006/main">
               <a:ext uri="{FF2B5EF4-FFF2-40B4-BE49-F238E27FC236}">
-                <a16:creationId xmlns:a16="http://schemas.microsoft.com/office/drawing/2014/main" id="{9072131F-E15A-45F4-B153-85ECA8A83702}"/>
+                <a16:creationId xmlns:a16="http://schemas.microsoft.com/office/drawing/2014/main" id="{1592CB16-2D5C-4C2F-BA6C-5DABE4EB13DD}"/>
               </a:ext>
             </a:extLst>
           </p:cNvPr>
@@ -9841,7 +12828,7 @@
           <p:cNvPr id="27" name="">
             <a:extLst xmlns:a="http://schemas.openxmlformats.org/drawingml/2006/main">
               <a:ext uri="{FF2B5EF4-FFF2-40B4-BE49-F238E27FC236}">
-                <a16:creationId xmlns:a16="http://schemas.microsoft.com/office/drawing/2014/main" id="{16AA6974-DB4F-4CDC-8005-B2493B7BF5E5}"/>
+                <a16:creationId xmlns:a16="http://schemas.microsoft.com/office/drawing/2014/main" id="{5A4E4182-2251-4824-A88D-59B00F608B9F}"/>
               </a:ext>
             </a:extLst>
           </p:cNvPr>
@@ -9905,7 +12892,7 @@
           <p:cNvPr id="28" name="">
             <a:extLst xmlns:a="http://schemas.openxmlformats.org/drawingml/2006/main">
               <a:ext uri="{FF2B5EF4-FFF2-40B4-BE49-F238E27FC236}">
-                <a16:creationId xmlns:a16="http://schemas.microsoft.com/office/drawing/2014/main" id="{35623655-1C9C-4B7D-BE7B-6D3A3BD3AEED}"/>
+                <a16:creationId xmlns:a16="http://schemas.microsoft.com/office/drawing/2014/main" id="{2D908FC5-D171-4304-9010-13855566B3EC}"/>
               </a:ext>
             </a:extLst>
           </p:cNvPr>
@@ -9938,7 +12925,7 @@
           <p:cNvPr id="29" name="">
             <a:extLst xmlns:a="http://schemas.openxmlformats.org/drawingml/2006/main">
               <a:ext uri="{FF2B5EF4-FFF2-40B4-BE49-F238E27FC236}">
-                <a16:creationId xmlns:a16="http://schemas.microsoft.com/office/drawing/2014/main" id="{EBD48591-C1D9-4859-BE32-722109B0DA53}"/>
+                <a16:creationId xmlns:a16="http://schemas.microsoft.com/office/drawing/2014/main" id="{C73DA729-355C-408A-B470-94336B6A3F5F}"/>
               </a:ext>
             </a:extLst>
           </p:cNvPr>
@@ -10002,7 +12989,7 @@
           <p:cNvPr id="30" name="">
             <a:extLst xmlns:a="http://schemas.openxmlformats.org/drawingml/2006/main">
               <a:ext uri="{FF2B5EF4-FFF2-40B4-BE49-F238E27FC236}">
-                <a16:creationId xmlns:a16="http://schemas.microsoft.com/office/drawing/2014/main" id="{A2D8EFAF-1763-4D9A-98AC-D9200D872915}"/>
+                <a16:creationId xmlns:a16="http://schemas.microsoft.com/office/drawing/2014/main" id="{C723F939-3B5A-4BD5-88DA-3FCDC54917D1}"/>
               </a:ext>
             </a:extLst>
           </p:cNvPr>
@@ -10035,7 +13022,7 @@
           <p:cNvPr id="31" name="">
             <a:extLst xmlns:a="http://schemas.openxmlformats.org/drawingml/2006/main">
               <a:ext uri="{FF2B5EF4-FFF2-40B4-BE49-F238E27FC236}">
-                <a16:creationId xmlns:a16="http://schemas.microsoft.com/office/drawing/2014/main" id="{924BDEBE-CC85-4363-A28C-9C4ADCDA7E8E}"/>
+                <a16:creationId xmlns:a16="http://schemas.microsoft.com/office/drawing/2014/main" id="{1D4504D2-A58B-477A-9BB6-B67CE02C56A4}"/>
               </a:ext>
             </a:extLst>
           </p:cNvPr>
@@ -10099,7 +13086,7 @@
           <p:cNvPr id="32" name="">
             <a:extLst xmlns:a="http://schemas.openxmlformats.org/drawingml/2006/main">
               <a:ext uri="{FF2B5EF4-FFF2-40B4-BE49-F238E27FC236}">
-                <a16:creationId xmlns:a16="http://schemas.microsoft.com/office/drawing/2014/main" id="{D57C2241-7D4D-4DC0-BC5F-B5AB810D77D5}"/>
+                <a16:creationId xmlns:a16="http://schemas.microsoft.com/office/drawing/2014/main" id="{D7F09248-0166-40EB-9C9A-4CF7A17B3A85}"/>
               </a:ext>
             </a:extLst>
           </p:cNvPr>
@@ -10132,7 +13119,7 @@
           <p:cNvPr id="33" name="">
             <a:extLst xmlns:a="http://schemas.openxmlformats.org/drawingml/2006/main">
               <a:ext uri="{FF2B5EF4-FFF2-40B4-BE49-F238E27FC236}">
-                <a16:creationId xmlns:a16="http://schemas.microsoft.com/office/drawing/2014/main" id="{04E4C040-3FC2-48C3-862E-68455FEF8395}"/>
+                <a16:creationId xmlns:a16="http://schemas.microsoft.com/office/drawing/2014/main" id="{DAF3B888-510E-428E-A519-1D99DE46E5B6}"/>
               </a:ext>
             </a:extLst>
           </p:cNvPr>
@@ -10196,7 +13183,7 @@
           <p:cNvPr id="34" name="">
             <a:extLst xmlns:a="http://schemas.openxmlformats.org/drawingml/2006/main">
               <a:ext uri="{FF2B5EF4-FFF2-40B4-BE49-F238E27FC236}">
-                <a16:creationId xmlns:a16="http://schemas.microsoft.com/office/drawing/2014/main" id="{6389D3E3-7DCB-4918-B8ED-5D95A1D8CB0A}"/>
+                <a16:creationId xmlns:a16="http://schemas.microsoft.com/office/drawing/2014/main" id="{07ED1E92-E93C-4C9F-84FC-E6A1198E4AEC}"/>
               </a:ext>
             </a:extLst>
           </p:cNvPr>
@@ -10229,7 +13216,7 @@
           <p:cNvPr id="35" name="">
             <a:extLst xmlns:a="http://schemas.openxmlformats.org/drawingml/2006/main">
               <a:ext uri="{FF2B5EF4-FFF2-40B4-BE49-F238E27FC236}">
-                <a16:creationId xmlns:a16="http://schemas.microsoft.com/office/drawing/2014/main" id="{A52C0F00-D77E-4147-8D71-D23D0F287588}"/>
+                <a16:creationId xmlns:a16="http://schemas.microsoft.com/office/drawing/2014/main" id="{E8D6F7CB-8382-4475-AF3F-7EF349648B8D}"/>
               </a:ext>
             </a:extLst>
           </p:cNvPr>
@@ -10293,7 +13280,7 @@
           <p:cNvPr id="36" name="">
             <a:extLst xmlns:a="http://schemas.openxmlformats.org/drawingml/2006/main">
               <a:ext uri="{FF2B5EF4-FFF2-40B4-BE49-F238E27FC236}">
-                <a16:creationId xmlns:a16="http://schemas.microsoft.com/office/drawing/2014/main" id="{16734E50-82AD-48FF-8556-B0E753077B06}"/>
+                <a16:creationId xmlns:a16="http://schemas.microsoft.com/office/drawing/2014/main" id="{51C29474-4E03-46B4-A891-F6B577594ED6}"/>
               </a:ext>
             </a:extLst>
           </p:cNvPr>
@@ -10326,7 +13313,7 @@
           <p:cNvPr id="37" name="">
             <a:extLst xmlns:a="http://schemas.openxmlformats.org/drawingml/2006/main">
               <a:ext uri="{FF2B5EF4-FFF2-40B4-BE49-F238E27FC236}">
-                <a16:creationId xmlns:a16="http://schemas.microsoft.com/office/drawing/2014/main" id="{F91E71F4-B3C8-4029-AD39-52A603440541}"/>
+                <a16:creationId xmlns:a16="http://schemas.microsoft.com/office/drawing/2014/main" id="{62A2B889-5587-4EA4-ACAD-66A16641BC72}"/>
               </a:ext>
             </a:extLst>
           </p:cNvPr>
@@ -10390,7 +13377,7 @@
           <p:cNvPr id="38" name="">
             <a:extLst xmlns:a="http://schemas.openxmlformats.org/drawingml/2006/main">
               <a:ext uri="{FF2B5EF4-FFF2-40B4-BE49-F238E27FC236}">
-                <a16:creationId xmlns:a16="http://schemas.microsoft.com/office/drawing/2014/main" id="{5E3EA284-C1F7-4188-8E9F-0F1DC19A18D8}"/>
+                <a16:creationId xmlns:a16="http://schemas.microsoft.com/office/drawing/2014/main" id="{EC81EDE3-AB22-4F5B-B057-AF91D9D88A23}"/>
               </a:ext>
             </a:extLst>
           </p:cNvPr>
@@ -10452,7 +13439,7 @@
     </p:spTree>
     <p:extLst>
       <p:ext uri="{BB962C8B-B14F-4D97-AF65-F5344CB8AC3E}">
-        <p14:creationId xmlns:p14="http://schemas.microsoft.com/office/powerpoint/2010/main" val="1689679489"/>
+        <p14:creationId xmlns:p14="http://schemas.microsoft.com/office/powerpoint/2010/main" val="1667363891"/>
       </p:ext>
     </p:extLst>
   </p:cSld>
@@ -10476,7 +13463,7 @@
           <p:cNvPr id="1" name="">
             <a:extLst xmlns:a="http://schemas.openxmlformats.org/drawingml/2006/main">
               <a:ext uri="{FF2B5EF4-FFF2-40B4-BE49-F238E27FC236}">
-                <a16:creationId xmlns:a16="http://schemas.microsoft.com/office/drawing/2014/main" id="{46FC17CC-2932-4B81-AC2B-9699C3603566}"/>
+                <a16:creationId xmlns:a16="http://schemas.microsoft.com/office/drawing/2014/main" id="{D28C0A49-8CEC-430E-A879-D8B85E1298A4}"/>
               </a:ext>
             </a:extLst>
           </p:cNvPr>
@@ -10511,7 +13498,7 @@
           <p:cNvPr id="2" name="">
             <a:extLst xmlns:a="http://schemas.openxmlformats.org/drawingml/2006/main">
               <a:ext uri="{FF2B5EF4-FFF2-40B4-BE49-F238E27FC236}">
-                <a16:creationId xmlns:a16="http://schemas.microsoft.com/office/drawing/2014/main" id="{258F96A5-D970-4762-8A76-A85308FF4998}"/>
+                <a16:creationId xmlns:a16="http://schemas.microsoft.com/office/drawing/2014/main" id="{F00BE6B3-6AF0-4CC8-BC8F-62D01D900E14}"/>
               </a:ext>
             </a:extLst>
           </p:cNvPr>
@@ -10546,7 +13533,7 @@
           <p:cNvPr id="3" name="">
             <a:extLst xmlns:a="http://schemas.openxmlformats.org/drawingml/2006/main">
               <a:ext uri="{FF2B5EF4-FFF2-40B4-BE49-F238E27FC236}">
-                <a16:creationId xmlns:a16="http://schemas.microsoft.com/office/drawing/2014/main" id="{5253D758-B47C-441A-965B-A2431B54393A}"/>
+                <a16:creationId xmlns:a16="http://schemas.microsoft.com/office/drawing/2014/main" id="{89D882C8-6227-428D-BD74-408A5C80896E}"/>
               </a:ext>
             </a:extLst>
           </p:cNvPr>
@@ -10610,7 +13597,7 @@
           <p:cNvPr id="4" name="">
             <a:extLst xmlns:a="http://schemas.openxmlformats.org/drawingml/2006/main">
               <a:ext uri="{FF2B5EF4-FFF2-40B4-BE49-F238E27FC236}">
-                <a16:creationId xmlns:a16="http://schemas.microsoft.com/office/drawing/2014/main" id="{8C02692D-4090-4E37-86FB-91BAC739898A}"/>
+                <a16:creationId xmlns:a16="http://schemas.microsoft.com/office/drawing/2014/main" id="{F8485358-1476-44A7-8F22-AD2D7D675A4D}"/>
               </a:ext>
             </a:extLst>
           </p:cNvPr>
@@ -10697,7 +13684,7 @@
           <p:cNvPr id="5" name="">
             <a:extLst xmlns:a="http://schemas.openxmlformats.org/drawingml/2006/main">
               <a:ext uri="{FF2B5EF4-FFF2-40B4-BE49-F238E27FC236}">
-                <a16:creationId xmlns:a16="http://schemas.microsoft.com/office/drawing/2014/main" id="{284BF6BF-4424-4DF0-BB4E-EB863F01E7FC}"/>
+                <a16:creationId xmlns:a16="http://schemas.microsoft.com/office/drawing/2014/main" id="{1ADB16EC-E6DC-48B4-8EBB-963A97740DA3}"/>
               </a:ext>
             </a:extLst>
           </p:cNvPr>
@@ -10730,7 +13717,7 @@
           <p:cNvPr id="6" name="">
             <a:extLst xmlns:a="http://schemas.openxmlformats.org/drawingml/2006/main">
               <a:ext uri="{FF2B5EF4-FFF2-40B4-BE49-F238E27FC236}">
-                <a16:creationId xmlns:a16="http://schemas.microsoft.com/office/drawing/2014/main" id="{94116160-C190-4C68-8B4B-A7EFE4AB730E}"/>
+                <a16:creationId xmlns:a16="http://schemas.microsoft.com/office/drawing/2014/main" id="{962C9ED4-AE5A-4D50-B3B5-028B2719EA8C}"/>
               </a:ext>
             </a:extLst>
           </p:cNvPr>
@@ -10794,7 +13781,7 @@
           <p:cNvPr id="7" name="">
             <a:extLst xmlns:a="http://schemas.openxmlformats.org/drawingml/2006/main">
               <a:ext uri="{FF2B5EF4-FFF2-40B4-BE49-F238E27FC236}">
-                <a16:creationId xmlns:a16="http://schemas.microsoft.com/office/drawing/2014/main" id="{999F23A7-4C01-4023-BE17-E07F547A935D}"/>
+                <a16:creationId xmlns:a16="http://schemas.microsoft.com/office/drawing/2014/main" id="{48D079B5-3897-422E-8578-39193DA2181B}"/>
               </a:ext>
             </a:extLst>
           </p:cNvPr>
@@ -10904,7 +13891,7 @@
           <p:cNvPr id="8" name="">
             <a:extLst xmlns:a="http://schemas.openxmlformats.org/drawingml/2006/main">
               <a:ext uri="{FF2B5EF4-FFF2-40B4-BE49-F238E27FC236}">
-                <a16:creationId xmlns:a16="http://schemas.microsoft.com/office/drawing/2014/main" id="{3C36EC16-7A9C-40FF-82AF-AB7781C4151C}"/>
+                <a16:creationId xmlns:a16="http://schemas.microsoft.com/office/drawing/2014/main" id="{D37F3EB8-8FD7-4A1C-8A28-04245BF05CCD}"/>
               </a:ext>
             </a:extLst>
           </p:cNvPr>
@@ -10939,7 +13926,7 @@
           <p:cNvPr id="9" name="">
             <a:extLst xmlns:a="http://schemas.openxmlformats.org/drawingml/2006/main">
               <a:ext uri="{FF2B5EF4-FFF2-40B4-BE49-F238E27FC236}">
-                <a16:creationId xmlns:a16="http://schemas.microsoft.com/office/drawing/2014/main" id="{06E4AB34-26F5-46AD-8492-FF4B3909C84E}"/>
+                <a16:creationId xmlns:a16="http://schemas.microsoft.com/office/drawing/2014/main" id="{DAAF78CA-22BB-48FE-8059-075E2163B5A5}"/>
               </a:ext>
             </a:extLst>
           </p:cNvPr>
@@ -11003,7 +13990,7 @@
           <p:cNvPr id="10" name="">
             <a:extLst xmlns:a="http://schemas.openxmlformats.org/drawingml/2006/main">
               <a:ext uri="{FF2B5EF4-FFF2-40B4-BE49-F238E27FC236}">
-                <a16:creationId xmlns:a16="http://schemas.microsoft.com/office/drawing/2014/main" id="{F9B96748-77CB-48B5-9341-4F72CE833BDB}"/>
+                <a16:creationId xmlns:a16="http://schemas.microsoft.com/office/drawing/2014/main" id="{63468F42-2471-49A5-BCB7-715378774396}"/>
               </a:ext>
             </a:extLst>
           </p:cNvPr>
@@ -11036,7 +14023,7 @@
           <p:cNvPr id="11" name="">
             <a:extLst xmlns:a="http://schemas.openxmlformats.org/drawingml/2006/main">
               <a:ext uri="{FF2B5EF4-FFF2-40B4-BE49-F238E27FC236}">
-                <a16:creationId xmlns:a16="http://schemas.microsoft.com/office/drawing/2014/main" id="{CFE4C61C-95D1-4FCB-9ACA-3545A0ABDDBB}"/>
+                <a16:creationId xmlns:a16="http://schemas.microsoft.com/office/drawing/2014/main" id="{23ECFFB6-19C9-4A54-AB8D-EA7CE22B423A}"/>
               </a:ext>
             </a:extLst>
           </p:cNvPr>
@@ -11100,7 +14087,7 @@
           <p:cNvPr id="12" name="">
             <a:extLst xmlns:a="http://schemas.openxmlformats.org/drawingml/2006/main">
               <a:ext uri="{FF2B5EF4-FFF2-40B4-BE49-F238E27FC236}">
-                <a16:creationId xmlns:a16="http://schemas.microsoft.com/office/drawing/2014/main" id="{F993FAAD-B0E4-44B4-9FF4-C2BCC9BFFE2A}"/>
+                <a16:creationId xmlns:a16="http://schemas.microsoft.com/office/drawing/2014/main" id="{2E75FD67-8619-432D-88C2-E3F4F179E059}"/>
               </a:ext>
             </a:extLst>
           </p:cNvPr>
@@ -11233,7 +14220,7 @@
           <p:cNvPr id="13" name="">
             <a:extLst xmlns:a="http://schemas.openxmlformats.org/drawingml/2006/main">
               <a:ext uri="{FF2B5EF4-FFF2-40B4-BE49-F238E27FC236}">
-                <a16:creationId xmlns:a16="http://schemas.microsoft.com/office/drawing/2014/main" id="{6851F305-EEFE-46D8-A9E4-A7A3FA195E7D}"/>
+                <a16:creationId xmlns:a16="http://schemas.microsoft.com/office/drawing/2014/main" id="{A13EC61E-4D34-469E-BA84-4C28EEFABDD9}"/>
               </a:ext>
             </a:extLst>
           </p:cNvPr>
@@ -11268,7 +14255,7 @@
           <p:cNvPr id="14" name="">
             <a:extLst xmlns:a="http://schemas.openxmlformats.org/drawingml/2006/main">
               <a:ext uri="{FF2B5EF4-FFF2-40B4-BE49-F238E27FC236}">
-                <a16:creationId xmlns:a16="http://schemas.microsoft.com/office/drawing/2014/main" id="{766283BC-7AEE-432E-A334-141DE38E1F5D}"/>
+                <a16:creationId xmlns:a16="http://schemas.microsoft.com/office/drawing/2014/main" id="{5F05355C-E02D-4B6D-ADFA-B211ED840F14}"/>
               </a:ext>
             </a:extLst>
           </p:cNvPr>
@@ -11332,7 +14319,7 @@
           <p:cNvPr id="15" name="">
             <a:extLst xmlns:a="http://schemas.openxmlformats.org/drawingml/2006/main">
               <a:ext uri="{FF2B5EF4-FFF2-40B4-BE49-F238E27FC236}">
-                <a16:creationId xmlns:a16="http://schemas.microsoft.com/office/drawing/2014/main" id="{025C8F1A-CACA-4195-BEA8-9ADB27F5577B}"/>
+                <a16:creationId xmlns:a16="http://schemas.microsoft.com/office/drawing/2014/main" id="{BD2EA759-B81E-44E8-B1F3-B496D8296290}"/>
               </a:ext>
             </a:extLst>
           </p:cNvPr>
@@ -11365,7 +14352,7 @@
           <p:cNvPr id="16" name="">
             <a:extLst xmlns:a="http://schemas.openxmlformats.org/drawingml/2006/main">
               <a:ext uri="{FF2B5EF4-FFF2-40B4-BE49-F238E27FC236}">
-                <a16:creationId xmlns:a16="http://schemas.microsoft.com/office/drawing/2014/main" id="{99D3A3C0-39BC-47CF-BE4C-334A823ECD5D}"/>
+                <a16:creationId xmlns:a16="http://schemas.microsoft.com/office/drawing/2014/main" id="{0A6E5A81-0A11-494B-9E63-7B8AFAFC46C7}"/>
               </a:ext>
             </a:extLst>
           </p:cNvPr>
@@ -11429,7 +14416,7 @@
           <p:cNvPr id="17" name="">
             <a:extLst xmlns:a="http://schemas.openxmlformats.org/drawingml/2006/main">
               <a:ext uri="{FF2B5EF4-FFF2-40B4-BE49-F238E27FC236}">
-                <a16:creationId xmlns:a16="http://schemas.microsoft.com/office/drawing/2014/main" id="{275CC2C8-8921-40E5-BB3B-D2C7A6C3CE27}"/>
+                <a16:creationId xmlns:a16="http://schemas.microsoft.com/office/drawing/2014/main" id="{0DF54095-9794-45CE-9343-A35BAC56231A}"/>
               </a:ext>
             </a:extLst>
           </p:cNvPr>
@@ -11562,7 +14549,7 @@
           <p:cNvPr id="18" name="">
             <a:extLst xmlns:a="http://schemas.openxmlformats.org/drawingml/2006/main">
               <a:ext uri="{FF2B5EF4-FFF2-40B4-BE49-F238E27FC236}">
-                <a16:creationId xmlns:a16="http://schemas.microsoft.com/office/drawing/2014/main" id="{AC555352-E6B7-4786-8CFD-80695F2EB591}"/>
+                <a16:creationId xmlns:a16="http://schemas.microsoft.com/office/drawing/2014/main" id="{AE80C132-864A-431C-88DC-2CB856EB5629}"/>
               </a:ext>
             </a:extLst>
           </p:cNvPr>
@@ -11597,7 +14584,7 @@
           <p:cNvPr id="19" name="">
             <a:extLst xmlns:a="http://schemas.openxmlformats.org/drawingml/2006/main">
               <a:ext uri="{FF2B5EF4-FFF2-40B4-BE49-F238E27FC236}">
-                <a16:creationId xmlns:a16="http://schemas.microsoft.com/office/drawing/2014/main" id="{84C641F1-C42D-47BD-BAC3-BC764FF2AD1E}"/>
+                <a16:creationId xmlns:a16="http://schemas.microsoft.com/office/drawing/2014/main" id="{801E1E36-93A5-41D6-83D2-7EBE0F9EB289}"/>
               </a:ext>
             </a:extLst>
           </p:cNvPr>
@@ -11661,7 +14648,7 @@
           <p:cNvPr id="20" name="">
             <a:extLst xmlns:a="http://schemas.openxmlformats.org/drawingml/2006/main">
               <a:ext uri="{FF2B5EF4-FFF2-40B4-BE49-F238E27FC236}">
-                <a16:creationId xmlns:a16="http://schemas.microsoft.com/office/drawing/2014/main" id="{5E363CA8-497E-42DC-A268-6398CF3CF2E5}"/>
+                <a16:creationId xmlns:a16="http://schemas.microsoft.com/office/drawing/2014/main" id="{C6F671AD-9C48-470B-A961-06233BB9F3D1}"/>
               </a:ext>
             </a:extLst>
           </p:cNvPr>
@@ -11696,7 +14683,7 @@
           <p:cNvPr id="21" name="">
             <a:extLst xmlns:a="http://schemas.openxmlformats.org/drawingml/2006/main">
               <a:ext uri="{FF2B5EF4-FFF2-40B4-BE49-F238E27FC236}">
-                <a16:creationId xmlns:a16="http://schemas.microsoft.com/office/drawing/2014/main" id="{F877D911-515C-4721-A7C0-1D791D4BD23D}"/>
+                <a16:creationId xmlns:a16="http://schemas.microsoft.com/office/drawing/2014/main" id="{056B5094-FBFA-4E55-BBB5-CE48B082ED79}"/>
               </a:ext>
             </a:extLst>
           </p:cNvPr>
@@ -11758,7 +14745,7 @@
     </p:spTree>
     <p:extLst>
       <p:ext uri="{BB962C8B-B14F-4D97-AF65-F5344CB8AC3E}">
-        <p14:creationId xmlns:p14="http://schemas.microsoft.com/office/powerpoint/2010/main" val="108252897"/>
+        <p14:creationId xmlns:p14="http://schemas.microsoft.com/office/powerpoint/2010/main" val="81659721"/>
       </p:ext>
     </p:extLst>
   </p:cSld>
@@ -11782,7 +14769,7 @@
           <p:cNvPr id="1" name="">
             <a:extLst xmlns:a="http://schemas.openxmlformats.org/drawingml/2006/main">
               <a:ext uri="{FF2B5EF4-FFF2-40B4-BE49-F238E27FC236}">
-                <a16:creationId xmlns:a16="http://schemas.microsoft.com/office/drawing/2014/main" id="{0134AA94-B5E5-4D92-9DA4-77A21F81BA96}"/>
+                <a16:creationId xmlns:a16="http://schemas.microsoft.com/office/drawing/2014/main" id="{F1504C4B-83B0-4B40-89A6-8DB497FCC192}"/>
               </a:ext>
             </a:extLst>
           </p:cNvPr>
@@ -11817,7 +14804,7 @@
           <p:cNvPr id="2" name="">
             <a:extLst xmlns:a="http://schemas.openxmlformats.org/drawingml/2006/main">
               <a:ext uri="{FF2B5EF4-FFF2-40B4-BE49-F238E27FC236}">
-                <a16:creationId xmlns:a16="http://schemas.microsoft.com/office/drawing/2014/main" id="{57628E14-8D66-417B-AF33-4ADE6B00B5A2}"/>
+                <a16:creationId xmlns:a16="http://schemas.microsoft.com/office/drawing/2014/main" id="{AEDAC9F0-1D6F-4DE8-808D-419F24C2DE44}"/>
               </a:ext>
             </a:extLst>
           </p:cNvPr>
@@ -11852,7 +14839,7 @@
           <p:cNvPr id="3" name="">
             <a:extLst xmlns:a="http://schemas.openxmlformats.org/drawingml/2006/main">
               <a:ext uri="{FF2B5EF4-FFF2-40B4-BE49-F238E27FC236}">
-                <a16:creationId xmlns:a16="http://schemas.microsoft.com/office/drawing/2014/main" id="{50925574-02E0-423A-8CE0-8CC5AA5BE5F3}"/>
+                <a16:creationId xmlns:a16="http://schemas.microsoft.com/office/drawing/2014/main" id="{A49A8017-10CF-4430-A841-FD8DA8EDCF32}"/>
               </a:ext>
             </a:extLst>
           </p:cNvPr>
@@ -11916,7 +14903,7 @@
           <p:cNvPr id="4" name="">
             <a:extLst xmlns:a="http://schemas.openxmlformats.org/drawingml/2006/main">
               <a:ext uri="{FF2B5EF4-FFF2-40B4-BE49-F238E27FC236}">
-                <a16:creationId xmlns:a16="http://schemas.microsoft.com/office/drawing/2014/main" id="{0592D556-EF4B-4EE3-B589-6E158F38C6BE}"/>
+                <a16:creationId xmlns:a16="http://schemas.microsoft.com/office/drawing/2014/main" id="{65DB1221-BAAB-46B3-90BC-B99847806B38}"/>
               </a:ext>
             </a:extLst>
           </p:cNvPr>
@@ -12003,7 +14990,7 @@
           <p:cNvPr id="5" name="">
             <a:extLst xmlns:a="http://schemas.openxmlformats.org/drawingml/2006/main">
               <a:ext uri="{FF2B5EF4-FFF2-40B4-BE49-F238E27FC236}">
-                <a16:creationId xmlns:a16="http://schemas.microsoft.com/office/drawing/2014/main" id="{69F8ED03-9676-4C19-834E-069AB15792E4}"/>
+                <a16:creationId xmlns:a16="http://schemas.microsoft.com/office/drawing/2014/main" id="{416E7503-ED82-44BD-8A22-55EA274DD0A9}"/>
               </a:ext>
             </a:extLst>
           </p:cNvPr>
@@ -12036,7 +15023,7 @@
           <p:cNvPr id="6" name="">
             <a:extLst xmlns:a="http://schemas.openxmlformats.org/drawingml/2006/main">
               <a:ext uri="{FF2B5EF4-FFF2-40B4-BE49-F238E27FC236}">
-                <a16:creationId xmlns:a16="http://schemas.microsoft.com/office/drawing/2014/main" id="{23E80725-6599-49A7-82E1-86F6CE20AF38}"/>
+                <a16:creationId xmlns:a16="http://schemas.microsoft.com/office/drawing/2014/main" id="{B9BC29FC-8F82-4BA2-8824-AB72DDA80AC0}"/>
               </a:ext>
             </a:extLst>
           </p:cNvPr>
@@ -12100,7 +15087,7 @@
           <p:cNvPr id="7" name="">
             <a:extLst xmlns:a="http://schemas.openxmlformats.org/drawingml/2006/main">
               <a:ext uri="{FF2B5EF4-FFF2-40B4-BE49-F238E27FC236}">
-                <a16:creationId xmlns:a16="http://schemas.microsoft.com/office/drawing/2014/main" id="{C4165240-1E1C-4A76-A639-76A9431AAFCD}"/>
+                <a16:creationId xmlns:a16="http://schemas.microsoft.com/office/drawing/2014/main" id="{67053EC1-EB49-47DF-8423-4ECB17320E03}"/>
               </a:ext>
             </a:extLst>
           </p:cNvPr>
@@ -12133,7 +15120,7 @@
           <p:cNvPr id="8" name="">
             <a:extLst xmlns:a="http://schemas.openxmlformats.org/drawingml/2006/main">
               <a:ext uri="{FF2B5EF4-FFF2-40B4-BE49-F238E27FC236}">
-                <a16:creationId xmlns:a16="http://schemas.microsoft.com/office/drawing/2014/main" id="{4E993196-F5DE-4698-B394-A8B1DA14AF25}"/>
+                <a16:creationId xmlns:a16="http://schemas.microsoft.com/office/drawing/2014/main" id="{D072543F-1D38-4DE7-9A86-0A213A867DB4}"/>
               </a:ext>
             </a:extLst>
           </p:cNvPr>
@@ -12197,7 +15184,7 @@
           <p:cNvPr id="9" name="">
             <a:extLst xmlns:a="http://schemas.openxmlformats.org/drawingml/2006/main">
               <a:ext uri="{FF2B5EF4-FFF2-40B4-BE49-F238E27FC236}">
-                <a16:creationId xmlns:a16="http://schemas.microsoft.com/office/drawing/2014/main" id="{B35B02DF-91B3-44EE-AC6F-A3702FEC8056}"/>
+                <a16:creationId xmlns:a16="http://schemas.microsoft.com/office/drawing/2014/main" id="{1E9DE218-04B9-4C43-814F-E8E28924C268}"/>
               </a:ext>
             </a:extLst>
           </p:cNvPr>
@@ -12230,7 +15217,7 @@
           <p:cNvPr id="10" name="">
             <a:extLst xmlns:a="http://schemas.openxmlformats.org/drawingml/2006/main">
               <a:ext uri="{FF2B5EF4-FFF2-40B4-BE49-F238E27FC236}">
-                <a16:creationId xmlns:a16="http://schemas.microsoft.com/office/drawing/2014/main" id="{F564EC9F-15C3-4BFE-A08A-C7473FE6D3B8}"/>
+                <a16:creationId xmlns:a16="http://schemas.microsoft.com/office/drawing/2014/main" id="{73FF5200-43FB-4B02-B732-E5C215381799}"/>
               </a:ext>
             </a:extLst>
           </p:cNvPr>
@@ -12294,7 +15281,7 @@
           <p:cNvPr id="11" name="">
             <a:extLst xmlns:a="http://schemas.openxmlformats.org/drawingml/2006/main">
               <a:ext uri="{FF2B5EF4-FFF2-40B4-BE49-F238E27FC236}">
-                <a16:creationId xmlns:a16="http://schemas.microsoft.com/office/drawing/2014/main" id="{A228897F-2B29-40C9-AE17-15AD944CF2E6}"/>
+                <a16:creationId xmlns:a16="http://schemas.microsoft.com/office/drawing/2014/main" id="{EDBA6C68-D70D-4ABC-A164-392380693BE1}"/>
               </a:ext>
             </a:extLst>
           </p:cNvPr>
@@ -12327,7 +15314,7 @@
           <p:cNvPr id="12" name="">
             <a:extLst xmlns:a="http://schemas.openxmlformats.org/drawingml/2006/main">
               <a:ext uri="{FF2B5EF4-FFF2-40B4-BE49-F238E27FC236}">
-                <a16:creationId xmlns:a16="http://schemas.microsoft.com/office/drawing/2014/main" id="{363853CD-30FB-4E04-A93F-80249E9A5DD1}"/>
+                <a16:creationId xmlns:a16="http://schemas.microsoft.com/office/drawing/2014/main" id="{B92A12EC-C20B-4C2B-A084-B03EC411DF0F}"/>
               </a:ext>
             </a:extLst>
           </p:cNvPr>
@@ -12391,7 +15378,7 @@
           <p:cNvPr id="13" name="">
             <a:extLst xmlns:a="http://schemas.openxmlformats.org/drawingml/2006/main">
               <a:ext uri="{FF2B5EF4-FFF2-40B4-BE49-F238E27FC236}">
-                <a16:creationId xmlns:a16="http://schemas.microsoft.com/office/drawing/2014/main" id="{D53FC007-2F5C-4A16-A2BB-C12B260DE863}"/>
+                <a16:creationId xmlns:a16="http://schemas.microsoft.com/office/drawing/2014/main" id="{F869C0A1-622A-4A08-8097-C29291FCD079}"/>
               </a:ext>
             </a:extLst>
           </p:cNvPr>
@@ -12424,7 +15411,7 @@
           <p:cNvPr id="14" name="">
             <a:extLst xmlns:a="http://schemas.openxmlformats.org/drawingml/2006/main">
               <a:ext uri="{FF2B5EF4-FFF2-40B4-BE49-F238E27FC236}">
-                <a16:creationId xmlns:a16="http://schemas.microsoft.com/office/drawing/2014/main" id="{F84FC669-0A5B-4A0D-A9CF-F89E7AFBE551}"/>
+                <a16:creationId xmlns:a16="http://schemas.microsoft.com/office/drawing/2014/main" id="{80BF56F1-874C-4990-8C98-A53011A68A78}"/>
               </a:ext>
             </a:extLst>
           </p:cNvPr>
@@ -12488,7 +15475,7 @@
           <p:cNvPr id="15" name="">
             <a:extLst xmlns:a="http://schemas.openxmlformats.org/drawingml/2006/main">
               <a:ext uri="{FF2B5EF4-FFF2-40B4-BE49-F238E27FC236}">
-                <a16:creationId xmlns:a16="http://schemas.microsoft.com/office/drawing/2014/main" id="{E76E6878-A11A-4650-938E-61F5906E1DD8}"/>
+                <a16:creationId xmlns:a16="http://schemas.microsoft.com/office/drawing/2014/main" id="{F33055EA-8384-45BD-A088-AF3C5C0D9B44}"/>
               </a:ext>
             </a:extLst>
           </p:cNvPr>
@@ -12521,7 +15508,7 @@
           <p:cNvPr id="16" name="">
             <a:extLst xmlns:a="http://schemas.openxmlformats.org/drawingml/2006/main">
               <a:ext uri="{FF2B5EF4-FFF2-40B4-BE49-F238E27FC236}">
-                <a16:creationId xmlns:a16="http://schemas.microsoft.com/office/drawing/2014/main" id="{37D7A4FB-DFF6-4571-B844-3D43F7F4EBA0}"/>
+                <a16:creationId xmlns:a16="http://schemas.microsoft.com/office/drawing/2014/main" id="{3F35FC82-443F-4A9E-8D08-7FD39D94F2B7}"/>
               </a:ext>
             </a:extLst>
           </p:cNvPr>
@@ -12585,7 +15572,7 @@
           <p:cNvPr id="17" name="">
             <a:extLst xmlns:a="http://schemas.openxmlformats.org/drawingml/2006/main">
               <a:ext uri="{FF2B5EF4-FFF2-40B4-BE49-F238E27FC236}">
-                <a16:creationId xmlns:a16="http://schemas.microsoft.com/office/drawing/2014/main" id="{E45C1D7A-CB2C-4201-82D2-FA4381B4B9E3}"/>
+                <a16:creationId xmlns:a16="http://schemas.microsoft.com/office/drawing/2014/main" id="{11DF77CC-E742-47E9-B86E-2B566A9E73A0}"/>
               </a:ext>
             </a:extLst>
           </p:cNvPr>
@@ -12618,7 +15605,7 @@
           <p:cNvPr id="18" name="">
             <a:extLst xmlns:a="http://schemas.openxmlformats.org/drawingml/2006/main">
               <a:ext uri="{FF2B5EF4-FFF2-40B4-BE49-F238E27FC236}">
-                <a16:creationId xmlns:a16="http://schemas.microsoft.com/office/drawing/2014/main" id="{0DF53AE9-60D7-4ABF-8601-36FB85DE5871}"/>
+                <a16:creationId xmlns:a16="http://schemas.microsoft.com/office/drawing/2014/main" id="{3A7699D8-0112-4533-89F1-5747129406B7}"/>
               </a:ext>
             </a:extLst>
           </p:cNvPr>
@@ -12705,7 +15692,7 @@
           <p:cNvPr id="19" name="">
             <a:extLst xmlns:a="http://schemas.openxmlformats.org/drawingml/2006/main">
               <a:ext uri="{FF2B5EF4-FFF2-40B4-BE49-F238E27FC236}">
-                <a16:creationId xmlns:a16="http://schemas.microsoft.com/office/drawing/2014/main" id="{7C54BA76-875B-4170-BD79-E7514576BF0C}"/>
+                <a16:creationId xmlns:a16="http://schemas.microsoft.com/office/drawing/2014/main" id="{0624325D-B8C7-4BBE-B2F7-1C7B1E14C22C}"/>
               </a:ext>
             </a:extLst>
           </p:cNvPr>
@@ -12738,7 +15725,7 @@
           <p:cNvPr id="20" name="">
             <a:extLst xmlns:a="http://schemas.openxmlformats.org/drawingml/2006/main">
               <a:ext uri="{FF2B5EF4-FFF2-40B4-BE49-F238E27FC236}">
-                <a16:creationId xmlns:a16="http://schemas.microsoft.com/office/drawing/2014/main" id="{85678384-CFC5-4415-8231-8CEDB07A06F7}"/>
+                <a16:creationId xmlns:a16="http://schemas.microsoft.com/office/drawing/2014/main" id="{13EEDE69-AD97-4CF0-B777-C3FEAEE67710}"/>
               </a:ext>
             </a:extLst>
           </p:cNvPr>
@@ -12802,7 +15789,7 @@
           <p:cNvPr id="21" name="">
             <a:extLst xmlns:a="http://schemas.openxmlformats.org/drawingml/2006/main">
               <a:ext uri="{FF2B5EF4-FFF2-40B4-BE49-F238E27FC236}">
-                <a16:creationId xmlns:a16="http://schemas.microsoft.com/office/drawing/2014/main" id="{FBF76C86-286C-4BD5-9EAD-DEBC28841CC1}"/>
+                <a16:creationId xmlns:a16="http://schemas.microsoft.com/office/drawing/2014/main" id="{FD78AAC5-172A-468F-9934-6D9973828E37}"/>
               </a:ext>
             </a:extLst>
           </p:cNvPr>
@@ -12835,7 +15822,7 @@
           <p:cNvPr id="22" name="">
             <a:extLst xmlns:a="http://schemas.openxmlformats.org/drawingml/2006/main">
               <a:ext uri="{FF2B5EF4-FFF2-40B4-BE49-F238E27FC236}">
-                <a16:creationId xmlns:a16="http://schemas.microsoft.com/office/drawing/2014/main" id="{18DFC2D4-D9BA-4FD5-99E6-219310F47763}"/>
+                <a16:creationId xmlns:a16="http://schemas.microsoft.com/office/drawing/2014/main" id="{49DCDCF7-F7F5-4B96-8BC5-79011A3EA4E2}"/>
               </a:ext>
             </a:extLst>
           </p:cNvPr>
@@ -12899,7 +15886,7 @@
           <p:cNvPr id="23" name="">
             <a:extLst xmlns:a="http://schemas.openxmlformats.org/drawingml/2006/main">
               <a:ext uri="{FF2B5EF4-FFF2-40B4-BE49-F238E27FC236}">
-                <a16:creationId xmlns:a16="http://schemas.microsoft.com/office/drawing/2014/main" id="{37ED358E-5F21-4D5C-9C24-CD542B12E951}"/>
+                <a16:creationId xmlns:a16="http://schemas.microsoft.com/office/drawing/2014/main" id="{A61DAFD1-74D6-44F4-9941-20E74B0D4AE6}"/>
               </a:ext>
             </a:extLst>
           </p:cNvPr>
@@ -12932,7 +15919,7 @@
           <p:cNvPr id="24" name="">
             <a:extLst xmlns:a="http://schemas.openxmlformats.org/drawingml/2006/main">
               <a:ext uri="{FF2B5EF4-FFF2-40B4-BE49-F238E27FC236}">
-                <a16:creationId xmlns:a16="http://schemas.microsoft.com/office/drawing/2014/main" id="{DEBEAB98-1CBD-4A9D-B58F-2DBAD26DC927}"/>
+                <a16:creationId xmlns:a16="http://schemas.microsoft.com/office/drawing/2014/main" id="{15A37237-8FAB-4681-9BB0-8D76FBBE32FE}"/>
               </a:ext>
             </a:extLst>
           </p:cNvPr>
@@ -12996,7 +15983,7 @@
           <p:cNvPr id="25" name="">
             <a:extLst xmlns:a="http://schemas.openxmlformats.org/drawingml/2006/main">
               <a:ext uri="{FF2B5EF4-FFF2-40B4-BE49-F238E27FC236}">
-                <a16:creationId xmlns:a16="http://schemas.microsoft.com/office/drawing/2014/main" id="{6BF945B7-F024-4B63-9BD5-C0D83CC9763D}"/>
+                <a16:creationId xmlns:a16="http://schemas.microsoft.com/office/drawing/2014/main" id="{8B86A72A-B61C-43FA-A748-390F05BA1CDF}"/>
               </a:ext>
             </a:extLst>
           </p:cNvPr>
@@ -13029,7 +16016,7 @@
           <p:cNvPr id="26" name="">
             <a:extLst xmlns:a="http://schemas.openxmlformats.org/drawingml/2006/main">
               <a:ext uri="{FF2B5EF4-FFF2-40B4-BE49-F238E27FC236}">
-                <a16:creationId xmlns:a16="http://schemas.microsoft.com/office/drawing/2014/main" id="{9D81A5C0-A78E-4F3B-A237-EE6DF45FB7C8}"/>
+                <a16:creationId xmlns:a16="http://schemas.microsoft.com/office/drawing/2014/main" id="{F97211B9-50FE-497C-9FD2-A0CF5AA1FC9A}"/>
               </a:ext>
             </a:extLst>
           </p:cNvPr>
@@ -13116,7 +16103,7 @@
           <p:cNvPr id="27" name="">
             <a:extLst xmlns:a="http://schemas.openxmlformats.org/drawingml/2006/main">
               <a:ext uri="{FF2B5EF4-FFF2-40B4-BE49-F238E27FC236}">
-                <a16:creationId xmlns:a16="http://schemas.microsoft.com/office/drawing/2014/main" id="{BA9E5C25-1A21-4100-94FA-E76628DE9395}"/>
+                <a16:creationId xmlns:a16="http://schemas.microsoft.com/office/drawing/2014/main" id="{0BB3F288-986D-4E83-AB89-586ECE9E8917}"/>
               </a:ext>
             </a:extLst>
           </p:cNvPr>
@@ -13149,7 +16136,7 @@
           <p:cNvPr id="28" name="">
             <a:extLst xmlns:a="http://schemas.openxmlformats.org/drawingml/2006/main">
               <a:ext uri="{FF2B5EF4-FFF2-40B4-BE49-F238E27FC236}">
-                <a16:creationId xmlns:a16="http://schemas.microsoft.com/office/drawing/2014/main" id="{0B9BD47A-4B65-450D-AC27-3F829FE6434A}"/>
+                <a16:creationId xmlns:a16="http://schemas.microsoft.com/office/drawing/2014/main" id="{ABB965A5-081E-4FE9-9128-C6C62D5C376C}"/>
               </a:ext>
             </a:extLst>
           </p:cNvPr>
@@ -13213,7 +16200,7 @@
           <p:cNvPr id="29" name="">
             <a:extLst xmlns:a="http://schemas.openxmlformats.org/drawingml/2006/main">
               <a:ext uri="{FF2B5EF4-FFF2-40B4-BE49-F238E27FC236}">
-                <a16:creationId xmlns:a16="http://schemas.microsoft.com/office/drawing/2014/main" id="{69F2CBA7-46E6-4143-B75C-E513357BDAFD}"/>
+                <a16:creationId xmlns:a16="http://schemas.microsoft.com/office/drawing/2014/main" id="{A92EC5C5-C61D-4A49-BCDE-29D6F807E09B}"/>
               </a:ext>
             </a:extLst>
           </p:cNvPr>
@@ -13246,7 +16233,7 @@
           <p:cNvPr id="30" name="">
             <a:extLst xmlns:a="http://schemas.openxmlformats.org/drawingml/2006/main">
               <a:ext uri="{FF2B5EF4-FFF2-40B4-BE49-F238E27FC236}">
-                <a16:creationId xmlns:a16="http://schemas.microsoft.com/office/drawing/2014/main" id="{D6DB434B-17B6-4851-B705-A03D2253D4F5}"/>
+                <a16:creationId xmlns:a16="http://schemas.microsoft.com/office/drawing/2014/main" id="{9D6395C9-9F34-47DF-ADAF-DBBDF459762D}"/>
               </a:ext>
             </a:extLst>
           </p:cNvPr>
@@ -13310,7 +16297,7 @@
           <p:cNvPr id="31" name="">
             <a:extLst xmlns:a="http://schemas.openxmlformats.org/drawingml/2006/main">
               <a:ext uri="{FF2B5EF4-FFF2-40B4-BE49-F238E27FC236}">
-                <a16:creationId xmlns:a16="http://schemas.microsoft.com/office/drawing/2014/main" id="{EB12E6BB-CB6D-4703-BB89-FE8E1A1F4739}"/>
+                <a16:creationId xmlns:a16="http://schemas.microsoft.com/office/drawing/2014/main" id="{493ECFD9-87F4-4590-9822-50FEF424C727}"/>
               </a:ext>
             </a:extLst>
           </p:cNvPr>
@@ -13343,7 +16330,7 @@
           <p:cNvPr id="32" name="">
             <a:extLst xmlns:a="http://schemas.openxmlformats.org/drawingml/2006/main">
               <a:ext uri="{FF2B5EF4-FFF2-40B4-BE49-F238E27FC236}">
-                <a16:creationId xmlns:a16="http://schemas.microsoft.com/office/drawing/2014/main" id="{3AD3291E-999B-4EC6-AEEE-54E3D1A65DC8}"/>
+                <a16:creationId xmlns:a16="http://schemas.microsoft.com/office/drawing/2014/main" id="{C5B59007-CFBD-4261-BA81-F029CEE60C65}"/>
               </a:ext>
             </a:extLst>
           </p:cNvPr>
@@ -13407,7 +16394,7 @@
           <p:cNvPr id="33" name="">
             <a:extLst xmlns:a="http://schemas.openxmlformats.org/drawingml/2006/main">
               <a:ext uri="{FF2B5EF4-FFF2-40B4-BE49-F238E27FC236}">
-                <a16:creationId xmlns:a16="http://schemas.microsoft.com/office/drawing/2014/main" id="{9D869143-65A8-4E35-A9F1-96CAD976F43C}"/>
+                <a16:creationId xmlns:a16="http://schemas.microsoft.com/office/drawing/2014/main" id="{B7EC60FA-A7E2-4516-BE8E-E4BB432CCDB4}"/>
               </a:ext>
             </a:extLst>
           </p:cNvPr>
@@ -13440,7 +16427,7 @@
           <p:cNvPr id="34" name="">
             <a:extLst xmlns:a="http://schemas.openxmlformats.org/drawingml/2006/main">
               <a:ext uri="{FF2B5EF4-FFF2-40B4-BE49-F238E27FC236}">
-                <a16:creationId xmlns:a16="http://schemas.microsoft.com/office/drawing/2014/main" id="{66F5C090-0816-4953-BA31-2AB3B65B8BAA}"/>
+                <a16:creationId xmlns:a16="http://schemas.microsoft.com/office/drawing/2014/main" id="{B52B691B-7CF9-428A-A200-AF4035BF94BE}"/>
               </a:ext>
             </a:extLst>
           </p:cNvPr>
@@ -13527,7 +16514,7 @@
           <p:cNvPr id="35" name="">
             <a:extLst xmlns:a="http://schemas.openxmlformats.org/drawingml/2006/main">
               <a:ext uri="{FF2B5EF4-FFF2-40B4-BE49-F238E27FC236}">
-                <a16:creationId xmlns:a16="http://schemas.microsoft.com/office/drawing/2014/main" id="{230058C0-6409-4411-8223-8C7F8CBB63C9}"/>
+                <a16:creationId xmlns:a16="http://schemas.microsoft.com/office/drawing/2014/main" id="{083BAB9F-91D4-4AB2-8AB0-FB89639E3B49}"/>
               </a:ext>
             </a:extLst>
           </p:cNvPr>
@@ -13560,7 +16547,7 @@
           <p:cNvPr id="36" name="">
             <a:extLst xmlns:a="http://schemas.openxmlformats.org/drawingml/2006/main">
               <a:ext uri="{FF2B5EF4-FFF2-40B4-BE49-F238E27FC236}">
-                <a16:creationId xmlns:a16="http://schemas.microsoft.com/office/drawing/2014/main" id="{5C7A2CEF-4E60-4440-A086-353E4F866EC2}"/>
+                <a16:creationId xmlns:a16="http://schemas.microsoft.com/office/drawing/2014/main" id="{AAB03633-4C99-45A4-86E0-AF0CDD5A99E7}"/>
               </a:ext>
             </a:extLst>
           </p:cNvPr>
@@ -13624,7 +16611,7 @@
           <p:cNvPr id="37" name="">
             <a:extLst xmlns:a="http://schemas.openxmlformats.org/drawingml/2006/main">
               <a:ext uri="{FF2B5EF4-FFF2-40B4-BE49-F238E27FC236}">
-                <a16:creationId xmlns:a16="http://schemas.microsoft.com/office/drawing/2014/main" id="{93CDFBBC-5497-4055-95F4-01C5F8B0BC16}"/>
+                <a16:creationId xmlns:a16="http://schemas.microsoft.com/office/drawing/2014/main" id="{2846DDAB-16AD-4E4E-86E4-AF1B91921919}"/>
               </a:ext>
             </a:extLst>
           </p:cNvPr>
@@ -13688,7 +16675,7 @@
           <p:cNvPr id="38" name="">
             <a:extLst xmlns:a="http://schemas.openxmlformats.org/drawingml/2006/main">
               <a:ext uri="{FF2B5EF4-FFF2-40B4-BE49-F238E27FC236}">
-                <a16:creationId xmlns:a16="http://schemas.microsoft.com/office/drawing/2014/main" id="{C3031AF3-ACA3-403B-AD70-A907BB908FAD}"/>
+                <a16:creationId xmlns:a16="http://schemas.microsoft.com/office/drawing/2014/main" id="{1781A5EA-C5E9-4E1F-B40F-68706E6B7E1A}"/>
               </a:ext>
             </a:extLst>
           </p:cNvPr>
@@ -13750,7 +16737,7 @@
     </p:spTree>
     <p:extLst>
       <p:ext uri="{BB962C8B-B14F-4D97-AF65-F5344CB8AC3E}">
-        <p14:creationId xmlns:p14="http://schemas.microsoft.com/office/powerpoint/2010/main" val="924358059"/>
+        <p14:creationId xmlns:p14="http://schemas.microsoft.com/office/powerpoint/2010/main" val="1094811981"/>
       </p:ext>
     </p:extLst>
   </p:cSld>
